--- a/Administration_serveur/Exercices/PowerPoint PowerShell.pptx
+++ b/Administration_serveur/Exercices/PowerPoint PowerShell.pptx
@@ -4,16 +4,21 @@
   <p:sldMasterIdLst>
     <p:sldMasterId id="2147483648" r:id="rId1"/>
   </p:sldMasterIdLst>
+  <p:notesMasterIdLst>
+    <p:notesMasterId r:id="rId13"/>
+  </p:notesMasterIdLst>
   <p:sldIdLst>
     <p:sldId id="256" r:id="rId2"/>
-    <p:sldId id="257" r:id="rId3"/>
-    <p:sldId id="259" r:id="rId4"/>
-    <p:sldId id="260" r:id="rId5"/>
-    <p:sldId id="261" r:id="rId6"/>
-    <p:sldId id="264" r:id="rId7"/>
-    <p:sldId id="262" r:id="rId8"/>
-    <p:sldId id="265" r:id="rId9"/>
-    <p:sldId id="266" r:id="rId10"/>
+    <p:sldId id="268" r:id="rId3"/>
+    <p:sldId id="257" r:id="rId4"/>
+    <p:sldId id="259" r:id="rId5"/>
+    <p:sldId id="260" r:id="rId6"/>
+    <p:sldId id="262" r:id="rId7"/>
+    <p:sldId id="264" r:id="rId8"/>
+    <p:sldId id="261" r:id="rId9"/>
+    <p:sldId id="265" r:id="rId10"/>
+    <p:sldId id="266" r:id="rId11"/>
+    <p:sldId id="267" r:id="rId12"/>
   </p:sldIdLst>
   <p:sldSz cx="12192000" cy="6858000"/>
   <p:notesSz cx="6858000" cy="9144000"/>
@@ -118,9 +123,8 @@
 <file path=ppt/revisionInfo.xml><?xml version="1.0" encoding="utf-8"?>
 <p1510:revInfo xmlns:a="http://schemas.openxmlformats.org/drawingml/2006/main" xmlns:r="http://schemas.openxmlformats.org/officeDocument/2006/relationships" xmlns:p1510="http://schemas.microsoft.com/office/powerpoint/2015/10/main">
   <p1510:revLst>
-    <p1510:client id="{25C55401-A386-6B45-C3EF-563D9179BF51}" v="2152" dt="2026-03-16T15:19:41.128"/>
-    <p1510:client id="{4D512EF5-CFB1-41F8-882D-A61268AD7A8E}" v="1302" dt="2026-03-16T08:40:24.212"/>
-    <p1510:client id="{B50A05E1-AFFE-5712-8ADC-0A3520EA8336}" v="151" dt="2026-03-16T19:22:41.329"/>
+    <p1510:client id="{31AF5C54-0B06-4177-A9F0-BCE0F5FFC897}" v="1" dt="2026-03-23T08:19:44.847"/>
+    <p1510:client id="{4674C1DA-8D81-4D6F-8BBF-5B54C65D0620}" v="5" dt="2026-03-23T08:05:43.430"/>
   </p1510:revLst>
 </p1510:revInfo>
 </file>
@@ -128,43 +132,44 @@
 <file path=ppt/changesInfos/changesInfo1.xml><?xml version="1.0" encoding="utf-8"?>
 <pc:chgInfo xmlns:a="http://schemas.openxmlformats.org/drawingml/2006/main" xmlns:r="http://schemas.openxmlformats.org/officeDocument/2006/relationships" xmlns:ac="http://schemas.microsoft.com/office/drawing/2013/main/command" xmlns:pc="http://schemas.microsoft.com/office/powerpoint/2013/main/command">
   <pc:docChgLst>
-    <pc:chgData name="Adin Durakovic" userId="2ad61b98-b0fd-44ad-ae05-75a98b948b59" providerId="ADAL" clId="{59C5C822-DDF8-46E0-A69C-E1E0435FEA74}"/>
-    <pc:docChg chg="undo custSel addSld delSld modSld">
-      <pc:chgData name="Adin Durakovic" userId="2ad61b98-b0fd-44ad-ae05-75a98b948b59" providerId="ADAL" clId="{59C5C822-DDF8-46E0-A69C-E1E0435FEA74}" dt="2026-03-16T08:40:24.212" v="1296" actId="14100"/>
+    <pc:chgData name="Emel Keres" userId="752d1ddc-804c-49ca-ad09-1c6c449e92da" providerId="ADAL" clId="{432E75ED-E203-414C-BE65-B3FE3A2E67DA}"/>
+    <pc:docChg chg="modSld sldOrd">
+      <pc:chgData name="Emel Keres" userId="752d1ddc-804c-49ca-ad09-1c6c449e92da" providerId="ADAL" clId="{432E75ED-E203-414C-BE65-B3FE3A2E67DA}" dt="2026-03-23T08:19:44.861" v="1"/>
+      <pc:docMkLst>
+        <pc:docMk/>
+      </pc:docMkLst>
+      <pc:sldChg chg="ord">
+        <pc:chgData name="Emel Keres" userId="752d1ddc-804c-49ca-ad09-1c6c449e92da" providerId="ADAL" clId="{432E75ED-E203-414C-BE65-B3FE3A2E67DA}" dt="2026-03-23T08:19:44.861" v="1"/>
+        <pc:sldMkLst>
+          <pc:docMk/>
+          <pc:sldMk cId="3055474279" sldId="265"/>
+        </pc:sldMkLst>
+      </pc:sldChg>
+    </pc:docChg>
+  </pc:docChgLst>
+  <pc:docChgLst>
+    <pc:chgData name="Emel Keres" userId="752d1ddc-804c-49ca-ad09-1c6c449e92da" providerId="ADAL" clId="{0429B13A-CCFC-46EC-9D2E-9EC40A1F5C46}"/>
+    <pc:docChg chg="custSel addSld delSld modSld sldOrd">
+      <pc:chgData name="Emel Keres" userId="752d1ddc-804c-49ca-ad09-1c6c449e92da" providerId="ADAL" clId="{0429B13A-CCFC-46EC-9D2E-9EC40A1F5C46}" dt="2026-03-23T08:14:01.410" v="534" actId="5793"/>
       <pc:docMkLst>
         <pc:docMk/>
       </pc:docMkLst>
       <pc:sldChg chg="modSp mod">
-        <pc:chgData name="Adin Durakovic" userId="2ad61b98-b0fd-44ad-ae05-75a98b948b59" providerId="ADAL" clId="{59C5C822-DDF8-46E0-A69C-E1E0435FEA74}" dt="2026-03-16T08:01:02.230" v="4" actId="14100"/>
-        <pc:sldMkLst>
-          <pc:docMk/>
-          <pc:sldMk cId="2952239631" sldId="256"/>
-        </pc:sldMkLst>
-        <pc:spChg chg="mod">
-          <ac:chgData name="Adin Durakovic" userId="2ad61b98-b0fd-44ad-ae05-75a98b948b59" providerId="ADAL" clId="{59C5C822-DDF8-46E0-A69C-E1E0435FEA74}" dt="2026-03-16T08:01:02.230" v="4" actId="14100"/>
-          <ac:spMkLst>
-            <pc:docMk/>
-            <pc:sldMk cId="2952239631" sldId="256"/>
-            <ac:spMk id="2" creationId="{A6677FA0-2093-0729-65C9-77321715374F}"/>
-          </ac:spMkLst>
-        </pc:spChg>
-      </pc:sldChg>
-      <pc:sldChg chg="modSp mod modClrScheme chgLayout">
-        <pc:chgData name="Adin Durakovic" userId="2ad61b98-b0fd-44ad-ae05-75a98b948b59" providerId="ADAL" clId="{59C5C822-DDF8-46E0-A69C-E1E0435FEA74}" dt="2026-03-16T08:00:44.535" v="1" actId="6264"/>
+        <pc:chgData name="Emel Keres" userId="752d1ddc-804c-49ca-ad09-1c6c449e92da" providerId="ADAL" clId="{0429B13A-CCFC-46EC-9D2E-9EC40A1F5C46}" dt="2026-03-23T07:56:25.081" v="470" actId="1076"/>
         <pc:sldMkLst>
           <pc:docMk/>
           <pc:sldMk cId="3746204366" sldId="257"/>
         </pc:sldMkLst>
-        <pc:spChg chg="mod ord">
-          <ac:chgData name="Adin Durakovic" userId="2ad61b98-b0fd-44ad-ae05-75a98b948b59" providerId="ADAL" clId="{59C5C822-DDF8-46E0-A69C-E1E0435FEA74}" dt="2026-03-16T08:00:44.535" v="1" actId="6264"/>
+        <pc:spChg chg="mod">
+          <ac:chgData name="Emel Keres" userId="752d1ddc-804c-49ca-ad09-1c6c449e92da" providerId="ADAL" clId="{0429B13A-CCFC-46EC-9D2E-9EC40A1F5C46}" dt="2026-03-23T07:56:25.081" v="470" actId="1076"/>
           <ac:spMkLst>
             <pc:docMk/>
             <pc:sldMk cId="3746204366" sldId="257"/>
             <ac:spMk id="2" creationId="{32E071F7-D8B0-BCA6-A062-54FF26992EC1}"/>
           </ac:spMkLst>
         </pc:spChg>
-        <pc:spChg chg="mod ord">
-          <ac:chgData name="Adin Durakovic" userId="2ad61b98-b0fd-44ad-ae05-75a98b948b59" providerId="ADAL" clId="{59C5C822-DDF8-46E0-A69C-E1E0435FEA74}" dt="2026-03-16T08:00:44.535" v="1" actId="6264"/>
+        <pc:spChg chg="mod">
+          <ac:chgData name="Emel Keres" userId="752d1ddc-804c-49ca-ad09-1c6c449e92da" providerId="ADAL" clId="{0429B13A-CCFC-46EC-9D2E-9EC40A1F5C46}" dt="2026-03-23T07:56:19.580" v="469" actId="1076"/>
           <ac:spMkLst>
             <pc:docMk/>
             <pc:sldMk cId="3746204366" sldId="257"/>
@@ -172,466 +177,14 @@
           </ac:spMkLst>
         </pc:spChg>
       </pc:sldChg>
-      <pc:sldChg chg="addSp delSp modSp new mod setBg">
-        <pc:chgData name="Adin Durakovic" userId="2ad61b98-b0fd-44ad-ae05-75a98b948b59" providerId="ADAL" clId="{59C5C822-DDF8-46E0-A69C-E1E0435FEA74}" dt="2026-03-16T08:40:24.212" v="1296" actId="14100"/>
-        <pc:sldMkLst>
-          <pc:docMk/>
-          <pc:sldMk cId="591358847" sldId="258"/>
-        </pc:sldMkLst>
-        <pc:spChg chg="del mod ord">
-          <ac:chgData name="Adin Durakovic" userId="2ad61b98-b0fd-44ad-ae05-75a98b948b59" providerId="ADAL" clId="{59C5C822-DDF8-46E0-A69C-E1E0435FEA74}" dt="2026-03-16T08:20:15.415" v="256" actId="21"/>
-          <ac:spMkLst>
-            <pc:docMk/>
-            <pc:sldMk cId="591358847" sldId="258"/>
-            <ac:spMk id="3" creationId="{6CBFE363-B8F5-7C38-CC9D-68DC1EBF95C1}"/>
-          </ac:spMkLst>
-        </pc:spChg>
-        <pc:spChg chg="add mod">
-          <ac:chgData name="Adin Durakovic" userId="2ad61b98-b0fd-44ad-ae05-75a98b948b59" providerId="ADAL" clId="{59C5C822-DDF8-46E0-A69C-E1E0435FEA74}" dt="2026-03-16T08:37:20.896" v="1294" actId="20577"/>
-          <ac:spMkLst>
-            <pc:docMk/>
-            <pc:sldMk cId="591358847" sldId="258"/>
-            <ac:spMk id="7" creationId="{4376E7ED-16CB-05FB-91CE-78293A73B5CA}"/>
-          </ac:spMkLst>
-        </pc:spChg>
-        <pc:spChg chg="add mod">
-          <ac:chgData name="Adin Durakovic" userId="2ad61b98-b0fd-44ad-ae05-75a98b948b59" providerId="ADAL" clId="{59C5C822-DDF8-46E0-A69C-E1E0435FEA74}" dt="2026-03-16T08:31:52.181" v="1042" actId="14100"/>
-          <ac:spMkLst>
-            <pc:docMk/>
-            <pc:sldMk cId="591358847" sldId="258"/>
-            <ac:spMk id="8" creationId="{50DF5D73-7738-8540-2C95-EDD208A4DFF5}"/>
-          </ac:spMkLst>
-        </pc:spChg>
-        <pc:spChg chg="add del">
-          <ac:chgData name="Adin Durakovic" userId="2ad61b98-b0fd-44ad-ae05-75a98b948b59" providerId="ADAL" clId="{59C5C822-DDF8-46E0-A69C-E1E0435FEA74}" dt="2026-03-16T08:14:41.688" v="15" actId="26606"/>
-          <ac:spMkLst>
-            <pc:docMk/>
-            <pc:sldMk cId="591358847" sldId="258"/>
-            <ac:spMk id="9" creationId="{D7A453D2-15D8-4403-815F-291FA16340D9}"/>
-          </ac:spMkLst>
-        </pc:spChg>
-        <pc:spChg chg="add mod">
-          <ac:chgData name="Adin Durakovic" userId="2ad61b98-b0fd-44ad-ae05-75a98b948b59" providerId="ADAL" clId="{59C5C822-DDF8-46E0-A69C-E1E0435FEA74}" dt="2026-03-16T08:31:55.366" v="1043" actId="14100"/>
-          <ac:spMkLst>
-            <pc:docMk/>
-            <pc:sldMk cId="591358847" sldId="258"/>
-            <ac:spMk id="10" creationId="{1E298B98-0D87-9547-6424-2A137F12A2C1}"/>
-          </ac:spMkLst>
-        </pc:spChg>
-        <pc:spChg chg="add del">
-          <ac:chgData name="Adin Durakovic" userId="2ad61b98-b0fd-44ad-ae05-75a98b948b59" providerId="ADAL" clId="{59C5C822-DDF8-46E0-A69C-E1E0435FEA74}" dt="2026-03-16T08:14:41.688" v="15" actId="26606"/>
-          <ac:spMkLst>
-            <pc:docMk/>
-            <pc:sldMk cId="591358847" sldId="258"/>
-            <ac:spMk id="11" creationId="{8161EA6B-09CA-445B-AB0D-8DF76FA92DEF}"/>
-          </ac:spMkLst>
-        </pc:spChg>
-        <pc:spChg chg="add mod">
-          <ac:chgData name="Adin Durakovic" userId="2ad61b98-b0fd-44ad-ae05-75a98b948b59" providerId="ADAL" clId="{59C5C822-DDF8-46E0-A69C-E1E0435FEA74}" dt="2026-03-16T08:32:09.924" v="1046" actId="20577"/>
-          <ac:spMkLst>
-            <pc:docMk/>
-            <pc:sldMk cId="591358847" sldId="258"/>
-            <ac:spMk id="12" creationId="{DDDADAE3-B87D-A483-F332-21EC9E2ABA43}"/>
-          </ac:spMkLst>
-        </pc:spChg>
-        <pc:spChg chg="add mod">
-          <ac:chgData name="Adin Durakovic" userId="2ad61b98-b0fd-44ad-ae05-75a98b948b59" providerId="ADAL" clId="{59C5C822-DDF8-46E0-A69C-E1E0435FEA74}" dt="2026-03-16T08:33:49.225" v="1224" actId="313"/>
-          <ac:spMkLst>
-            <pc:docMk/>
-            <pc:sldMk cId="591358847" sldId="258"/>
-            <ac:spMk id="20" creationId="{DACCF0E4-15F5-CFF3-DD55-3A9178E3CA8E}"/>
-          </ac:spMkLst>
-        </pc:spChg>
-        <pc:spChg chg="add del">
-          <ac:chgData name="Adin Durakovic" userId="2ad61b98-b0fd-44ad-ae05-75a98b948b59" providerId="ADAL" clId="{59C5C822-DDF8-46E0-A69C-E1E0435FEA74}" dt="2026-03-16T08:14:41.688" v="15" actId="26606"/>
-          <ac:spMkLst>
-            <pc:docMk/>
-            <pc:sldMk cId="591358847" sldId="258"/>
-            <ac:spMk id="21" creationId="{B8114C98-A349-4111-A123-E8EAB86ABE30}"/>
-          </ac:spMkLst>
-        </pc:spChg>
-        <pc:spChg chg="add del mod">
-          <ac:chgData name="Adin Durakovic" userId="2ad61b98-b0fd-44ad-ae05-75a98b948b59" providerId="ADAL" clId="{59C5C822-DDF8-46E0-A69C-E1E0435FEA74}" dt="2026-03-16T08:35:36.270" v="1236"/>
-          <ac:spMkLst>
-            <pc:docMk/>
-            <pc:sldMk cId="591358847" sldId="258"/>
-            <ac:spMk id="22" creationId="{BD28803C-8ABF-A5D1-B16E-FC3213F33D65}"/>
-          </ac:spMkLst>
-        </pc:spChg>
-        <pc:spChg chg="add del">
-          <ac:chgData name="Adin Durakovic" userId="2ad61b98-b0fd-44ad-ae05-75a98b948b59" providerId="ADAL" clId="{59C5C822-DDF8-46E0-A69C-E1E0435FEA74}" dt="2026-03-16T08:14:41.688" v="15" actId="26606"/>
-          <ac:spMkLst>
-            <pc:docMk/>
-            <pc:sldMk cId="591358847" sldId="258"/>
-            <ac:spMk id="29" creationId="{E2D3D3F2-ABBB-4453-B1C5-1BEBF7E4DD56}"/>
-          </ac:spMkLst>
-        </pc:spChg>
-        <pc:spChg chg="add del">
-          <ac:chgData name="Adin Durakovic" userId="2ad61b98-b0fd-44ad-ae05-75a98b948b59" providerId="ADAL" clId="{59C5C822-DDF8-46E0-A69C-E1E0435FEA74}" dt="2026-03-16T08:14:41.688" v="15" actId="26606"/>
-          <ac:spMkLst>
-            <pc:docMk/>
-            <pc:sldMk cId="591358847" sldId="258"/>
-            <ac:spMk id="43" creationId="{773AEA78-C03B-40B7-9D11-DC022119D577}"/>
-          </ac:spMkLst>
-        </pc:spChg>
-        <pc:spChg chg="add del">
-          <ac:chgData name="Adin Durakovic" userId="2ad61b98-b0fd-44ad-ae05-75a98b948b59" providerId="ADAL" clId="{59C5C822-DDF8-46E0-A69C-E1E0435FEA74}" dt="2026-03-16T08:14:31.842" v="10" actId="26606"/>
-          <ac:spMkLst>
-            <pc:docMk/>
-            <pc:sldMk cId="591358847" sldId="258"/>
-            <ac:spMk id="48" creationId="{66E48AFA-8884-4F68-A44F-D2C1E8609C5A}"/>
-          </ac:spMkLst>
-        </pc:spChg>
-        <pc:spChg chg="add del">
-          <ac:chgData name="Adin Durakovic" userId="2ad61b98-b0fd-44ad-ae05-75a98b948b59" providerId="ADAL" clId="{59C5C822-DDF8-46E0-A69C-E1E0435FEA74}" dt="2026-03-16T08:14:31.842" v="10" actId="26606"/>
-          <ac:spMkLst>
-            <pc:docMk/>
-            <pc:sldMk cId="591358847" sldId="258"/>
-            <ac:spMk id="50" creationId="{969D19A6-08CB-498C-93EC-3FFB021FC68A}"/>
-          </ac:spMkLst>
-        </pc:spChg>
-        <pc:spChg chg="add del">
-          <ac:chgData name="Adin Durakovic" userId="2ad61b98-b0fd-44ad-ae05-75a98b948b59" providerId="ADAL" clId="{59C5C822-DDF8-46E0-A69C-E1E0435FEA74}" dt="2026-03-16T08:14:36.183" v="12" actId="26606"/>
-          <ac:spMkLst>
-            <pc:docMk/>
-            <pc:sldMk cId="591358847" sldId="258"/>
-            <ac:spMk id="52" creationId="{99B60357-232D-4489-8786-BF4E4F74BA76}"/>
-          </ac:spMkLst>
-        </pc:spChg>
-        <pc:spChg chg="add del">
-          <ac:chgData name="Adin Durakovic" userId="2ad61b98-b0fd-44ad-ae05-75a98b948b59" providerId="ADAL" clId="{59C5C822-DDF8-46E0-A69C-E1E0435FEA74}" dt="2026-03-16T08:14:36.183" v="12" actId="26606"/>
-          <ac:spMkLst>
-            <pc:docMk/>
-            <pc:sldMk cId="591358847" sldId="258"/>
-            <ac:spMk id="53" creationId="{73C994B4-9721-4148-9EEC-6793CECDE8DD}"/>
-          </ac:spMkLst>
-        </pc:spChg>
-        <pc:spChg chg="add del">
-          <ac:chgData name="Adin Durakovic" userId="2ad61b98-b0fd-44ad-ae05-75a98b948b59" providerId="ADAL" clId="{59C5C822-DDF8-46E0-A69C-E1E0435FEA74}" dt="2026-03-16T08:14:36.183" v="12" actId="26606"/>
-          <ac:spMkLst>
-            <pc:docMk/>
-            <pc:sldMk cId="591358847" sldId="258"/>
-            <ac:spMk id="54" creationId="{28928A89-D0B3-42AC-80FB-CA7D445693CB}"/>
-          </ac:spMkLst>
-        </pc:spChg>
-        <pc:spChg chg="add del">
-          <ac:chgData name="Adin Durakovic" userId="2ad61b98-b0fd-44ad-ae05-75a98b948b59" providerId="ADAL" clId="{59C5C822-DDF8-46E0-A69C-E1E0435FEA74}" dt="2026-03-16T08:14:36.183" v="12" actId="26606"/>
-          <ac:spMkLst>
-            <pc:docMk/>
-            <pc:sldMk cId="591358847" sldId="258"/>
-            <ac:spMk id="55" creationId="{F9D95E49-763A-4886-B038-82F734740554}"/>
-          </ac:spMkLst>
-        </pc:spChg>
-        <pc:spChg chg="add del">
-          <ac:chgData name="Adin Durakovic" userId="2ad61b98-b0fd-44ad-ae05-75a98b948b59" providerId="ADAL" clId="{59C5C822-DDF8-46E0-A69C-E1E0435FEA74}" dt="2026-03-16T08:14:41.679" v="14" actId="26606"/>
-          <ac:spMkLst>
-            <pc:docMk/>
-            <pc:sldMk cId="591358847" sldId="258"/>
-            <ac:spMk id="60" creationId="{2596F992-698C-48C0-9D89-70DA4CE927EF}"/>
-          </ac:spMkLst>
-        </pc:spChg>
-        <pc:spChg chg="add del">
-          <ac:chgData name="Adin Durakovic" userId="2ad61b98-b0fd-44ad-ae05-75a98b948b59" providerId="ADAL" clId="{59C5C822-DDF8-46E0-A69C-E1E0435FEA74}" dt="2026-03-16T08:14:41.679" v="14" actId="26606"/>
-          <ac:spMkLst>
-            <pc:docMk/>
-            <pc:sldMk cId="591358847" sldId="258"/>
-            <ac:spMk id="61" creationId="{E7BFF8DC-0AE7-4AD2-9B28-2E5F26D62C30}"/>
-          </ac:spMkLst>
-        </pc:spChg>
-        <pc:spChg chg="add del">
-          <ac:chgData name="Adin Durakovic" userId="2ad61b98-b0fd-44ad-ae05-75a98b948b59" providerId="ADAL" clId="{59C5C822-DDF8-46E0-A69C-E1E0435FEA74}" dt="2026-03-16T08:14:41.679" v="14" actId="26606"/>
-          <ac:spMkLst>
-            <pc:docMk/>
-            <pc:sldMk cId="591358847" sldId="258"/>
-            <ac:spMk id="62" creationId="{7E0162AD-C6E5-4BF8-A453-76ADB36877D3}"/>
-          </ac:spMkLst>
-        </pc:spChg>
-        <pc:spChg chg="add del">
-          <ac:chgData name="Adin Durakovic" userId="2ad61b98-b0fd-44ad-ae05-75a98b948b59" providerId="ADAL" clId="{59C5C822-DDF8-46E0-A69C-E1E0435FEA74}" dt="2026-03-16T08:15:08.709" v="18" actId="26606"/>
-          <ac:spMkLst>
-            <pc:docMk/>
-            <pc:sldMk cId="591358847" sldId="258"/>
-            <ac:spMk id="67" creationId="{D7A453D2-15D8-4403-815F-291FA16340D9}"/>
-          </ac:spMkLst>
-        </pc:spChg>
-        <pc:spChg chg="add del">
-          <ac:chgData name="Adin Durakovic" userId="2ad61b98-b0fd-44ad-ae05-75a98b948b59" providerId="ADAL" clId="{59C5C822-DDF8-46E0-A69C-E1E0435FEA74}" dt="2026-03-16T08:15:08.709" v="18" actId="26606"/>
-          <ac:spMkLst>
-            <pc:docMk/>
-            <pc:sldMk cId="591358847" sldId="258"/>
-            <ac:spMk id="68" creationId="{E2D3D3F2-ABBB-4453-B1C5-1BEBF7E4DD56}"/>
-          </ac:spMkLst>
-        </pc:spChg>
-        <pc:spChg chg="add del">
-          <ac:chgData name="Adin Durakovic" userId="2ad61b98-b0fd-44ad-ae05-75a98b948b59" providerId="ADAL" clId="{59C5C822-DDF8-46E0-A69C-E1E0435FEA74}" dt="2026-03-16T08:15:08.709" v="18" actId="26606"/>
-          <ac:spMkLst>
-            <pc:docMk/>
-            <pc:sldMk cId="591358847" sldId="258"/>
-            <ac:spMk id="69" creationId="{8161EA6B-09CA-445B-AB0D-8DF76FA92DEF}"/>
-          </ac:spMkLst>
-        </pc:spChg>
-        <pc:spChg chg="add del">
-          <ac:chgData name="Adin Durakovic" userId="2ad61b98-b0fd-44ad-ae05-75a98b948b59" providerId="ADAL" clId="{59C5C822-DDF8-46E0-A69C-E1E0435FEA74}" dt="2026-03-16T08:15:08.709" v="18" actId="26606"/>
-          <ac:spMkLst>
-            <pc:docMk/>
-            <pc:sldMk cId="591358847" sldId="258"/>
-            <ac:spMk id="82" creationId="{773AEA78-C03B-40B7-9D11-DC022119D577}"/>
-          </ac:spMkLst>
-        </pc:spChg>
-        <pc:spChg chg="add del">
-          <ac:chgData name="Adin Durakovic" userId="2ad61b98-b0fd-44ad-ae05-75a98b948b59" providerId="ADAL" clId="{59C5C822-DDF8-46E0-A69C-E1E0435FEA74}" dt="2026-03-16T08:15:08.709" v="18" actId="26606"/>
-          <ac:spMkLst>
-            <pc:docMk/>
-            <pc:sldMk cId="591358847" sldId="258"/>
-            <ac:spMk id="85" creationId="{B8114C98-A349-4111-A123-E8EAB86ABE30}"/>
-          </ac:spMkLst>
-        </pc:spChg>
-        <pc:spChg chg="add del">
-          <ac:chgData name="Adin Durakovic" userId="2ad61b98-b0fd-44ad-ae05-75a98b948b59" providerId="ADAL" clId="{59C5C822-DDF8-46E0-A69C-E1E0435FEA74}" dt="2026-03-16T08:15:08.709" v="18" actId="26606"/>
-          <ac:spMkLst>
-            <pc:docMk/>
-            <pc:sldMk cId="591358847" sldId="258"/>
-            <ac:spMk id="91" creationId="{66E48AFA-8884-4F68-A44F-D2C1E8609C5A}"/>
-          </ac:spMkLst>
-        </pc:spChg>
-        <pc:spChg chg="add del">
-          <ac:chgData name="Adin Durakovic" userId="2ad61b98-b0fd-44ad-ae05-75a98b948b59" providerId="ADAL" clId="{59C5C822-DDF8-46E0-A69C-E1E0435FEA74}" dt="2026-03-16T08:15:08.709" v="18" actId="26606"/>
-          <ac:spMkLst>
-            <pc:docMk/>
-            <pc:sldMk cId="591358847" sldId="258"/>
-            <ac:spMk id="93" creationId="{969D19A6-08CB-498C-93EC-3FFB021FC68A}"/>
-          </ac:spMkLst>
-        </pc:spChg>
-        <pc:grpChg chg="add">
-          <ac:chgData name="Adin Durakovic" userId="2ad61b98-b0fd-44ad-ae05-75a98b948b59" providerId="ADAL" clId="{59C5C822-DDF8-46E0-A69C-E1E0435FEA74}" dt="2026-03-16T08:14:21.263" v="7" actId="26606"/>
-          <ac:grpSpMkLst>
-            <pc:docMk/>
-            <pc:sldMk cId="591358847" sldId="258"/>
-            <ac:grpSpMk id="13" creationId="{913B067F-3154-4968-A886-DF93A787EC44}"/>
-          </ac:grpSpMkLst>
-        </pc:grpChg>
-        <pc:grpChg chg="add del">
-          <ac:chgData name="Adin Durakovic" userId="2ad61b98-b0fd-44ad-ae05-75a98b948b59" providerId="ADAL" clId="{59C5C822-DDF8-46E0-A69C-E1E0435FEA74}" dt="2026-03-16T08:14:31.842" v="10" actId="26606"/>
-          <ac:grpSpMkLst>
-            <pc:docMk/>
-            <pc:sldMk cId="591358847" sldId="258"/>
-            <ac:grpSpMk id="31" creationId="{8214E4A5-A0D2-42C4-8D14-D2A7E495F041}"/>
-          </ac:grpSpMkLst>
-        </pc:grpChg>
-        <pc:grpChg chg="add">
-          <ac:chgData name="Adin Durakovic" userId="2ad61b98-b0fd-44ad-ae05-75a98b948b59" providerId="ADAL" clId="{59C5C822-DDF8-46E0-A69C-E1E0435FEA74}" dt="2026-03-16T08:14:21.263" v="7" actId="26606"/>
-          <ac:grpSpMkLst>
-            <pc:docMk/>
-            <pc:sldMk cId="591358847" sldId="258"/>
-            <ac:grpSpMk id="37" creationId="{1F4E1649-4D1F-4A91-AF97-A254BFDD524D}"/>
-          </ac:grpSpMkLst>
-        </pc:grpChg>
-        <pc:grpChg chg="add del">
-          <ac:chgData name="Adin Durakovic" userId="2ad61b98-b0fd-44ad-ae05-75a98b948b59" providerId="ADAL" clId="{59C5C822-DDF8-46E0-A69C-E1E0435FEA74}" dt="2026-03-16T08:15:08.709" v="18" actId="26606"/>
-          <ac:grpSpMkLst>
-            <pc:docMk/>
-            <pc:sldMk cId="591358847" sldId="258"/>
-            <ac:grpSpMk id="76" creationId="{1F4E1649-4D1F-4A91-AF97-A254BFDD524D}"/>
-          </ac:grpSpMkLst>
-        </pc:grpChg>
-        <pc:graphicFrameChg chg="add del mod modGraphic">
-          <ac:chgData name="Adin Durakovic" userId="2ad61b98-b0fd-44ad-ae05-75a98b948b59" providerId="ADAL" clId="{59C5C822-DDF8-46E0-A69C-E1E0435FEA74}" dt="2026-03-16T08:35:36.254" v="1234" actId="21"/>
-          <ac:graphicFrameMkLst>
-            <pc:docMk/>
-            <pc:sldMk cId="591358847" sldId="258"/>
-            <ac:graphicFrameMk id="28" creationId="{064C7572-230B-4C1C-F64B-4F1D4CF663DF}"/>
-          </ac:graphicFrameMkLst>
-        </pc:graphicFrameChg>
-        <pc:picChg chg="add del mod">
-          <ac:chgData name="Adin Durakovic" userId="2ad61b98-b0fd-44ad-ae05-75a98b948b59" providerId="ADAL" clId="{59C5C822-DDF8-46E0-A69C-E1E0435FEA74}" dt="2026-03-16T08:16:12.448" v="22" actId="21"/>
-          <ac:picMkLst>
-            <pc:docMk/>
-            <pc:sldMk cId="591358847" sldId="258"/>
-            <ac:picMk id="4" creationId="{895CFAFE-A119-C717-6D40-8FE876770EF0}"/>
-          </ac:picMkLst>
-        </pc:picChg>
-        <pc:picChg chg="add mod">
-          <ac:chgData name="Adin Durakovic" userId="2ad61b98-b0fd-44ad-ae05-75a98b948b59" providerId="ADAL" clId="{59C5C822-DDF8-46E0-A69C-E1E0435FEA74}" dt="2026-03-16T08:40:24.212" v="1296" actId="14100"/>
-          <ac:picMkLst>
-            <pc:docMk/>
-            <pc:sldMk cId="591358847" sldId="258"/>
-            <ac:picMk id="6" creationId="{E63EE493-865E-FA11-4145-AACE3B8F63E2}"/>
-          </ac:picMkLst>
-        </pc:picChg>
-      </pc:sldChg>
-      <pc:sldChg chg="new del">
-        <pc:chgData name="Adin Durakovic" userId="2ad61b98-b0fd-44ad-ae05-75a98b948b59" providerId="ADAL" clId="{59C5C822-DDF8-46E0-A69C-E1E0435FEA74}" dt="2026-03-16T08:34:56.580" v="1226" actId="2696"/>
-        <pc:sldMkLst>
-          <pc:docMk/>
-          <pc:sldMk cId="3984113329" sldId="261"/>
-        </pc:sldMkLst>
-      </pc:sldChg>
-    </pc:docChg>
-  </pc:docChgLst>
-  <pc:docChgLst>
-    <pc:chgData name="Emel Keres" userId="S::pb33grl@eduvaud.ch::752d1ddc-804c-49ca-ad09-1c6c449e92da" providerId="AD" clId="Web-{25C55401-A386-6B45-C3EF-563D9179BF51}"/>
-    <pc:docChg chg="addSld delSld modSld sldOrd">
-      <pc:chgData name="Emel Keres" userId="S::pb33grl@eduvaud.ch::752d1ddc-804c-49ca-ad09-1c6c449e92da" providerId="AD" clId="Web-{25C55401-A386-6B45-C3EF-563D9179BF51}" dt="2026-03-16T15:19:41.128" v="1527" actId="14100"/>
-      <pc:docMkLst>
-        <pc:docMk/>
-      </pc:docMkLst>
-      <pc:sldChg chg="addSp delSp modSp mod setBg">
-        <pc:chgData name="Emel Keres" userId="S::pb33grl@eduvaud.ch::752d1ddc-804c-49ca-ad09-1c6c449e92da" providerId="AD" clId="Web-{25C55401-A386-6B45-C3EF-563D9179BF51}" dt="2026-03-16T14:19:25.766" v="1522" actId="14100"/>
-        <pc:sldMkLst>
-          <pc:docMk/>
-          <pc:sldMk cId="2952239631" sldId="256"/>
-        </pc:sldMkLst>
-        <pc:spChg chg="mod">
-          <ac:chgData name="Emel Keres" userId="S::pb33grl@eduvaud.ch::752d1ddc-804c-49ca-ad09-1c6c449e92da" providerId="AD" clId="Web-{25C55401-A386-6B45-C3EF-563D9179BF51}" dt="2026-03-16T14:13:04.822" v="1490" actId="20577"/>
-          <ac:spMkLst>
-            <pc:docMk/>
-            <pc:sldMk cId="2952239631" sldId="256"/>
-            <ac:spMk id="2" creationId="{A6677FA0-2093-0729-65C9-77321715374F}"/>
-          </ac:spMkLst>
-        </pc:spChg>
-        <pc:spChg chg="mod">
-          <ac:chgData name="Emel Keres" userId="S::pb33grl@eduvaud.ch::752d1ddc-804c-49ca-ad09-1c6c449e92da" providerId="AD" clId="Web-{25C55401-A386-6B45-C3EF-563D9179BF51}" dt="2026-03-16T14:13:00.962" v="1489" actId="20577"/>
-          <ac:spMkLst>
-            <pc:docMk/>
-            <pc:sldMk cId="2952239631" sldId="256"/>
-            <ac:spMk id="3" creationId="{55FC79B4-D16D-4E01-717A-8A936D539BFC}"/>
-          </ac:spMkLst>
-        </pc:spChg>
-        <pc:spChg chg="add">
-          <ac:chgData name="Emel Keres" userId="S::pb33grl@eduvaud.ch::752d1ddc-804c-49ca-ad09-1c6c449e92da" providerId="AD" clId="Web-{25C55401-A386-6B45-C3EF-563D9179BF51}" dt="2026-03-16T07:41:53.399" v="32"/>
-          <ac:spMkLst>
-            <pc:docMk/>
-            <pc:sldMk cId="2952239631" sldId="256"/>
-            <ac:spMk id="9" creationId="{91DC6ABD-215C-4EA8-A483-CEF5B99AB385}"/>
-          </ac:spMkLst>
-        </pc:spChg>
-        <pc:spChg chg="add">
-          <ac:chgData name="Emel Keres" userId="S::pb33grl@eduvaud.ch::752d1ddc-804c-49ca-ad09-1c6c449e92da" providerId="AD" clId="Web-{25C55401-A386-6B45-C3EF-563D9179BF51}" dt="2026-03-16T07:41:53.399" v="32"/>
-          <ac:spMkLst>
-            <pc:docMk/>
-            <pc:sldMk cId="2952239631" sldId="256"/>
-            <ac:spMk id="15" creationId="{04357C93-F0CB-4A1C-8F77-4E9063789819}"/>
-          </ac:spMkLst>
-        </pc:spChg>
-        <pc:grpChg chg="add">
-          <ac:chgData name="Emel Keres" userId="S::pb33grl@eduvaud.ch::752d1ddc-804c-49ca-ad09-1c6c449e92da" providerId="AD" clId="Web-{25C55401-A386-6B45-C3EF-563D9179BF51}" dt="2026-03-16T07:41:53.399" v="32"/>
-          <ac:grpSpMkLst>
-            <pc:docMk/>
-            <pc:sldMk cId="2952239631" sldId="256"/>
-            <ac:grpSpMk id="11" creationId="{3AF6A671-C637-4547-85F4-51B6D1881399}"/>
-          </ac:grpSpMkLst>
-        </pc:grpChg>
-        <pc:picChg chg="add del mod">
-          <ac:chgData name="Emel Keres" userId="S::pb33grl@eduvaud.ch::752d1ddc-804c-49ca-ad09-1c6c449e92da" providerId="AD" clId="Web-{25C55401-A386-6B45-C3EF-563D9179BF51}" dt="2026-03-16T14:17:44.953" v="1509"/>
-          <ac:picMkLst>
-            <pc:docMk/>
-            <pc:sldMk cId="2952239631" sldId="256"/>
-            <ac:picMk id="4" creationId="{F91451D0-4363-099C-48C9-550C78C84E8E}"/>
-          </ac:picMkLst>
-        </pc:picChg>
-        <pc:picChg chg="add mod">
-          <ac:chgData name="Emel Keres" userId="S::pb33grl@eduvaud.ch::752d1ddc-804c-49ca-ad09-1c6c449e92da" providerId="AD" clId="Web-{25C55401-A386-6B45-C3EF-563D9179BF51}" dt="2026-03-16T14:17:55.328" v="1512" actId="1076"/>
-          <ac:picMkLst>
-            <pc:docMk/>
-            <pc:sldMk cId="2952239631" sldId="256"/>
-            <ac:picMk id="5" creationId="{8ECC1792-D076-7A04-0474-89075ADB56E8}"/>
-          </ac:picMkLst>
-        </pc:picChg>
-        <pc:picChg chg="add mod">
-          <ac:chgData name="Emel Keres" userId="S::pb33grl@eduvaud.ch::752d1ddc-804c-49ca-ad09-1c6c449e92da" providerId="AD" clId="Web-{25C55401-A386-6B45-C3EF-563D9179BF51}" dt="2026-03-16T14:19:25.766" v="1522" actId="14100"/>
-          <ac:picMkLst>
-            <pc:docMk/>
-            <pc:sldMk cId="2952239631" sldId="256"/>
-            <ac:picMk id="6" creationId="{4DDAF42B-0711-E79F-0AEF-8B7C74FE1942}"/>
-          </ac:picMkLst>
-        </pc:picChg>
-      </pc:sldChg>
-      <pc:sldChg chg="modSp new mod ord setBg">
-        <pc:chgData name="Emel Keres" userId="S::pb33grl@eduvaud.ch::752d1ddc-804c-49ca-ad09-1c6c449e92da" providerId="AD" clId="Web-{25C55401-A386-6B45-C3EF-563D9179BF51}" dt="2026-03-16T15:19:18.940" v="1523" actId="14100"/>
-        <pc:sldMkLst>
-          <pc:docMk/>
-          <pc:sldMk cId="3746204366" sldId="257"/>
-        </pc:sldMkLst>
-        <pc:spChg chg="mod">
-          <ac:chgData name="Emel Keres" userId="S::pb33grl@eduvaud.ch::752d1ddc-804c-49ca-ad09-1c6c449e92da" providerId="AD" clId="Web-{25C55401-A386-6B45-C3EF-563D9179BF51}" dt="2026-03-16T15:19:18.940" v="1523" actId="14100"/>
-          <ac:spMkLst>
-            <pc:docMk/>
-            <pc:sldMk cId="3746204366" sldId="257"/>
-            <ac:spMk id="2" creationId="{32E071F7-D8B0-BCA6-A062-54FF26992EC1}"/>
-          </ac:spMkLst>
-        </pc:spChg>
-        <pc:spChg chg="mod">
-          <ac:chgData name="Emel Keres" userId="S::pb33grl@eduvaud.ch::752d1ddc-804c-49ca-ad09-1c6c449e92da" providerId="AD" clId="Web-{25C55401-A386-6B45-C3EF-563D9179BF51}" dt="2026-03-16T14:14:45.293" v="1505" actId="1076"/>
-          <ac:spMkLst>
-            <pc:docMk/>
-            <pc:sldMk cId="3746204366" sldId="257"/>
-            <ac:spMk id="3" creationId="{887DA90D-641E-3D94-03AB-A4FDCC03F76A}"/>
-          </ac:spMkLst>
-        </pc:spChg>
-      </pc:sldChg>
-      <pc:sldChg chg="addSp delSp modSp ord">
-        <pc:chgData name="Emel Keres" userId="S::pb33grl@eduvaud.ch::752d1ddc-804c-49ca-ad09-1c6c449e92da" providerId="AD" clId="Web-{25C55401-A386-6B45-C3EF-563D9179BF51}" dt="2026-03-16T09:08:38.210" v="1061"/>
-        <pc:sldMkLst>
-          <pc:docMk/>
-          <pc:sldMk cId="591358847" sldId="258"/>
-        </pc:sldMkLst>
-        <pc:spChg chg="add del">
-          <ac:chgData name="Emel Keres" userId="S::pb33grl@eduvaud.ch::752d1ddc-804c-49ca-ad09-1c6c449e92da" providerId="AD" clId="Web-{25C55401-A386-6B45-C3EF-563D9179BF51}" dt="2026-03-16T08:07:59.328" v="134"/>
-          <ac:spMkLst>
-            <pc:docMk/>
-            <pc:sldMk cId="591358847" sldId="258"/>
-            <ac:spMk id="2" creationId="{D8D96C56-5D04-ED88-D4AE-EF1707807322}"/>
-          </ac:spMkLst>
-        </pc:spChg>
-        <pc:spChg chg="add mod">
-          <ac:chgData name="Emel Keres" userId="S::pb33grl@eduvaud.ch::752d1ddc-804c-49ca-ad09-1c6c449e92da" providerId="AD" clId="Web-{25C55401-A386-6B45-C3EF-563D9179BF51}" dt="2026-03-16T08:13:51.896" v="381" actId="20577"/>
-          <ac:spMkLst>
-            <pc:docMk/>
-            <pc:sldMk cId="591358847" sldId="258"/>
-            <ac:spMk id="3" creationId="{6CBFE363-B8F5-7C38-CC9D-68DC1EBF95C1}"/>
-          </ac:spMkLst>
-        </pc:spChg>
-        <pc:spChg chg="mod">
-          <ac:chgData name="Emel Keres" userId="S::pb33grl@eduvaud.ch::752d1ddc-804c-49ca-ad09-1c6c449e92da" providerId="AD" clId="Web-{25C55401-A386-6B45-C3EF-563D9179BF51}" dt="2026-03-16T08:39:04" v="1013" actId="20577"/>
-          <ac:spMkLst>
-            <pc:docMk/>
-            <pc:sldMk cId="591358847" sldId="258"/>
-            <ac:spMk id="7" creationId="{4376E7ED-16CB-05FB-91CE-78293A73B5CA}"/>
-          </ac:spMkLst>
-        </pc:spChg>
-        <pc:spChg chg="mod">
-          <ac:chgData name="Emel Keres" userId="S::pb33grl@eduvaud.ch::752d1ddc-804c-49ca-ad09-1c6c449e92da" providerId="AD" clId="Web-{25C55401-A386-6B45-C3EF-563D9179BF51}" dt="2026-03-16T08:39:16.172" v="1015" actId="20577"/>
-          <ac:spMkLst>
-            <pc:docMk/>
-            <pc:sldMk cId="591358847" sldId="258"/>
-            <ac:spMk id="20" creationId="{DACCF0E4-15F5-CFF3-DD55-3A9178E3CA8E}"/>
-          </ac:spMkLst>
-        </pc:spChg>
-        <pc:picChg chg="del">
-          <ac:chgData name="Emel Keres" userId="S::pb33grl@eduvaud.ch::752d1ddc-804c-49ca-ad09-1c6c449e92da" providerId="AD" clId="Web-{25C55401-A386-6B45-C3EF-563D9179BF51}" dt="2026-03-16T09:08:38.210" v="1061"/>
-          <ac:picMkLst>
-            <pc:docMk/>
-            <pc:sldMk cId="591358847" sldId="258"/>
-            <ac:picMk id="6" creationId="{E63EE493-865E-FA11-4145-AACE3B8F63E2}"/>
-          </ac:picMkLst>
-        </pc:picChg>
-      </pc:sldChg>
-      <pc:sldChg chg="addSp delSp modSp new mod setBg">
-        <pc:chgData name="Emel Keres" userId="S::pb33grl@eduvaud.ch::752d1ddc-804c-49ca-ad09-1c6c449e92da" providerId="AD" clId="Web-{25C55401-A386-6B45-C3EF-563D9179BF51}" dt="2026-03-16T15:19:34.800" v="1526" actId="20577"/>
+      <pc:sldChg chg="modSp mod">
+        <pc:chgData name="Emel Keres" userId="752d1ddc-804c-49ca-ad09-1c6c449e92da" providerId="ADAL" clId="{0429B13A-CCFC-46EC-9D2E-9EC40A1F5C46}" dt="2026-03-23T08:09:09.808" v="525" actId="20577"/>
         <pc:sldMkLst>
           <pc:docMk/>
           <pc:sldMk cId="758963859" sldId="259"/>
         </pc:sldMkLst>
-        <pc:spChg chg="add del">
-          <ac:chgData name="Emel Keres" userId="S::pb33grl@eduvaud.ch::752d1ddc-804c-49ca-ad09-1c6c449e92da" providerId="AD" clId="Web-{25C55401-A386-6B45-C3EF-563D9179BF51}" dt="2026-03-16T09:09:27.179" v="1067"/>
-          <ac:spMkLst>
-            <pc:docMk/>
-            <pc:sldMk cId="758963859" sldId="259"/>
-            <ac:spMk id="2" creationId="{F339907F-9688-C6D5-E23B-4E63F0C7CC5C}"/>
-          </ac:spMkLst>
-        </pc:spChg>
-        <pc:spChg chg="add mod">
-          <ac:chgData name="Emel Keres" userId="S::pb33grl@eduvaud.ch::752d1ddc-804c-49ca-ad09-1c6c449e92da" providerId="AD" clId="Web-{25C55401-A386-6B45-C3EF-563D9179BF51}" dt="2026-03-16T15:19:34.800" v="1526" actId="20577"/>
+        <pc:spChg chg="mod">
+          <ac:chgData name="Emel Keres" userId="752d1ddc-804c-49ca-ad09-1c6c449e92da" providerId="ADAL" clId="{0429B13A-CCFC-46EC-9D2E-9EC40A1F5C46}" dt="2026-03-23T08:09:09.808" v="525" actId="20577"/>
           <ac:spMkLst>
             <pc:docMk/>
             <pc:sldMk cId="758963859" sldId="259"/>
@@ -639,91 +192,14 @@
           </ac:spMkLst>
         </pc:spChg>
       </pc:sldChg>
-      <pc:sldChg chg="new del ord">
-        <pc:chgData name="Emel Keres" userId="S::pb33grl@eduvaud.ch::752d1ddc-804c-49ca-ad09-1c6c449e92da" providerId="AD" clId="Web-{25C55401-A386-6B45-C3EF-563D9179BF51}" dt="2026-03-16T08:22:40.525" v="489"/>
-        <pc:sldMkLst>
-          <pc:docMk/>
-          <pc:sldMk cId="1087911862" sldId="259"/>
-        </pc:sldMkLst>
-      </pc:sldChg>
-      <pc:sldChg chg="modSp new del">
-        <pc:chgData name="Emel Keres" userId="S::pb33grl@eduvaud.ch::752d1ddc-804c-49ca-ad09-1c6c449e92da" providerId="AD" clId="Web-{25C55401-A386-6B45-C3EF-563D9179BF51}" dt="2026-03-16T09:07:03.725" v="1059"/>
-        <pc:sldMkLst>
-          <pc:docMk/>
-          <pc:sldMk cId="1903508466" sldId="259"/>
-        </pc:sldMkLst>
-        <pc:spChg chg="mod">
-          <ac:chgData name="Emel Keres" userId="S::pb33grl@eduvaud.ch::752d1ddc-804c-49ca-ad09-1c6c449e92da" providerId="AD" clId="Web-{25C55401-A386-6B45-C3EF-563D9179BF51}" dt="2026-03-16T08:25:16.783" v="587" actId="1076"/>
-          <ac:spMkLst>
-            <pc:docMk/>
-            <pc:sldMk cId="1903508466" sldId="259"/>
-            <ac:spMk id="2" creationId="{1A568F44-8EB0-A187-AC74-CAA679B834FC}"/>
-          </ac:spMkLst>
-        </pc:spChg>
-        <pc:spChg chg="mod">
-          <ac:chgData name="Emel Keres" userId="S::pb33grl@eduvaud.ch::752d1ddc-804c-49ca-ad09-1c6c449e92da" providerId="AD" clId="Web-{25C55401-A386-6B45-C3EF-563D9179BF51}" dt="2026-03-16T08:25:55.675" v="636" actId="20577"/>
-          <ac:spMkLst>
-            <pc:docMk/>
-            <pc:sldMk cId="1903508466" sldId="259"/>
-            <ac:spMk id="3" creationId="{C3C6341D-BC55-A6B9-840A-B40284317CED}"/>
-          </ac:spMkLst>
-        </pc:spChg>
-      </pc:sldChg>
-      <pc:sldChg chg="addSp delSp modSp new del">
-        <pc:chgData name="Emel Keres" userId="S::pb33grl@eduvaud.ch::752d1ddc-804c-49ca-ad09-1c6c449e92da" providerId="AD" clId="Web-{25C55401-A386-6B45-C3EF-563D9179BF51}" dt="2026-03-16T09:07:03.662" v="1058"/>
-        <pc:sldMkLst>
-          <pc:docMk/>
-          <pc:sldMk cId="1149939271" sldId="260"/>
-        </pc:sldMkLst>
-        <pc:spChg chg="mod">
-          <ac:chgData name="Emel Keres" userId="S::pb33grl@eduvaud.ch::752d1ddc-804c-49ca-ad09-1c6c449e92da" providerId="AD" clId="Web-{25C55401-A386-6B45-C3EF-563D9179BF51}" dt="2026-03-16T08:28:12.445" v="806" actId="1076"/>
-          <ac:spMkLst>
-            <pc:docMk/>
-            <pc:sldMk cId="1149939271" sldId="260"/>
-            <ac:spMk id="2" creationId="{1FFA4F5A-6B45-179D-DB10-F3CCC76E33AF}"/>
-          </ac:spMkLst>
-        </pc:spChg>
-        <pc:spChg chg="mod">
-          <ac:chgData name="Emel Keres" userId="S::pb33grl@eduvaud.ch::752d1ddc-804c-49ca-ad09-1c6c449e92da" providerId="AD" clId="Web-{25C55401-A386-6B45-C3EF-563D9179BF51}" dt="2026-03-16T08:44:47.450" v="1045" actId="20577"/>
-          <ac:spMkLst>
-            <pc:docMk/>
-            <pc:sldMk cId="1149939271" sldId="260"/>
-            <ac:spMk id="3" creationId="{C342E7D6-B523-2068-6A74-EB7F25E2D24F}"/>
-          </ac:spMkLst>
-        </pc:spChg>
-        <pc:spChg chg="add del">
-          <ac:chgData name="Emel Keres" userId="S::pb33grl@eduvaud.ch::752d1ddc-804c-49ca-ad09-1c6c449e92da" providerId="AD" clId="Web-{25C55401-A386-6B45-C3EF-563D9179BF51}" dt="2026-03-16T08:30:59.245" v="823"/>
-          <ac:spMkLst>
-            <pc:docMk/>
-            <pc:sldMk cId="1149939271" sldId="260"/>
-            <ac:spMk id="5" creationId="{6B4E527E-EAF9-D44A-F101-AF37750482D1}"/>
-          </ac:spMkLst>
-        </pc:spChg>
-        <pc:spChg chg="add mod">
-          <ac:chgData name="Emel Keres" userId="S::pb33grl@eduvaud.ch::752d1ddc-804c-49ca-ad09-1c6c449e92da" providerId="AD" clId="Web-{25C55401-A386-6B45-C3EF-563D9179BF51}" dt="2026-03-16T08:45:04.559" v="1051"/>
-          <ac:spMkLst>
-            <pc:docMk/>
-            <pc:sldMk cId="1149939271" sldId="260"/>
-            <ac:spMk id="6" creationId="{D2A45C27-B1B2-FD2C-2CDA-6EBFBBA7440A}"/>
-          </ac:spMkLst>
-        </pc:spChg>
-        <pc:cxnChg chg="add mod">
-          <ac:chgData name="Emel Keres" userId="S::pb33grl@eduvaud.ch::752d1ddc-804c-49ca-ad09-1c6c449e92da" providerId="AD" clId="Web-{25C55401-A386-6B45-C3EF-563D9179BF51}" dt="2026-03-16T08:44:51.747" v="1046" actId="14100"/>
-          <ac:cxnSpMkLst>
-            <pc:docMk/>
-            <pc:sldMk cId="1149939271" sldId="260"/>
-            <ac:cxnSpMk id="4" creationId="{424A84CE-70A8-28D0-40E5-B9511BE684AA}"/>
-          </ac:cxnSpMkLst>
-        </pc:cxnChg>
-      </pc:sldChg>
-      <pc:sldChg chg="addSp modSp new mod setBg">
-        <pc:chgData name="Emel Keres" userId="S::pb33grl@eduvaud.ch::752d1ddc-804c-49ca-ad09-1c6c449e92da" providerId="AD" clId="Web-{25C55401-A386-6B45-C3EF-563D9179BF51}" dt="2026-03-16T14:13:38.323" v="1497" actId="20577"/>
+      <pc:sldChg chg="modSp mod">
+        <pc:chgData name="Emel Keres" userId="752d1ddc-804c-49ca-ad09-1c6c449e92da" providerId="ADAL" clId="{0429B13A-CCFC-46EC-9D2E-9EC40A1F5C46}" dt="2026-03-23T08:14:01.410" v="534" actId="5793"/>
         <pc:sldMkLst>
           <pc:docMk/>
           <pc:sldMk cId="4020419043" sldId="260"/>
         </pc:sldMkLst>
-        <pc:spChg chg="add mod">
-          <ac:chgData name="Emel Keres" userId="S::pb33grl@eduvaud.ch::752d1ddc-804c-49ca-ad09-1c6c449e92da" providerId="AD" clId="Web-{25C55401-A386-6B45-C3EF-563D9179BF51}" dt="2026-03-16T14:13:38.323" v="1497" actId="20577"/>
+        <pc:spChg chg="mod">
+          <ac:chgData name="Emel Keres" userId="752d1ddc-804c-49ca-ad09-1c6c449e92da" providerId="ADAL" clId="{0429B13A-CCFC-46EC-9D2E-9EC40A1F5C46}" dt="2026-03-23T08:14:01.410" v="534" actId="5793"/>
           <ac:spMkLst>
             <pc:docMk/>
             <pc:sldMk cId="4020419043" sldId="260"/>
@@ -731,30 +207,14 @@
           </ac:spMkLst>
         </pc:spChg>
       </pc:sldChg>
-      <pc:sldChg chg="addSp delSp modSp new mod setBg">
-        <pc:chgData name="Emel Keres" userId="S::pb33grl@eduvaud.ch::752d1ddc-804c-49ca-ad09-1c6c449e92da" providerId="AD" clId="Web-{25C55401-A386-6B45-C3EF-563D9179BF51}" dt="2026-03-16T14:13:44.745" v="1498"/>
+      <pc:sldChg chg="modSp mod ord">
+        <pc:chgData name="Emel Keres" userId="752d1ddc-804c-49ca-ad09-1c6c449e92da" providerId="ADAL" clId="{0429B13A-CCFC-46EC-9D2E-9EC40A1F5C46}" dt="2026-03-23T08:12:43.415" v="531"/>
         <pc:sldMkLst>
           <pc:docMk/>
           <pc:sldMk cId="279561989" sldId="261"/>
         </pc:sldMkLst>
-        <pc:spChg chg="add del mod">
-          <ac:chgData name="Emel Keres" userId="S::pb33grl@eduvaud.ch::752d1ddc-804c-49ca-ad09-1c6c449e92da" providerId="AD" clId="Web-{25C55401-A386-6B45-C3EF-563D9179BF51}" dt="2026-03-16T09:12:06.914" v="1124"/>
-          <ac:spMkLst>
-            <pc:docMk/>
-            <pc:sldMk cId="279561989" sldId="261"/>
-            <ac:spMk id="2" creationId="{F71CBC72-F92B-4634-D878-41525A6C08F1}"/>
-          </ac:spMkLst>
-        </pc:spChg>
-        <pc:spChg chg="add del mod">
-          <ac:chgData name="Emel Keres" userId="S::pb33grl@eduvaud.ch::752d1ddc-804c-49ca-ad09-1c6c449e92da" providerId="AD" clId="Web-{25C55401-A386-6B45-C3EF-563D9179BF51}" dt="2026-03-16T09:12:20.492" v="1128"/>
-          <ac:spMkLst>
-            <pc:docMk/>
-            <pc:sldMk cId="279561989" sldId="261"/>
-            <ac:spMk id="3" creationId="{1FEFE576-37F0-6A99-213E-4E22C0E2CB44}"/>
-          </ac:spMkLst>
-        </pc:spChg>
-        <pc:spChg chg="add mod">
-          <ac:chgData name="Emel Keres" userId="S::pb33grl@eduvaud.ch::752d1ddc-804c-49ca-ad09-1c6c449e92da" providerId="AD" clId="Web-{25C55401-A386-6B45-C3EF-563D9179BF51}" dt="2026-03-16T14:10:29.805" v="1468" actId="1076"/>
+        <pc:spChg chg="mod">
+          <ac:chgData name="Emel Keres" userId="752d1ddc-804c-49ca-ad09-1c6c449e92da" providerId="ADAL" clId="{0429B13A-CCFC-46EC-9D2E-9EC40A1F5C46}" dt="2026-03-23T08:09:24.191" v="526" actId="313"/>
           <ac:spMkLst>
             <pc:docMk/>
             <pc:sldMk cId="279561989" sldId="261"/>
@@ -762,53 +222,14 @@
           </ac:spMkLst>
         </pc:spChg>
       </pc:sldChg>
-      <pc:sldChg chg="modSp add del replId">
-        <pc:chgData name="Emel Keres" userId="S::pb33grl@eduvaud.ch::752d1ddc-804c-49ca-ad09-1c6c449e92da" providerId="AD" clId="Web-{25C55401-A386-6B45-C3EF-563D9179BF51}" dt="2026-03-16T09:07:01.662" v="1057"/>
-        <pc:sldMkLst>
-          <pc:docMk/>
-          <pc:sldMk cId="2580548579" sldId="262"/>
-        </pc:sldMkLst>
-        <pc:spChg chg="mod">
-          <ac:chgData name="Emel Keres" userId="S::pb33grl@eduvaud.ch::752d1ddc-804c-49ca-ad09-1c6c449e92da" providerId="AD" clId="Web-{25C55401-A386-6B45-C3EF-563D9179BF51}" dt="2026-03-16T08:43:19.322" v="1037" actId="1076"/>
-          <ac:spMkLst>
-            <pc:docMk/>
-            <pc:sldMk cId="2580548579" sldId="262"/>
-            <ac:spMk id="3" creationId="{AB9EA7CD-DCD4-2DC0-04B2-5B0A08D03BF4}"/>
-          </ac:spMkLst>
-        </pc:spChg>
-        <pc:spChg chg="mod">
-          <ac:chgData name="Emel Keres" userId="S::pb33grl@eduvaud.ch::752d1ddc-804c-49ca-ad09-1c6c449e92da" providerId="AD" clId="Web-{25C55401-A386-6B45-C3EF-563D9179BF51}" dt="2026-03-16T08:43:44.713" v="1042" actId="14100"/>
-          <ac:spMkLst>
-            <pc:docMk/>
-            <pc:sldMk cId="2580548579" sldId="262"/>
-            <ac:spMk id="6" creationId="{B918D90A-77E7-473B-49BF-60D165A3E090}"/>
-          </ac:spMkLst>
-        </pc:spChg>
-        <pc:cxnChg chg="mod">
-          <ac:chgData name="Emel Keres" userId="S::pb33grl@eduvaud.ch::752d1ddc-804c-49ca-ad09-1c6c449e92da" providerId="AD" clId="Web-{25C55401-A386-6B45-C3EF-563D9179BF51}" dt="2026-03-16T08:43:53.839" v="1044" actId="1076"/>
-          <ac:cxnSpMkLst>
-            <pc:docMk/>
-            <pc:sldMk cId="2580548579" sldId="262"/>
-            <ac:cxnSpMk id="4" creationId="{92E18D3E-F668-2640-627A-4F43E1645D53}"/>
-          </ac:cxnSpMkLst>
-        </pc:cxnChg>
-      </pc:sldChg>
-      <pc:sldChg chg="addSp delSp modSp new mod setBg">
-        <pc:chgData name="Emel Keres" userId="S::pb33grl@eduvaud.ch::752d1ddc-804c-49ca-ad09-1c6c449e92da" providerId="AD" clId="Web-{25C55401-A386-6B45-C3EF-563D9179BF51}" dt="2026-03-16T15:19:41.128" v="1527" actId="14100"/>
+      <pc:sldChg chg="modSp mod ord">
+        <pc:chgData name="Emel Keres" userId="752d1ddc-804c-49ca-ad09-1c6c449e92da" providerId="ADAL" clId="{0429B13A-CCFC-46EC-9D2E-9EC40A1F5C46}" dt="2026-03-23T08:12:44.641" v="533"/>
         <pc:sldMkLst>
           <pc:docMk/>
           <pc:sldMk cId="2923668699" sldId="262"/>
         </pc:sldMkLst>
-        <pc:spChg chg="add del mod">
-          <ac:chgData name="Emel Keres" userId="S::pb33grl@eduvaud.ch::752d1ddc-804c-49ca-ad09-1c6c449e92da" providerId="AD" clId="Web-{25C55401-A386-6B45-C3EF-563D9179BF51}" dt="2026-03-16T09:25:19.597" v="1366"/>
-          <ac:spMkLst>
-            <pc:docMk/>
-            <pc:sldMk cId="2923668699" sldId="262"/>
-            <ac:spMk id="2" creationId="{ABC1601C-BF29-8CF7-67E7-1DE8E764F7C0}"/>
-          </ac:spMkLst>
-        </pc:spChg>
-        <pc:spChg chg="add mod">
-          <ac:chgData name="Emel Keres" userId="S::pb33grl@eduvaud.ch::752d1ddc-804c-49ca-ad09-1c6c449e92da" providerId="AD" clId="Web-{25C55401-A386-6B45-C3EF-563D9179BF51}" dt="2026-03-16T15:19:41.128" v="1527" actId="14100"/>
+        <pc:spChg chg="mod">
+          <ac:chgData name="Emel Keres" userId="752d1ddc-804c-49ca-ad09-1c6c449e92da" providerId="ADAL" clId="{0429B13A-CCFC-46EC-9D2E-9EC40A1F5C46}" dt="2026-03-23T07:39:04.262" v="26" actId="207"/>
           <ac:spMkLst>
             <pc:docMk/>
             <pc:sldMk cId="2923668699" sldId="262"/>
@@ -816,234 +237,564 @@
           </ac:spMkLst>
         </pc:spChg>
       </pc:sldChg>
-      <pc:sldChg chg="modSp add del replId">
-        <pc:chgData name="Emel Keres" userId="S::pb33grl@eduvaud.ch::752d1ddc-804c-49ca-ad09-1c6c449e92da" providerId="AD" clId="Web-{25C55401-A386-6B45-C3EF-563D9179BF51}" dt="2026-03-16T09:07:04.366" v="1060"/>
-        <pc:sldMkLst>
-          <pc:docMk/>
-          <pc:sldMk cId="1974535775" sldId="263"/>
-        </pc:sldMkLst>
-        <pc:spChg chg="mod">
-          <ac:chgData name="Emel Keres" userId="S::pb33grl@eduvaud.ch::752d1ddc-804c-49ca-ad09-1c6c449e92da" providerId="AD" clId="Web-{25C55401-A386-6B45-C3EF-563D9179BF51}" dt="2026-03-16T08:37:29.890" v="979" actId="1076"/>
-          <ac:spMkLst>
-            <pc:docMk/>
-            <pc:sldMk cId="1974535775" sldId="263"/>
-            <ac:spMk id="3" creationId="{55B972F4-D60B-1C1A-1BF2-5144DC686F86}"/>
-          </ac:spMkLst>
-        </pc:spChg>
-        <pc:spChg chg="mod">
-          <ac:chgData name="Emel Keres" userId="S::pb33grl@eduvaud.ch::752d1ddc-804c-49ca-ad09-1c6c449e92da" providerId="AD" clId="Web-{25C55401-A386-6B45-C3EF-563D9179BF51}" dt="2026-03-16T08:41:25.692" v="1019" actId="20577"/>
-          <ac:spMkLst>
-            <pc:docMk/>
-            <pc:sldMk cId="1974535775" sldId="263"/>
-            <ac:spMk id="6" creationId="{0111A9B2-6AD0-BD72-F268-003D21816063}"/>
-          </ac:spMkLst>
-        </pc:spChg>
-        <pc:cxnChg chg="mod">
-          <ac:chgData name="Emel Keres" userId="S::pb33grl@eduvaud.ch::752d1ddc-804c-49ca-ad09-1c6c449e92da" providerId="AD" clId="Web-{25C55401-A386-6B45-C3EF-563D9179BF51}" dt="2026-03-16T08:37:44.718" v="981" actId="14100"/>
-          <ac:cxnSpMkLst>
-            <pc:docMk/>
-            <pc:sldMk cId="1974535775" sldId="263"/>
-            <ac:cxnSpMk id="4" creationId="{D3824D9A-737B-1F2D-7B58-703F59A83B44}"/>
-          </ac:cxnSpMkLst>
-        </pc:cxnChg>
-      </pc:sldChg>
-      <pc:sldChg chg="addSp modSp new del">
-        <pc:chgData name="Emel Keres" userId="S::pb33grl@eduvaud.ch::752d1ddc-804c-49ca-ad09-1c6c449e92da" providerId="AD" clId="Web-{25C55401-A386-6B45-C3EF-563D9179BF51}" dt="2026-03-16T09:25:30.441" v="1369"/>
-        <pc:sldMkLst>
-          <pc:docMk/>
-          <pc:sldMk cId="3607678397" sldId="263"/>
-        </pc:sldMkLst>
-        <pc:spChg chg="add mod">
-          <ac:chgData name="Emel Keres" userId="S::pb33grl@eduvaud.ch::752d1ddc-804c-49ca-ad09-1c6c449e92da" providerId="AD" clId="Web-{25C55401-A386-6B45-C3EF-563D9179BF51}" dt="2026-03-16T09:25:25.581" v="1368" actId="20577"/>
-          <ac:spMkLst>
-            <pc:docMk/>
-            <pc:sldMk cId="3607678397" sldId="263"/>
-            <ac:spMk id="2" creationId="{96C54DE2-18CB-4F9C-16F7-E59BE9E4679E}"/>
-          </ac:spMkLst>
-        </pc:spChg>
-      </pc:sldChg>
-      <pc:sldChg chg="new del">
-        <pc:chgData name="Emel Keres" userId="S::pb33grl@eduvaud.ch::752d1ddc-804c-49ca-ad09-1c6c449e92da" providerId="AD" clId="Web-{25C55401-A386-6B45-C3EF-563D9179BF51}" dt="2026-03-16T09:10:26.460" v="1085"/>
-        <pc:sldMkLst>
-          <pc:docMk/>
-          <pc:sldMk cId="4084392408" sldId="263"/>
-        </pc:sldMkLst>
-      </pc:sldChg>
-      <pc:sldChg chg="modSp add del replId">
-        <pc:chgData name="Emel Keres" userId="S::pb33grl@eduvaud.ch::752d1ddc-804c-49ca-ad09-1c6c449e92da" providerId="AD" clId="Web-{25C55401-A386-6B45-C3EF-563D9179BF51}" dt="2026-03-16T09:07:00.662" v="1056"/>
-        <pc:sldMkLst>
-          <pc:docMk/>
-          <pc:sldMk cId="2729730717" sldId="264"/>
-        </pc:sldMkLst>
-        <pc:spChg chg="mod">
-          <ac:chgData name="Emel Keres" userId="S::pb33grl@eduvaud.ch::752d1ddc-804c-49ca-ad09-1c6c449e92da" providerId="AD" clId="Web-{25C55401-A386-6B45-C3EF-563D9179BF51}" dt="2026-03-16T08:45:16.122" v="1052" actId="20577"/>
-          <ac:spMkLst>
-            <pc:docMk/>
-            <pc:sldMk cId="2729730717" sldId="264"/>
-            <ac:spMk id="3" creationId="{C49B2F1D-AEE8-C4A0-FA35-1DA2B6EDCD90}"/>
-          </ac:spMkLst>
-        </pc:spChg>
-        <pc:spChg chg="mod">
-          <ac:chgData name="Emel Keres" userId="S::pb33grl@eduvaud.ch::752d1ddc-804c-49ca-ad09-1c6c449e92da" providerId="AD" clId="Web-{25C55401-A386-6B45-C3EF-563D9179BF51}" dt="2026-03-16T08:45:25.029" v="1055" actId="1076"/>
-          <ac:spMkLst>
-            <pc:docMk/>
-            <pc:sldMk cId="2729730717" sldId="264"/>
-            <ac:spMk id="6" creationId="{E855B6F1-22F0-331C-EA0D-ADD429DC732F}"/>
-          </ac:spMkLst>
-        </pc:spChg>
-        <pc:cxnChg chg="mod">
-          <ac:chgData name="Emel Keres" userId="S::pb33grl@eduvaud.ch::752d1ddc-804c-49ca-ad09-1c6c449e92da" providerId="AD" clId="Web-{25C55401-A386-6B45-C3EF-563D9179BF51}" dt="2026-03-16T08:45:22.872" v="1054" actId="14100"/>
-          <ac:cxnSpMkLst>
-            <pc:docMk/>
-            <pc:sldMk cId="2729730717" sldId="264"/>
-            <ac:cxnSpMk id="4" creationId="{7ADA72F2-1BCB-C1B4-A8F0-385F909F1B30}"/>
-          </ac:cxnSpMkLst>
-        </pc:cxnChg>
-      </pc:sldChg>
-      <pc:sldChg chg="addSp modSp new mod setBg">
-        <pc:chgData name="Emel Keres" userId="S::pb33grl@eduvaud.ch::752d1ddc-804c-49ca-ad09-1c6c449e92da" providerId="AD" clId="Web-{25C55401-A386-6B45-C3EF-563D9179BF51}" dt="2026-03-16T14:13:59.761" v="1501" actId="20577"/>
-        <pc:sldMkLst>
-          <pc:docMk/>
-          <pc:sldMk cId="2998398906" sldId="264"/>
-        </pc:sldMkLst>
-        <pc:spChg chg="add mod">
-          <ac:chgData name="Emel Keres" userId="S::pb33grl@eduvaud.ch::752d1ddc-804c-49ca-ad09-1c6c449e92da" providerId="AD" clId="Web-{25C55401-A386-6B45-C3EF-563D9179BF51}" dt="2026-03-16T14:13:59.761" v="1501" actId="20577"/>
-          <ac:spMkLst>
-            <pc:docMk/>
-            <pc:sldMk cId="2998398906" sldId="264"/>
-            <ac:spMk id="2" creationId="{7E996A39-B63C-F4CA-C88D-C4DD41191E6B}"/>
-          </ac:spMkLst>
-        </pc:spChg>
-        <pc:picChg chg="add mod">
-          <ac:chgData name="Emel Keres" userId="S::pb33grl@eduvaud.ch::752d1ddc-804c-49ca-ad09-1c6c449e92da" providerId="AD" clId="Web-{25C55401-A386-6B45-C3EF-563D9179BF51}" dt="2026-03-16T14:11:00.805" v="1476" actId="1076"/>
-          <ac:picMkLst>
-            <pc:docMk/>
-            <pc:sldMk cId="2998398906" sldId="264"/>
-            <ac:picMk id="3" creationId="{26DF97D8-D6C2-B942-6600-CF365E583846}"/>
-          </ac:picMkLst>
-        </pc:picChg>
-      </pc:sldChg>
-    </pc:docChg>
-  </pc:docChgLst>
-  <pc:docChgLst>
-    <pc:chgData name="Emel Keres" userId="S::pb33grl@eduvaud.ch::752d1ddc-804c-49ca-ad09-1c6c449e92da" providerId="AD" clId="Web-{B50A05E1-AFFE-5712-8ADC-0A3520EA8336}"/>
-    <pc:docChg chg="addSld modSld">
-      <pc:chgData name="Emel Keres" userId="S::pb33grl@eduvaud.ch::752d1ddc-804c-49ca-ad09-1c6c449e92da" providerId="AD" clId="Web-{B50A05E1-AFFE-5712-8ADC-0A3520EA8336}" dt="2026-03-16T19:22:41.329" v="98" actId="1076"/>
-      <pc:docMkLst>
-        <pc:docMk/>
-      </pc:docMkLst>
-      <pc:sldChg chg="modSp">
-        <pc:chgData name="Emel Keres" userId="S::pb33grl@eduvaud.ch::752d1ddc-804c-49ca-ad09-1c6c449e92da" providerId="AD" clId="Web-{B50A05E1-AFFE-5712-8ADC-0A3520EA8336}" dt="2026-03-16T19:16:31.593" v="24" actId="20577"/>
-        <pc:sldMkLst>
-          <pc:docMk/>
-          <pc:sldMk cId="3746204366" sldId="257"/>
-        </pc:sldMkLst>
-        <pc:spChg chg="mod">
-          <ac:chgData name="Emel Keres" userId="S::pb33grl@eduvaud.ch::752d1ddc-804c-49ca-ad09-1c6c449e92da" providerId="AD" clId="Web-{B50A05E1-AFFE-5712-8ADC-0A3520EA8336}" dt="2026-03-16T19:16:31.593" v="24" actId="20577"/>
-          <ac:spMkLst>
-            <pc:docMk/>
-            <pc:sldMk cId="3746204366" sldId="257"/>
-            <ac:spMk id="3" creationId="{887DA90D-641E-3D94-03AB-A4FDCC03F76A}"/>
-          </ac:spMkLst>
-        </pc:spChg>
-      </pc:sldChg>
-      <pc:sldChg chg="addSp modSp">
-        <pc:chgData name="Emel Keres" userId="S::pb33grl@eduvaud.ch::752d1ddc-804c-49ca-ad09-1c6c449e92da" providerId="AD" clId="Web-{B50A05E1-AFFE-5712-8ADC-0A3520EA8336}" dt="2026-03-16T19:22:41.329" v="98" actId="1076"/>
-        <pc:sldMkLst>
-          <pc:docMk/>
-          <pc:sldMk cId="591358847" sldId="258"/>
-        </pc:sldMkLst>
-        <pc:spChg chg="add mod">
-          <ac:chgData name="Emel Keres" userId="S::pb33grl@eduvaud.ch::752d1ddc-804c-49ca-ad09-1c6c449e92da" providerId="AD" clId="Web-{B50A05E1-AFFE-5712-8ADC-0A3520EA8336}" dt="2026-03-16T19:22:41.329" v="98" actId="1076"/>
-          <ac:spMkLst>
-            <pc:docMk/>
-            <pc:sldMk cId="591358847" sldId="258"/>
-            <ac:spMk id="2" creationId="{E5351946-D3D5-761B-4DEF-C615971D93AB}"/>
-          </ac:spMkLst>
-        </pc:spChg>
-        <pc:spChg chg="mod">
-          <ac:chgData name="Emel Keres" userId="S::pb33grl@eduvaud.ch::752d1ddc-804c-49ca-ad09-1c6c449e92da" providerId="AD" clId="Web-{B50A05E1-AFFE-5712-8ADC-0A3520EA8336}" dt="2026-03-16T19:19:12.500" v="80" actId="1076"/>
-          <ac:spMkLst>
-            <pc:docMk/>
-            <pc:sldMk cId="591358847" sldId="258"/>
-            <ac:spMk id="7" creationId="{4376E7ED-16CB-05FB-91CE-78293A73B5CA}"/>
-          </ac:spMkLst>
-        </pc:spChg>
-        <pc:spChg chg="mod">
-          <ac:chgData name="Emel Keres" userId="S::pb33grl@eduvaud.ch::752d1ddc-804c-49ca-ad09-1c6c449e92da" providerId="AD" clId="Web-{B50A05E1-AFFE-5712-8ADC-0A3520EA8336}" dt="2026-03-16T19:19:08.219" v="79" actId="1076"/>
-          <ac:spMkLst>
-            <pc:docMk/>
-            <pc:sldMk cId="591358847" sldId="258"/>
-            <ac:spMk id="8" creationId="{50DF5D73-7738-8540-2C95-EDD208A4DFF5}"/>
-          </ac:spMkLst>
-        </pc:spChg>
-        <pc:spChg chg="mod">
-          <ac:chgData name="Emel Keres" userId="S::pb33grl@eduvaud.ch::752d1ddc-804c-49ca-ad09-1c6c449e92da" providerId="AD" clId="Web-{B50A05E1-AFFE-5712-8ADC-0A3520EA8336}" dt="2026-03-16T19:19:06.469" v="78" actId="1076"/>
-          <ac:spMkLst>
-            <pc:docMk/>
-            <pc:sldMk cId="591358847" sldId="258"/>
-            <ac:spMk id="10" creationId="{1E298B98-0D87-9547-6424-2A137F12A2C1}"/>
-          </ac:spMkLst>
-        </pc:spChg>
-        <pc:spChg chg="mod">
-          <ac:chgData name="Emel Keres" userId="S::pb33grl@eduvaud.ch::752d1ddc-804c-49ca-ad09-1c6c449e92da" providerId="AD" clId="Web-{B50A05E1-AFFE-5712-8ADC-0A3520EA8336}" dt="2026-03-16T19:19:04.219" v="77" actId="1076"/>
-          <ac:spMkLst>
-            <pc:docMk/>
-            <pc:sldMk cId="591358847" sldId="258"/>
-            <ac:spMk id="12" creationId="{DDDADAE3-B87D-A483-F332-21EC9E2ABA43}"/>
-          </ac:spMkLst>
-        </pc:spChg>
-        <pc:spChg chg="mod">
-          <ac:chgData name="Emel Keres" userId="S::pb33grl@eduvaud.ch::752d1ddc-804c-49ca-ad09-1c6c449e92da" providerId="AD" clId="Web-{B50A05E1-AFFE-5712-8ADC-0A3520EA8336}" dt="2026-03-16T19:19:02.031" v="76" actId="1076"/>
-          <ac:spMkLst>
-            <pc:docMk/>
-            <pc:sldMk cId="591358847" sldId="258"/>
-            <ac:spMk id="20" creationId="{DACCF0E4-15F5-CFF3-DD55-3A9178E3CA8E}"/>
-          </ac:spMkLst>
-        </pc:spChg>
-        <pc:spChg chg="mod">
-          <ac:chgData name="Emel Keres" userId="S::pb33grl@eduvaud.ch::752d1ddc-804c-49ca-ad09-1c6c449e92da" providerId="AD" clId="Web-{B50A05E1-AFFE-5712-8ADC-0A3520EA8336}" dt="2026-03-16T19:17:15.343" v="36"/>
-          <ac:spMkLst>
-            <pc:docMk/>
-            <pc:sldMk cId="591358847" sldId="258"/>
-            <ac:spMk id="69" creationId="{8161EA6B-09CA-445B-AB0D-8DF76FA92DEF}"/>
-          </ac:spMkLst>
-        </pc:spChg>
-      </pc:sldChg>
-      <pc:sldChg chg="addSp modSp new mod setBg">
-        <pc:chgData name="Emel Keres" userId="S::pb33grl@eduvaud.ch::752d1ddc-804c-49ca-ad09-1c6c449e92da" providerId="AD" clId="Web-{B50A05E1-AFFE-5712-8ADC-0A3520EA8336}" dt="2026-03-16T19:11:51.232" v="20" actId="20577"/>
+      <pc:sldChg chg="ord">
+        <pc:chgData name="Emel Keres" userId="752d1ddc-804c-49ca-ad09-1c6c449e92da" providerId="ADAL" clId="{0429B13A-CCFC-46EC-9D2E-9EC40A1F5C46}" dt="2026-03-23T08:11:45.635" v="529"/>
         <pc:sldMkLst>
           <pc:docMk/>
           <pc:sldMk cId="3055474279" sldId="265"/>
         </pc:sldMkLst>
-        <pc:spChg chg="add mod">
-          <ac:chgData name="Emel Keres" userId="S::pb33grl@eduvaud.ch::752d1ddc-804c-49ca-ad09-1c6c449e92da" providerId="AD" clId="Web-{B50A05E1-AFFE-5712-8ADC-0A3520EA8336}" dt="2026-03-16T19:11:51.232" v="20" actId="20577"/>
+      </pc:sldChg>
+      <pc:sldChg chg="addSp delSp modSp mod">
+        <pc:chgData name="Emel Keres" userId="752d1ddc-804c-49ca-ad09-1c6c449e92da" providerId="ADAL" clId="{0429B13A-CCFC-46EC-9D2E-9EC40A1F5C46}" dt="2026-03-23T07:45:12.536" v="223" actId="1076"/>
+        <pc:sldMkLst>
+          <pc:docMk/>
+          <pc:sldMk cId="499236404" sldId="266"/>
+        </pc:sldMkLst>
+        <pc:spChg chg="del mod">
+          <ac:chgData name="Emel Keres" userId="752d1ddc-804c-49ca-ad09-1c6c449e92da" providerId="ADAL" clId="{0429B13A-CCFC-46EC-9D2E-9EC40A1F5C46}" dt="2026-03-23T07:42:19.906" v="41"/>
           <ac:spMkLst>
             <pc:docMk/>
-            <pc:sldMk cId="3055474279" sldId="265"/>
-            <ac:spMk id="2" creationId="{7A6497C8-582E-6576-9D0F-1A17F4E860F0}"/>
-          </ac:spMkLst>
-        </pc:spChg>
-        <pc:spChg chg="add">
-          <ac:chgData name="Emel Keres" userId="S::pb33grl@eduvaud.ch::752d1ddc-804c-49ca-ad09-1c6c449e92da" providerId="AD" clId="Web-{B50A05E1-AFFE-5712-8ADC-0A3520EA8336}" dt="2026-03-16T19:11:08.669" v="12"/>
-          <ac:spMkLst>
-            <pc:docMk/>
-            <pc:sldMk cId="3055474279" sldId="265"/>
-            <ac:spMk id="8" creationId="{32E62931-8EB4-42BB-BAAB-D8757BE66D8E}"/>
+            <pc:sldMk cId="499236404" sldId="266"/>
+            <ac:spMk id="5" creationId="{70DE4B27-1A5A-059A-AE0B-DE0FB057D67D}"/>
           </ac:spMkLst>
         </pc:spChg>
         <pc:picChg chg="add mod">
-          <ac:chgData name="Emel Keres" userId="S::pb33grl@eduvaud.ch::752d1ddc-804c-49ca-ad09-1c6c449e92da" providerId="AD" clId="Web-{B50A05E1-AFFE-5712-8ADC-0A3520EA8336}" dt="2026-03-16T19:11:14.560" v="13" actId="14100"/>
+          <ac:chgData name="Emel Keres" userId="752d1ddc-804c-49ca-ad09-1c6c449e92da" providerId="ADAL" clId="{0429B13A-CCFC-46EC-9D2E-9EC40A1F5C46}" dt="2026-03-23T07:45:12.536" v="223" actId="1076"/>
           <ac:picMkLst>
             <pc:docMk/>
-            <pc:sldMk cId="3055474279" sldId="265"/>
-            <ac:picMk id="3" creationId="{BF980E98-CBAE-3359-B35B-0F0699894B7D}"/>
+            <pc:sldMk cId="499236404" sldId="266"/>
+            <ac:picMk id="6" creationId="{2F06BAC0-0FE3-07CB-C80A-060A15B20228}"/>
           </ac:picMkLst>
         </pc:picChg>
+      </pc:sldChg>
+      <pc:sldChg chg="modSp new mod setBg">
+        <pc:chgData name="Emel Keres" userId="752d1ddc-804c-49ca-ad09-1c6c449e92da" providerId="ADAL" clId="{0429B13A-CCFC-46EC-9D2E-9EC40A1F5C46}" dt="2026-03-23T07:45:27.491" v="224" actId="113"/>
+        <pc:sldMkLst>
+          <pc:docMk/>
+          <pc:sldMk cId="1708262458" sldId="267"/>
+        </pc:sldMkLst>
+        <pc:spChg chg="mod">
+          <ac:chgData name="Emel Keres" userId="752d1ddc-804c-49ca-ad09-1c6c449e92da" providerId="ADAL" clId="{0429B13A-CCFC-46EC-9D2E-9EC40A1F5C46}" dt="2026-03-23T07:39:45.524" v="30" actId="113"/>
+          <ac:spMkLst>
+            <pc:docMk/>
+            <pc:sldMk cId="1708262458" sldId="267"/>
+            <ac:spMk id="2" creationId="{7B35E316-6C07-EC8D-4E8F-B754BDBF732F}"/>
+          </ac:spMkLst>
+        </pc:spChg>
+        <pc:spChg chg="mod">
+          <ac:chgData name="Emel Keres" userId="752d1ddc-804c-49ca-ad09-1c6c449e92da" providerId="ADAL" clId="{0429B13A-CCFC-46EC-9D2E-9EC40A1F5C46}" dt="2026-03-23T07:45:27.491" v="224" actId="113"/>
+          <ac:spMkLst>
+            <pc:docMk/>
+            <pc:sldMk cId="1708262458" sldId="267"/>
+            <ac:spMk id="3" creationId="{DDC041AC-1C4B-3363-E6C3-987E82B84433}"/>
+          </ac:spMkLst>
+        </pc:spChg>
+      </pc:sldChg>
+      <pc:sldChg chg="modSp new mod setBg">
+        <pc:chgData name="Emel Keres" userId="752d1ddc-804c-49ca-ad09-1c6c449e92da" providerId="ADAL" clId="{0429B13A-CCFC-46EC-9D2E-9EC40A1F5C46}" dt="2026-03-23T08:11:00.416" v="527" actId="1076"/>
+        <pc:sldMkLst>
+          <pc:docMk/>
+          <pc:sldMk cId="2780437922" sldId="268"/>
+        </pc:sldMkLst>
+        <pc:spChg chg="mod">
+          <ac:chgData name="Emel Keres" userId="752d1ddc-804c-49ca-ad09-1c6c449e92da" providerId="ADAL" clId="{0429B13A-CCFC-46EC-9D2E-9EC40A1F5C46}" dt="2026-03-23T08:05:52.103" v="502" actId="113"/>
+          <ac:spMkLst>
+            <pc:docMk/>
+            <pc:sldMk cId="2780437922" sldId="268"/>
+            <ac:spMk id="2" creationId="{38127A41-FC8F-7BF2-D311-D5C05DAC0ECD}"/>
+          </ac:spMkLst>
+        </pc:spChg>
+        <pc:spChg chg="mod">
+          <ac:chgData name="Emel Keres" userId="752d1ddc-804c-49ca-ad09-1c6c449e92da" providerId="ADAL" clId="{0429B13A-CCFC-46EC-9D2E-9EC40A1F5C46}" dt="2026-03-23T08:11:00.416" v="527" actId="1076"/>
+          <ac:spMkLst>
+            <pc:docMk/>
+            <pc:sldMk cId="2780437922" sldId="268"/>
+            <ac:spMk id="3" creationId="{C854B665-A18C-ABAB-8F83-11CFEE390200}"/>
+          </ac:spMkLst>
+        </pc:spChg>
+      </pc:sldChg>
+      <pc:sldChg chg="modSp new del mod">
+        <pc:chgData name="Emel Keres" userId="752d1ddc-804c-49ca-ad09-1c6c449e92da" providerId="ADAL" clId="{0429B13A-CCFC-46EC-9D2E-9EC40A1F5C46}" dt="2026-03-23T07:52:09.098" v="315" actId="47"/>
+        <pc:sldMkLst>
+          <pc:docMk/>
+          <pc:sldMk cId="3444485359" sldId="268"/>
+        </pc:sldMkLst>
+        <pc:spChg chg="mod">
+          <ac:chgData name="Emel Keres" userId="752d1ddc-804c-49ca-ad09-1c6c449e92da" providerId="ADAL" clId="{0429B13A-CCFC-46EC-9D2E-9EC40A1F5C46}" dt="2026-03-23T07:50:31.175" v="314" actId="20577"/>
+          <ac:spMkLst>
+            <pc:docMk/>
+            <pc:sldMk cId="3444485359" sldId="268"/>
+            <ac:spMk id="2" creationId="{A850D71F-9874-F271-06D2-BBE3EC297FCB}"/>
+          </ac:spMkLst>
+        </pc:spChg>
+      </pc:sldChg>
+      <pc:sldChg chg="modSp new del mod">
+        <pc:chgData name="Emel Keres" userId="752d1ddc-804c-49ca-ad09-1c6c449e92da" providerId="ADAL" clId="{0429B13A-CCFC-46EC-9D2E-9EC40A1F5C46}" dt="2026-03-23T08:07:32.925" v="524" actId="47"/>
+        <pc:sldMkLst>
+          <pc:docMk/>
+          <pc:sldMk cId="441883318" sldId="269"/>
+        </pc:sldMkLst>
+        <pc:spChg chg="mod">
+          <ac:chgData name="Emel Keres" userId="752d1ddc-804c-49ca-ad09-1c6c449e92da" providerId="ADAL" clId="{0429B13A-CCFC-46EC-9D2E-9EC40A1F5C46}" dt="2026-03-23T08:06:32.437" v="518" actId="20577"/>
+          <ac:spMkLst>
+            <pc:docMk/>
+            <pc:sldMk cId="441883318" sldId="269"/>
+            <ac:spMk id="2" creationId="{791FE5E5-E16C-85EF-A8E1-6EAA070DCCFF}"/>
+          </ac:spMkLst>
+        </pc:spChg>
+      </pc:sldChg>
+      <pc:sldChg chg="modSp new del mod">
+        <pc:chgData name="Emel Keres" userId="752d1ddc-804c-49ca-ad09-1c6c449e92da" providerId="ADAL" clId="{0429B13A-CCFC-46EC-9D2E-9EC40A1F5C46}" dt="2026-03-23T08:07:32.016" v="523" actId="47"/>
+        <pc:sldMkLst>
+          <pc:docMk/>
+          <pc:sldMk cId="1611830645" sldId="270"/>
+        </pc:sldMkLst>
+        <pc:spChg chg="mod">
+          <ac:chgData name="Emel Keres" userId="752d1ddc-804c-49ca-ad09-1c6c449e92da" providerId="ADAL" clId="{0429B13A-CCFC-46EC-9D2E-9EC40A1F5C46}" dt="2026-03-23T08:06:47.082" v="522" actId="20577"/>
+          <ac:spMkLst>
+            <pc:docMk/>
+            <pc:sldMk cId="1611830645" sldId="270"/>
+            <ac:spMk id="2" creationId="{B16B37D5-21D3-8ADC-D3A1-0C7CF201FE7F}"/>
+          </ac:spMkLst>
+        </pc:spChg>
       </pc:sldChg>
     </pc:docChg>
   </pc:docChgLst>
 </pc:chgInfo>
+</file>
+
+<file path=ppt/notesMasters/notesMaster1.xml><?xml version="1.0" encoding="utf-8"?>
+<p:notesMaster xmlns:a="http://schemas.openxmlformats.org/drawingml/2006/main" xmlns:r="http://schemas.openxmlformats.org/officeDocument/2006/relationships" xmlns:p="http://schemas.openxmlformats.org/presentationml/2006/main">
+  <p:cSld>
+    <p:bg>
+      <p:bgRef idx="1001">
+        <a:schemeClr val="bg1"/>
+      </p:bgRef>
+    </p:bg>
+    <p:spTree>
+      <p:nvGrpSpPr>
+        <p:cNvPr id="1" name=""/>
+        <p:cNvGrpSpPr/>
+        <p:nvPr/>
+      </p:nvGrpSpPr>
+      <p:grpSpPr>
+        <a:xfrm>
+          <a:off x="0" y="0"/>
+          <a:ext cx="0" cy="0"/>
+          <a:chOff x="0" y="0"/>
+          <a:chExt cx="0" cy="0"/>
+        </a:xfrm>
+      </p:grpSpPr>
+      <p:sp>
+        <p:nvSpPr>
+          <p:cNvPr id="2" name="Espace réservé de l'en-tête 1"/>
+          <p:cNvSpPr>
+            <a:spLocks noGrp="1"/>
+          </p:cNvSpPr>
+          <p:nvPr>
+            <p:ph type="hdr" sz="quarter"/>
+          </p:nvPr>
+        </p:nvSpPr>
+        <p:spPr>
+          <a:xfrm>
+            <a:off x="0" y="0"/>
+            <a:ext cx="2971800" cy="458788"/>
+          </a:xfrm>
+          <a:prstGeom prst="rect">
+            <a:avLst/>
+          </a:prstGeom>
+        </p:spPr>
+        <p:txBody>
+          <a:bodyPr vert="horz" lIns="91440" tIns="45720" rIns="91440" bIns="45720" rtlCol="0"/>
+          <a:lstStyle>
+            <a:lvl1pPr algn="l">
+              <a:defRPr sz="1200"/>
+            </a:lvl1pPr>
+          </a:lstStyle>
+          <a:p>
+            <a:endParaRPr lang="fr-CH"/>
+          </a:p>
+        </p:txBody>
+      </p:sp>
+      <p:sp>
+        <p:nvSpPr>
+          <p:cNvPr id="3" name="Espace réservé de la date 2"/>
+          <p:cNvSpPr>
+            <a:spLocks noGrp="1"/>
+          </p:cNvSpPr>
+          <p:nvPr>
+            <p:ph type="dt" idx="1"/>
+          </p:nvPr>
+        </p:nvSpPr>
+        <p:spPr>
+          <a:xfrm>
+            <a:off x="3884613" y="0"/>
+            <a:ext cx="2971800" cy="458788"/>
+          </a:xfrm>
+          <a:prstGeom prst="rect">
+            <a:avLst/>
+          </a:prstGeom>
+        </p:spPr>
+        <p:txBody>
+          <a:bodyPr vert="horz" lIns="91440" tIns="45720" rIns="91440" bIns="45720" rtlCol="0"/>
+          <a:lstStyle>
+            <a:lvl1pPr algn="r">
+              <a:defRPr sz="1200"/>
+            </a:lvl1pPr>
+          </a:lstStyle>
+          <a:p>
+            <a:fld id="{45C1CD7C-8F31-40FA-8A14-73DFBAADCBFB}" type="datetimeFigureOut">
+              <a:rPr lang="fr-CH" smtClean="0"/>
+              <a:t>23.03.2026</a:t>
+            </a:fld>
+            <a:endParaRPr lang="fr-CH"/>
+          </a:p>
+        </p:txBody>
+      </p:sp>
+      <p:sp>
+        <p:nvSpPr>
+          <p:cNvPr id="4" name="Espace réservé de l'image des diapositives 3"/>
+          <p:cNvSpPr>
+            <a:spLocks noGrp="1" noRot="1" noChangeAspect="1"/>
+          </p:cNvSpPr>
+          <p:nvPr>
+            <p:ph type="sldImg" idx="2"/>
+          </p:nvPr>
+        </p:nvSpPr>
+        <p:spPr>
+          <a:xfrm>
+            <a:off x="685800" y="1143000"/>
+            <a:ext cx="5486400" cy="3086100"/>
+          </a:xfrm>
+          <a:prstGeom prst="rect">
+            <a:avLst/>
+          </a:prstGeom>
+          <a:noFill/>
+          <a:ln w="12700">
+            <a:solidFill>
+              <a:prstClr val="black"/>
+            </a:solidFill>
+          </a:ln>
+        </p:spPr>
+        <p:txBody>
+          <a:bodyPr vert="horz" lIns="91440" tIns="45720" rIns="91440" bIns="45720" rtlCol="0" anchor="ctr"/>
+          <a:lstStyle/>
+          <a:p>
+            <a:endParaRPr lang="fr-CH"/>
+          </a:p>
+        </p:txBody>
+      </p:sp>
+      <p:sp>
+        <p:nvSpPr>
+          <p:cNvPr id="5" name="Espace réservé des notes 4"/>
+          <p:cNvSpPr>
+            <a:spLocks noGrp="1"/>
+          </p:cNvSpPr>
+          <p:nvPr>
+            <p:ph type="body" sz="quarter" idx="3"/>
+          </p:nvPr>
+        </p:nvSpPr>
+        <p:spPr>
+          <a:xfrm>
+            <a:off x="685800" y="4400550"/>
+            <a:ext cx="5486400" cy="3600450"/>
+          </a:xfrm>
+          <a:prstGeom prst="rect">
+            <a:avLst/>
+          </a:prstGeom>
+        </p:spPr>
+        <p:txBody>
+          <a:bodyPr vert="horz" lIns="91440" tIns="45720" rIns="91440" bIns="45720" rtlCol="0"/>
+          <a:lstStyle/>
+          <a:p>
+            <a:pPr lvl="0"/>
+            <a:r>
+              <a:rPr lang="fr-FR"/>
+              <a:t>Cliquez pour modifier les styles du texte du masque</a:t>
+            </a:r>
+          </a:p>
+          <a:p>
+            <a:pPr lvl="1"/>
+            <a:r>
+              <a:rPr lang="fr-FR"/>
+              <a:t>Deuxième niveau</a:t>
+            </a:r>
+          </a:p>
+          <a:p>
+            <a:pPr lvl="2"/>
+            <a:r>
+              <a:rPr lang="fr-FR"/>
+              <a:t>Troisième niveau</a:t>
+            </a:r>
+          </a:p>
+          <a:p>
+            <a:pPr lvl="3"/>
+            <a:r>
+              <a:rPr lang="fr-FR"/>
+              <a:t>Quatrième niveau</a:t>
+            </a:r>
+          </a:p>
+          <a:p>
+            <a:pPr lvl="4"/>
+            <a:r>
+              <a:rPr lang="fr-FR"/>
+              <a:t>Cinquième niveau</a:t>
+            </a:r>
+            <a:endParaRPr lang="fr-CH"/>
+          </a:p>
+        </p:txBody>
+      </p:sp>
+      <p:sp>
+        <p:nvSpPr>
+          <p:cNvPr id="6" name="Espace réservé du pied de page 5"/>
+          <p:cNvSpPr>
+            <a:spLocks noGrp="1"/>
+          </p:cNvSpPr>
+          <p:nvPr>
+            <p:ph type="ftr" sz="quarter" idx="4"/>
+          </p:nvPr>
+        </p:nvSpPr>
+        <p:spPr>
+          <a:xfrm>
+            <a:off x="0" y="8685213"/>
+            <a:ext cx="2971800" cy="458787"/>
+          </a:xfrm>
+          <a:prstGeom prst="rect">
+            <a:avLst/>
+          </a:prstGeom>
+        </p:spPr>
+        <p:txBody>
+          <a:bodyPr vert="horz" lIns="91440" tIns="45720" rIns="91440" bIns="45720" rtlCol="0" anchor="b"/>
+          <a:lstStyle>
+            <a:lvl1pPr algn="l">
+              <a:defRPr sz="1200"/>
+            </a:lvl1pPr>
+          </a:lstStyle>
+          <a:p>
+            <a:endParaRPr lang="fr-CH"/>
+          </a:p>
+        </p:txBody>
+      </p:sp>
+      <p:sp>
+        <p:nvSpPr>
+          <p:cNvPr id="7" name="Espace réservé du numéro de diapositive 6"/>
+          <p:cNvSpPr>
+            <a:spLocks noGrp="1"/>
+          </p:cNvSpPr>
+          <p:nvPr>
+            <p:ph type="sldNum" sz="quarter" idx="5"/>
+          </p:nvPr>
+        </p:nvSpPr>
+        <p:spPr>
+          <a:xfrm>
+            <a:off x="3884613" y="8685213"/>
+            <a:ext cx="2971800" cy="458787"/>
+          </a:xfrm>
+          <a:prstGeom prst="rect">
+            <a:avLst/>
+          </a:prstGeom>
+        </p:spPr>
+        <p:txBody>
+          <a:bodyPr vert="horz" lIns="91440" tIns="45720" rIns="91440" bIns="45720" rtlCol="0" anchor="b"/>
+          <a:lstStyle>
+            <a:lvl1pPr algn="r">
+              <a:defRPr sz="1200"/>
+            </a:lvl1pPr>
+          </a:lstStyle>
+          <a:p>
+            <a:fld id="{C2EDA11E-B8CB-48B3-9EEC-B0BF27E9C024}" type="slidenum">
+              <a:rPr lang="fr-CH" smtClean="0"/>
+              <a:t>‹#›</a:t>
+            </a:fld>
+            <a:endParaRPr lang="fr-CH"/>
+          </a:p>
+        </p:txBody>
+      </p:sp>
+    </p:spTree>
+    <p:extLst>
+      <p:ext uri="{BB962C8B-B14F-4D97-AF65-F5344CB8AC3E}">
+        <p14:creationId xmlns:p14="http://schemas.microsoft.com/office/powerpoint/2010/main" val="3762154333"/>
+      </p:ext>
+    </p:extLst>
+  </p:cSld>
+  <p:clrMap bg1="lt1" tx1="dk1" bg2="lt2" tx2="dk2" accent1="accent1" accent2="accent2" accent3="accent3" accent4="accent4" accent5="accent5" accent6="accent6" hlink="hlink" folHlink="folHlink"/>
+  <p:notesStyle>
+    <a:lvl1pPr marL="0" algn="l" defTabSz="914400" rtl="0" eaLnBrk="1" latinLnBrk="0" hangingPunct="1">
+      <a:defRPr sz="1200" kern="1200">
+        <a:solidFill>
+          <a:schemeClr val="tx1"/>
+        </a:solidFill>
+        <a:latin typeface="+mn-lt"/>
+        <a:ea typeface="+mn-ea"/>
+        <a:cs typeface="+mn-cs"/>
+      </a:defRPr>
+    </a:lvl1pPr>
+    <a:lvl2pPr marL="457200" algn="l" defTabSz="914400" rtl="0" eaLnBrk="1" latinLnBrk="0" hangingPunct="1">
+      <a:defRPr sz="1200" kern="1200">
+        <a:solidFill>
+          <a:schemeClr val="tx1"/>
+        </a:solidFill>
+        <a:latin typeface="+mn-lt"/>
+        <a:ea typeface="+mn-ea"/>
+        <a:cs typeface="+mn-cs"/>
+      </a:defRPr>
+    </a:lvl2pPr>
+    <a:lvl3pPr marL="914400" algn="l" defTabSz="914400" rtl="0" eaLnBrk="1" latinLnBrk="0" hangingPunct="1">
+      <a:defRPr sz="1200" kern="1200">
+        <a:solidFill>
+          <a:schemeClr val="tx1"/>
+        </a:solidFill>
+        <a:latin typeface="+mn-lt"/>
+        <a:ea typeface="+mn-ea"/>
+        <a:cs typeface="+mn-cs"/>
+      </a:defRPr>
+    </a:lvl3pPr>
+    <a:lvl4pPr marL="1371600" algn="l" defTabSz="914400" rtl="0" eaLnBrk="1" latinLnBrk="0" hangingPunct="1">
+      <a:defRPr sz="1200" kern="1200">
+        <a:solidFill>
+          <a:schemeClr val="tx1"/>
+        </a:solidFill>
+        <a:latin typeface="+mn-lt"/>
+        <a:ea typeface="+mn-ea"/>
+        <a:cs typeface="+mn-cs"/>
+      </a:defRPr>
+    </a:lvl4pPr>
+    <a:lvl5pPr marL="1828800" algn="l" defTabSz="914400" rtl="0" eaLnBrk="1" latinLnBrk="0" hangingPunct="1">
+      <a:defRPr sz="1200" kern="1200">
+        <a:solidFill>
+          <a:schemeClr val="tx1"/>
+        </a:solidFill>
+        <a:latin typeface="+mn-lt"/>
+        <a:ea typeface="+mn-ea"/>
+        <a:cs typeface="+mn-cs"/>
+      </a:defRPr>
+    </a:lvl5pPr>
+    <a:lvl6pPr marL="2286000" algn="l" defTabSz="914400" rtl="0" eaLnBrk="1" latinLnBrk="0" hangingPunct="1">
+      <a:defRPr sz="1200" kern="1200">
+        <a:solidFill>
+          <a:schemeClr val="tx1"/>
+        </a:solidFill>
+        <a:latin typeface="+mn-lt"/>
+        <a:ea typeface="+mn-ea"/>
+        <a:cs typeface="+mn-cs"/>
+      </a:defRPr>
+    </a:lvl6pPr>
+    <a:lvl7pPr marL="2743200" algn="l" defTabSz="914400" rtl="0" eaLnBrk="1" latinLnBrk="0" hangingPunct="1">
+      <a:defRPr sz="1200" kern="1200">
+        <a:solidFill>
+          <a:schemeClr val="tx1"/>
+        </a:solidFill>
+        <a:latin typeface="+mn-lt"/>
+        <a:ea typeface="+mn-ea"/>
+        <a:cs typeface="+mn-cs"/>
+      </a:defRPr>
+    </a:lvl7pPr>
+    <a:lvl8pPr marL="3200400" algn="l" defTabSz="914400" rtl="0" eaLnBrk="1" latinLnBrk="0" hangingPunct="1">
+      <a:defRPr sz="1200" kern="1200">
+        <a:solidFill>
+          <a:schemeClr val="tx1"/>
+        </a:solidFill>
+        <a:latin typeface="+mn-lt"/>
+        <a:ea typeface="+mn-ea"/>
+        <a:cs typeface="+mn-cs"/>
+      </a:defRPr>
+    </a:lvl8pPr>
+    <a:lvl9pPr marL="3657600" algn="l" defTabSz="914400" rtl="0" eaLnBrk="1" latinLnBrk="0" hangingPunct="1">
+      <a:defRPr sz="1200" kern="1200">
+        <a:solidFill>
+          <a:schemeClr val="tx1"/>
+        </a:solidFill>
+        <a:latin typeface="+mn-lt"/>
+        <a:ea typeface="+mn-ea"/>
+        <a:cs typeface="+mn-cs"/>
+      </a:defRPr>
+    </a:lvl9pPr>
+  </p:notesStyle>
+</p:notesMaster>
+</file>
+
+<file path=ppt/notesSlides/notesSlide1.xml><?xml version="1.0" encoding="utf-8"?>
+<p:notes xmlns:a="http://schemas.openxmlformats.org/drawingml/2006/main" xmlns:r="http://schemas.openxmlformats.org/officeDocument/2006/relationships" xmlns:p="http://schemas.openxmlformats.org/presentationml/2006/main">
+  <p:cSld>
+    <p:spTree>
+      <p:nvGrpSpPr>
+        <p:cNvPr id="1" name=""/>
+        <p:cNvGrpSpPr/>
+        <p:nvPr/>
+      </p:nvGrpSpPr>
+      <p:grpSpPr>
+        <a:xfrm>
+          <a:off x="0" y="0"/>
+          <a:ext cx="0" cy="0"/>
+          <a:chOff x="0" y="0"/>
+          <a:chExt cx="0" cy="0"/>
+        </a:xfrm>
+      </p:grpSpPr>
+      <p:sp>
+        <p:nvSpPr>
+          <p:cNvPr id="2" name="Espace réservé de l'image des diapositives 1"/>
+          <p:cNvSpPr>
+            <a:spLocks noGrp="1" noRot="1" noChangeAspect="1"/>
+          </p:cNvSpPr>
+          <p:nvPr>
+            <p:ph type="sldImg"/>
+          </p:nvPr>
+        </p:nvSpPr>
+        <p:spPr/>
+      </p:sp>
+      <p:sp>
+        <p:nvSpPr>
+          <p:cNvPr id="3" name="Espace réservé des notes 2"/>
+          <p:cNvSpPr>
+            <a:spLocks noGrp="1"/>
+          </p:cNvSpPr>
+          <p:nvPr>
+            <p:ph type="body" idx="1"/>
+          </p:nvPr>
+        </p:nvSpPr>
+        <p:spPr/>
+        <p:txBody>
+          <a:bodyPr/>
+          <a:lstStyle/>
+          <a:p>
+            <a:endParaRPr lang="fr-CH"/>
+          </a:p>
+        </p:txBody>
+      </p:sp>
+      <p:sp>
+        <p:nvSpPr>
+          <p:cNvPr id="4" name="Espace réservé du numéro de diapositive 3"/>
+          <p:cNvSpPr>
+            <a:spLocks noGrp="1"/>
+          </p:cNvSpPr>
+          <p:nvPr>
+            <p:ph type="sldNum" sz="quarter" idx="5"/>
+          </p:nvPr>
+        </p:nvSpPr>
+        <p:spPr/>
+        <p:txBody>
+          <a:bodyPr/>
+          <a:lstStyle/>
+          <a:p>
+            <a:fld id="{C2EDA11E-B8CB-48B3-9EEC-B0BF27E9C024}" type="slidenum">
+              <a:rPr lang="fr-CH" smtClean="0"/>
+              <a:t>10</a:t>
+            </a:fld>
+            <a:endParaRPr lang="fr-CH"/>
+          </a:p>
+        </p:txBody>
+      </p:sp>
+    </p:spTree>
+    <p:extLst>
+      <p:ext uri="{BB962C8B-B14F-4D97-AF65-F5344CB8AC3E}">
+        <p14:creationId xmlns:p14="http://schemas.microsoft.com/office/powerpoint/2010/main" val="968296388"/>
+      </p:ext>
+    </p:extLst>
+  </p:cSld>
+  <p:clrMapOvr>
+    <a:masterClrMapping/>
+  </p:clrMapOvr>
+</p:notes>
 </file>
 
 <file path=ppt/slideLayouts/slideLayout1.xml><?xml version="1.0" encoding="utf-8"?>
@@ -1195,7 +946,7 @@
           <a:p>
             <a:fld id="{927FD973-9FBE-4D8C-A70F-308F6E17EE27}" type="datetimeFigureOut">
               <a:rPr lang="fr-CH" smtClean="0"/>
-              <a:t>16.03.2026</a:t>
+              <a:t>23.03.2026</a:t>
             </a:fld>
             <a:endParaRPr lang="fr-CH"/>
           </a:p>
@@ -1249,7 +1000,7 @@
           <a:p>
             <a:fld id="{4A9A95A2-B9ED-4294-8263-E0AAB1EC85C3}" type="slidenum">
               <a:rPr lang="fr-CH" smtClean="0"/>
-              <a:t>‹N°›</a:t>
+              <a:t>‹#›</a:t>
             </a:fld>
             <a:endParaRPr lang="fr-CH"/>
           </a:p>
@@ -1395,7 +1146,7 @@
           <a:p>
             <a:fld id="{927FD973-9FBE-4D8C-A70F-308F6E17EE27}" type="datetimeFigureOut">
               <a:rPr lang="fr-CH" smtClean="0"/>
-              <a:t>16.03.2026</a:t>
+              <a:t>23.03.2026</a:t>
             </a:fld>
             <a:endParaRPr lang="fr-CH"/>
           </a:p>
@@ -1449,7 +1200,7 @@
           <a:p>
             <a:fld id="{4A9A95A2-B9ED-4294-8263-E0AAB1EC85C3}" type="slidenum">
               <a:rPr lang="fr-CH" smtClean="0"/>
-              <a:t>‹N°›</a:t>
+              <a:t>‹#›</a:t>
             </a:fld>
             <a:endParaRPr lang="fr-CH"/>
           </a:p>
@@ -1605,7 +1356,7 @@
           <a:p>
             <a:fld id="{927FD973-9FBE-4D8C-A70F-308F6E17EE27}" type="datetimeFigureOut">
               <a:rPr lang="fr-CH" smtClean="0"/>
-              <a:t>16.03.2026</a:t>
+              <a:t>23.03.2026</a:t>
             </a:fld>
             <a:endParaRPr lang="fr-CH"/>
           </a:p>
@@ -1659,7 +1410,7 @@
           <a:p>
             <a:fld id="{4A9A95A2-B9ED-4294-8263-E0AAB1EC85C3}" type="slidenum">
               <a:rPr lang="fr-CH" smtClean="0"/>
-              <a:t>‹N°›</a:t>
+              <a:t>‹#›</a:t>
             </a:fld>
             <a:endParaRPr lang="fr-CH"/>
           </a:p>
@@ -1805,7 +1556,7 @@
           <a:p>
             <a:fld id="{927FD973-9FBE-4D8C-A70F-308F6E17EE27}" type="datetimeFigureOut">
               <a:rPr lang="fr-CH" smtClean="0"/>
-              <a:t>16.03.2026</a:t>
+              <a:t>23.03.2026</a:t>
             </a:fld>
             <a:endParaRPr lang="fr-CH"/>
           </a:p>
@@ -1859,7 +1610,7 @@
           <a:p>
             <a:fld id="{4A9A95A2-B9ED-4294-8263-E0AAB1EC85C3}" type="slidenum">
               <a:rPr lang="fr-CH" smtClean="0"/>
-              <a:t>‹N°›</a:t>
+              <a:t>‹#›</a:t>
             </a:fld>
             <a:endParaRPr lang="fr-CH"/>
           </a:p>
@@ -2081,7 +1832,7 @@
           <a:p>
             <a:fld id="{927FD973-9FBE-4D8C-A70F-308F6E17EE27}" type="datetimeFigureOut">
               <a:rPr lang="fr-CH" smtClean="0"/>
-              <a:t>16.03.2026</a:t>
+              <a:t>23.03.2026</a:t>
             </a:fld>
             <a:endParaRPr lang="fr-CH"/>
           </a:p>
@@ -2135,7 +1886,7 @@
           <a:p>
             <a:fld id="{4A9A95A2-B9ED-4294-8263-E0AAB1EC85C3}" type="slidenum">
               <a:rPr lang="fr-CH" smtClean="0"/>
-              <a:t>‹N°›</a:t>
+              <a:t>‹#›</a:t>
             </a:fld>
             <a:endParaRPr lang="fr-CH"/>
           </a:p>
@@ -2349,7 +2100,7 @@
           <a:p>
             <a:fld id="{927FD973-9FBE-4D8C-A70F-308F6E17EE27}" type="datetimeFigureOut">
               <a:rPr lang="fr-CH" smtClean="0"/>
-              <a:t>16.03.2026</a:t>
+              <a:t>23.03.2026</a:t>
             </a:fld>
             <a:endParaRPr lang="fr-CH"/>
           </a:p>
@@ -2403,7 +2154,7 @@
           <a:p>
             <a:fld id="{4A9A95A2-B9ED-4294-8263-E0AAB1EC85C3}" type="slidenum">
               <a:rPr lang="fr-CH" smtClean="0"/>
-              <a:t>‹N°›</a:t>
+              <a:t>‹#›</a:t>
             </a:fld>
             <a:endParaRPr lang="fr-CH"/>
           </a:p>
@@ -2764,7 +2515,7 @@
           <a:p>
             <a:fld id="{927FD973-9FBE-4D8C-A70F-308F6E17EE27}" type="datetimeFigureOut">
               <a:rPr lang="fr-CH" smtClean="0"/>
-              <a:t>16.03.2026</a:t>
+              <a:t>23.03.2026</a:t>
             </a:fld>
             <a:endParaRPr lang="fr-CH"/>
           </a:p>
@@ -2818,7 +2569,7 @@
           <a:p>
             <a:fld id="{4A9A95A2-B9ED-4294-8263-E0AAB1EC85C3}" type="slidenum">
               <a:rPr lang="fr-CH" smtClean="0"/>
-              <a:t>‹N°›</a:t>
+              <a:t>‹#›</a:t>
             </a:fld>
             <a:endParaRPr lang="fr-CH"/>
           </a:p>
@@ -2906,7 +2657,7 @@
           <a:p>
             <a:fld id="{927FD973-9FBE-4D8C-A70F-308F6E17EE27}" type="datetimeFigureOut">
               <a:rPr lang="fr-CH" smtClean="0"/>
-              <a:t>16.03.2026</a:t>
+              <a:t>23.03.2026</a:t>
             </a:fld>
             <a:endParaRPr lang="fr-CH"/>
           </a:p>
@@ -2960,7 +2711,7 @@
           <a:p>
             <a:fld id="{4A9A95A2-B9ED-4294-8263-E0AAB1EC85C3}" type="slidenum">
               <a:rPr lang="fr-CH" smtClean="0"/>
-              <a:t>‹N°›</a:t>
+              <a:t>‹#›</a:t>
             </a:fld>
             <a:endParaRPr lang="fr-CH"/>
           </a:p>
@@ -3019,7 +2770,7 @@
           <a:p>
             <a:fld id="{927FD973-9FBE-4D8C-A70F-308F6E17EE27}" type="datetimeFigureOut">
               <a:rPr lang="fr-CH" smtClean="0"/>
-              <a:t>16.03.2026</a:t>
+              <a:t>23.03.2026</a:t>
             </a:fld>
             <a:endParaRPr lang="fr-CH"/>
           </a:p>
@@ -3073,7 +2824,7 @@
           <a:p>
             <a:fld id="{4A9A95A2-B9ED-4294-8263-E0AAB1EC85C3}" type="slidenum">
               <a:rPr lang="fr-CH" smtClean="0"/>
-              <a:t>‹N°›</a:t>
+              <a:t>‹#›</a:t>
             </a:fld>
             <a:endParaRPr lang="fr-CH"/>
           </a:p>
@@ -3332,7 +3083,7 @@
           <a:p>
             <a:fld id="{927FD973-9FBE-4D8C-A70F-308F6E17EE27}" type="datetimeFigureOut">
               <a:rPr lang="fr-CH" smtClean="0"/>
-              <a:t>16.03.2026</a:t>
+              <a:t>23.03.2026</a:t>
             </a:fld>
             <a:endParaRPr lang="fr-CH"/>
           </a:p>
@@ -3386,7 +3137,7 @@
           <a:p>
             <a:fld id="{4A9A95A2-B9ED-4294-8263-E0AAB1EC85C3}" type="slidenum">
               <a:rPr lang="fr-CH" smtClean="0"/>
-              <a:t>‹N°›</a:t>
+              <a:t>‹#›</a:t>
             </a:fld>
             <a:endParaRPr lang="fr-CH"/>
           </a:p>
@@ -3621,7 +3372,7 @@
           <a:p>
             <a:fld id="{927FD973-9FBE-4D8C-A70F-308F6E17EE27}" type="datetimeFigureOut">
               <a:rPr lang="fr-CH" smtClean="0"/>
-              <a:t>16.03.2026</a:t>
+              <a:t>23.03.2026</a:t>
             </a:fld>
             <a:endParaRPr lang="fr-CH"/>
           </a:p>
@@ -3675,7 +3426,7 @@
           <a:p>
             <a:fld id="{4A9A95A2-B9ED-4294-8263-E0AAB1EC85C3}" type="slidenum">
               <a:rPr lang="fr-CH" smtClean="0"/>
-              <a:t>‹N°›</a:t>
+              <a:t>‹#›</a:t>
             </a:fld>
             <a:endParaRPr lang="fr-CH"/>
           </a:p>
@@ -3864,7 +3615,7 @@
           <a:p>
             <a:fld id="{927FD973-9FBE-4D8C-A70F-308F6E17EE27}" type="datetimeFigureOut">
               <a:rPr lang="fr-CH" smtClean="0"/>
-              <a:t>16.03.2026</a:t>
+              <a:t>23.03.2026</a:t>
             </a:fld>
             <a:endParaRPr lang="fr-CH"/>
           </a:p>
@@ -3954,7 +3705,7 @@
           <a:p>
             <a:fld id="{4A9A95A2-B9ED-4294-8263-E0AAB1EC85C3}" type="slidenum">
               <a:rPr lang="fr-CH" smtClean="0"/>
-              <a:t>‹N°›</a:t>
+              <a:t>‹#›</a:t>
             </a:fld>
             <a:endParaRPr lang="fr-CH"/>
           </a:p>
@@ -4782,6 +4533,625 @@
 </p:sld>
 </file>
 
+<file path=ppt/slides/slide10.xml><?xml version="1.0" encoding="utf-8"?>
+<p:sld xmlns:a="http://schemas.openxmlformats.org/drawingml/2006/main" xmlns:r="http://schemas.openxmlformats.org/officeDocument/2006/relationships" xmlns:p="http://schemas.openxmlformats.org/presentationml/2006/main">
+  <p:cSld>
+    <p:bg>
+      <p:bgPr>
+        <a:solidFill>
+          <a:schemeClr val="tx2">
+            <a:lumMod val="90000"/>
+            <a:lumOff val="10000"/>
+          </a:schemeClr>
+        </a:solidFill>
+        <a:effectLst/>
+      </p:bgPr>
+    </p:bg>
+    <p:spTree>
+      <p:nvGrpSpPr>
+        <p:cNvPr id="1" name=""/>
+        <p:cNvGrpSpPr/>
+        <p:nvPr/>
+      </p:nvGrpSpPr>
+      <p:grpSpPr>
+        <a:xfrm>
+          <a:off x="0" y="0"/>
+          <a:ext cx="0" cy="0"/>
+          <a:chOff x="0" y="0"/>
+          <a:chExt cx="0" cy="0"/>
+        </a:xfrm>
+      </p:grpSpPr>
+      <p:sp>
+        <p:nvSpPr>
+          <p:cNvPr id="2" name="ZoneTexte 1">
+            <a:extLst>
+              <a:ext uri="{FF2B5EF4-FFF2-40B4-BE49-F238E27FC236}">
+                <a16:creationId xmlns:a16="http://schemas.microsoft.com/office/drawing/2014/main" id="{8B054583-9543-4AFF-4780-23DD1883B59F}"/>
+              </a:ext>
+            </a:extLst>
+          </p:cNvPr>
+          <p:cNvSpPr txBox="1"/>
+          <p:nvPr/>
+        </p:nvSpPr>
+        <p:spPr>
+          <a:xfrm>
+            <a:off x="6803456" y="9045"/>
+            <a:ext cx="4957011" cy="769441"/>
+          </a:xfrm>
+          <a:prstGeom prst="rect">
+            <a:avLst/>
+          </a:prstGeom>
+          <a:noFill/>
+        </p:spPr>
+        <p:txBody>
+          <a:bodyPr wrap="square" rtlCol="0">
+            <a:spAutoFit/>
+          </a:bodyPr>
+          <a:lstStyle/>
+          <a:p>
+            <a:r>
+              <a:rPr lang="fr-FR" sz="4400" b="1">
+                <a:solidFill>
+                  <a:schemeClr val="bg1"/>
+                </a:solidFill>
+              </a:rPr>
+              <a:t>Corrigé commenté</a:t>
+            </a:r>
+          </a:p>
+        </p:txBody>
+      </p:sp>
+      <p:sp>
+        <p:nvSpPr>
+          <p:cNvPr id="4" name="ZoneTexte 3">
+            <a:extLst>
+              <a:ext uri="{FF2B5EF4-FFF2-40B4-BE49-F238E27FC236}">
+                <a16:creationId xmlns:a16="http://schemas.microsoft.com/office/drawing/2014/main" id="{F5E19B1A-706F-76AB-8D26-539F8A47F69E}"/>
+              </a:ext>
+            </a:extLst>
+          </p:cNvPr>
+          <p:cNvSpPr txBox="1"/>
+          <p:nvPr/>
+        </p:nvSpPr>
+        <p:spPr>
+          <a:xfrm>
+            <a:off x="0" y="769441"/>
+            <a:ext cx="5967663" cy="6740307"/>
+          </a:xfrm>
+          <a:prstGeom prst="rect">
+            <a:avLst/>
+          </a:prstGeom>
+          <a:noFill/>
+        </p:spPr>
+        <p:txBody>
+          <a:bodyPr wrap="square" rtlCol="0">
+            <a:spAutoFit/>
+          </a:bodyPr>
+          <a:lstStyle/>
+          <a:p>
+            <a:r>
+              <a:rPr lang="fr-CH" b="1">
+                <a:solidFill>
+                  <a:schemeClr val="bg1"/>
+                </a:solidFill>
+              </a:rPr>
+              <a:t>&gt;$services = une variable qui stock la cmd </a:t>
+            </a:r>
+            <a:r>
+              <a:rPr lang="fr-CH" b="1" err="1">
+                <a:solidFill>
+                  <a:schemeClr val="bg1"/>
+                </a:solidFill>
+              </a:rPr>
+              <a:t>Get</a:t>
+            </a:r>
+            <a:r>
+              <a:rPr lang="fr-CH" b="1">
+                <a:solidFill>
+                  <a:schemeClr val="bg1"/>
+                </a:solidFill>
+              </a:rPr>
+              <a:t>-Service</a:t>
+            </a:r>
+            <a:endParaRPr lang="fr-FR">
+              <a:solidFill>
+                <a:schemeClr val="bg1"/>
+              </a:solidFill>
+            </a:endParaRPr>
+          </a:p>
+          <a:p>
+            <a:endParaRPr lang="fr-CH" b="1">
+              <a:solidFill>
+                <a:schemeClr val="bg1"/>
+              </a:solidFill>
+            </a:endParaRPr>
+          </a:p>
+          <a:p>
+            <a:r>
+              <a:rPr lang="fr-CH" b="1">
+                <a:solidFill>
+                  <a:schemeClr val="bg1"/>
+                </a:solidFill>
+              </a:rPr>
+              <a:t>&gt;</a:t>
+            </a:r>
+            <a:r>
+              <a:rPr lang="fr-CH" b="1" err="1">
+                <a:solidFill>
+                  <a:schemeClr val="bg1"/>
+                </a:solidFill>
+              </a:rPr>
+              <a:t>Get</a:t>
+            </a:r>
+            <a:r>
+              <a:rPr lang="fr-CH" b="1">
+                <a:solidFill>
+                  <a:schemeClr val="bg1"/>
+                </a:solidFill>
+              </a:rPr>
+              <a:t>-Service interroge Windows et renvoie une  collection objets de type (</a:t>
+            </a:r>
+            <a:r>
+              <a:rPr lang="fr-CH" b="1" err="1">
+                <a:solidFill>
+                  <a:schemeClr val="bg1"/>
+                </a:solidFill>
+              </a:rPr>
+              <a:t>System.ServiceProcess</a:t>
+            </a:r>
+            <a:r>
+              <a:rPr lang="fr-CH" b="1">
+                <a:solidFill>
+                  <a:schemeClr val="bg1"/>
+                </a:solidFill>
+              </a:rPr>
+              <a:t>) Chaque Objet représente un Service</a:t>
+            </a:r>
+          </a:p>
+          <a:p>
+            <a:endParaRPr lang="fr-CH"/>
+          </a:p>
+          <a:p>
+            <a:r>
+              <a:rPr lang="fr-CH" b="1">
+                <a:solidFill>
+                  <a:schemeClr val="bg1"/>
+                </a:solidFill>
+              </a:rPr>
+              <a:t>&gt;Sur la deuxième ligne le symbole | envoie chaque élément de $service vers la commande </a:t>
+            </a:r>
+            <a:r>
+              <a:rPr lang="fr-CH" b="1" err="1">
+                <a:solidFill>
+                  <a:schemeClr val="bg1"/>
+                </a:solidFill>
+              </a:rPr>
+              <a:t>Where</a:t>
+            </a:r>
+            <a:r>
+              <a:rPr lang="fr-CH" b="1">
+                <a:solidFill>
+                  <a:schemeClr val="bg1"/>
+                </a:solidFill>
+              </a:rPr>
+              <a:t>-Object </a:t>
+            </a:r>
+          </a:p>
+          <a:p>
+            <a:endParaRPr lang="fr-CH" b="1">
+              <a:solidFill>
+                <a:schemeClr val="bg1"/>
+              </a:solidFill>
+            </a:endParaRPr>
+          </a:p>
+          <a:p>
+            <a:r>
+              <a:rPr lang="fr-CH" b="1">
+                <a:solidFill>
+                  <a:schemeClr val="bg1"/>
+                </a:solidFill>
+              </a:rPr>
+              <a:t>&gt;$_.</a:t>
+            </a:r>
+            <a:r>
+              <a:rPr lang="fr-CH" b="1" err="1">
+                <a:solidFill>
+                  <a:schemeClr val="bg1"/>
+                </a:solidFill>
+              </a:rPr>
+              <a:t>Status</a:t>
+            </a:r>
+            <a:r>
+              <a:rPr lang="fr-CH" b="1">
+                <a:solidFill>
+                  <a:schemeClr val="bg1"/>
+                </a:solidFill>
+              </a:rPr>
+              <a:t> accède à la propriété </a:t>
+            </a:r>
+            <a:r>
+              <a:rPr lang="fr-CH" b="1" err="1">
+                <a:solidFill>
+                  <a:schemeClr val="bg1"/>
+                </a:solidFill>
+              </a:rPr>
+              <a:t>Status</a:t>
+            </a:r>
+            <a:r>
+              <a:rPr lang="fr-CH" b="1">
+                <a:solidFill>
+                  <a:schemeClr val="bg1"/>
+                </a:solidFill>
+              </a:rPr>
+              <a:t> de cet objet</a:t>
+            </a:r>
+          </a:p>
+          <a:p>
+            <a:endParaRPr lang="fr-CH" b="1">
+              <a:solidFill>
+                <a:schemeClr val="bg1"/>
+              </a:solidFill>
+            </a:endParaRPr>
+          </a:p>
+          <a:p>
+            <a:r>
+              <a:rPr lang="fr-CH" b="1">
+                <a:solidFill>
+                  <a:schemeClr val="bg1"/>
+                </a:solidFill>
+              </a:rPr>
+              <a:t>&gt;-eq «</a:t>
+            </a:r>
+            <a:r>
+              <a:rPr lang="fr-CH" b="1" err="1">
+                <a:solidFill>
+                  <a:schemeClr val="bg1"/>
+                </a:solidFill>
+              </a:rPr>
+              <a:t>Stopped</a:t>
+            </a:r>
+            <a:r>
+              <a:rPr lang="fr-CH" b="1">
+                <a:solidFill>
+                  <a:schemeClr val="bg1"/>
+                </a:solidFill>
+              </a:rPr>
+              <a:t>»  -eq teste l’égalité entre 2 valeurs  ce filtre garde uniquement les services donc l’état est </a:t>
+            </a:r>
+            <a:r>
+              <a:rPr lang="fr-CH" b="1" err="1">
+                <a:solidFill>
+                  <a:schemeClr val="bg1"/>
+                </a:solidFill>
+              </a:rPr>
+              <a:t>Stopped</a:t>
+            </a:r>
+            <a:r>
+              <a:rPr lang="fr-CH" b="1">
+                <a:solidFill>
+                  <a:schemeClr val="bg1"/>
+                </a:solidFill>
+              </a:rPr>
+              <a:t> </a:t>
+            </a:r>
+          </a:p>
+          <a:p>
+            <a:endParaRPr lang="fr-CH" b="1">
+              <a:solidFill>
+                <a:schemeClr val="bg1"/>
+              </a:solidFill>
+            </a:endParaRPr>
+          </a:p>
+          <a:p>
+            <a:r>
+              <a:rPr lang="fr-CH" b="1">
+                <a:solidFill>
+                  <a:schemeClr val="bg1"/>
+                </a:solidFill>
+              </a:rPr>
+              <a:t>&gt;Write-Host écrit un message dans la console </a:t>
+            </a:r>
+          </a:p>
+          <a:p>
+            <a:r>
+              <a:rPr lang="fr-CH" b="1">
+                <a:solidFill>
+                  <a:schemeClr val="bg1"/>
+                </a:solidFill>
+              </a:rPr>
+              <a:t>«-</a:t>
+            </a:r>
+            <a:r>
+              <a:rPr lang="fr-CH" b="1" err="1">
+                <a:solidFill>
+                  <a:schemeClr val="bg1"/>
+                </a:solidFill>
+              </a:rPr>
+              <a:t>ForegroundColor</a:t>
+            </a:r>
+            <a:r>
+              <a:rPr lang="fr-CH" b="1">
+                <a:solidFill>
+                  <a:schemeClr val="bg1"/>
+                </a:solidFill>
+              </a:rPr>
+              <a:t> Yellow» mets ce texte en Jaune (a choix)</a:t>
+            </a:r>
+          </a:p>
+          <a:p>
+            <a:endParaRPr lang="fr-CH" b="1">
+              <a:solidFill>
+                <a:schemeClr val="bg1"/>
+              </a:solidFill>
+            </a:endParaRPr>
+          </a:p>
+          <a:p>
+            <a:r>
+              <a:rPr lang="fr-CH" b="1">
+                <a:solidFill>
+                  <a:schemeClr val="bg1"/>
+                </a:solidFill>
+              </a:rPr>
+              <a:t>&gt;La dernier ligne final Projet la liste qui est donc filtre avec Name et </a:t>
+            </a:r>
+            <a:r>
+              <a:rPr lang="fr-CH" b="1" err="1">
+                <a:solidFill>
+                  <a:schemeClr val="bg1"/>
+                </a:solidFill>
+              </a:rPr>
+              <a:t>Status</a:t>
+            </a:r>
+            <a:r>
+              <a:rPr lang="fr-CH" b="1">
+                <a:solidFill>
+                  <a:schemeClr val="bg1"/>
+                </a:solidFill>
+              </a:rPr>
+              <a:t> et le résultat s’affiche sous forme de tableau</a:t>
+            </a:r>
+          </a:p>
+          <a:p>
+            <a:endParaRPr lang="fr-CH" b="1">
+              <a:solidFill>
+                <a:schemeClr val="bg1"/>
+              </a:solidFill>
+            </a:endParaRPr>
+          </a:p>
+          <a:p>
+            <a:endParaRPr lang="fr-CH" b="1">
+              <a:solidFill>
+                <a:schemeClr val="bg1"/>
+              </a:solidFill>
+            </a:endParaRPr>
+          </a:p>
+        </p:txBody>
+      </p:sp>
+      <p:pic>
+        <p:nvPicPr>
+          <p:cNvPr id="6" name="Image 5">
+            <a:extLst>
+              <a:ext uri="{FF2B5EF4-FFF2-40B4-BE49-F238E27FC236}">
+                <a16:creationId xmlns:a16="http://schemas.microsoft.com/office/drawing/2014/main" id="{2F06BAC0-0FE3-07CB-C80A-060A15B20228}"/>
+              </a:ext>
+            </a:extLst>
+          </p:cNvPr>
+          <p:cNvPicPr>
+            <a:picLocks noChangeAspect="1"/>
+          </p:cNvPicPr>
+          <p:nvPr/>
+        </p:nvPicPr>
+        <p:blipFill>
+          <a:blip r:embed="rId3">
+            <a:extLst>
+              <a:ext uri="{28A0092B-C50C-407E-A947-70E740481C1C}">
+                <a14:useLocalDpi xmlns:a14="http://schemas.microsoft.com/office/drawing/2010/main" val="0"/>
+              </a:ext>
+            </a:extLst>
+          </a:blip>
+          <a:stretch>
+            <a:fillRect/>
+          </a:stretch>
+        </p:blipFill>
+        <p:spPr>
+          <a:xfrm>
+            <a:off x="5670213" y="3077094"/>
+            <a:ext cx="6521787" cy="845682"/>
+          </a:xfrm>
+          <a:prstGeom prst="rect">
+            <a:avLst/>
+          </a:prstGeom>
+        </p:spPr>
+      </p:pic>
+    </p:spTree>
+    <p:extLst>
+      <p:ext uri="{BB962C8B-B14F-4D97-AF65-F5344CB8AC3E}">
+        <p14:creationId xmlns:p14="http://schemas.microsoft.com/office/powerpoint/2010/main" val="499236404"/>
+      </p:ext>
+    </p:extLst>
+  </p:cSld>
+  <p:clrMapOvr>
+    <a:masterClrMapping/>
+  </p:clrMapOvr>
+</p:sld>
+</file>
+
+<file path=ppt/slides/slide11.xml><?xml version="1.0" encoding="utf-8"?>
+<p:sld xmlns:a="http://schemas.openxmlformats.org/drawingml/2006/main" xmlns:r="http://schemas.openxmlformats.org/officeDocument/2006/relationships" xmlns:p="http://schemas.openxmlformats.org/presentationml/2006/main">
+  <p:cSld>
+    <p:bg>
+      <p:bgPr>
+        <a:solidFill>
+          <a:schemeClr val="tx2">
+            <a:lumMod val="90000"/>
+            <a:lumOff val="10000"/>
+          </a:schemeClr>
+        </a:solidFill>
+        <a:effectLst/>
+      </p:bgPr>
+    </p:bg>
+    <p:spTree>
+      <p:nvGrpSpPr>
+        <p:cNvPr id="1" name=""/>
+        <p:cNvGrpSpPr/>
+        <p:nvPr/>
+      </p:nvGrpSpPr>
+      <p:grpSpPr>
+        <a:xfrm>
+          <a:off x="0" y="0"/>
+          <a:ext cx="0" cy="0"/>
+          <a:chOff x="0" y="0"/>
+          <a:chExt cx="0" cy="0"/>
+        </a:xfrm>
+      </p:grpSpPr>
+      <p:sp>
+        <p:nvSpPr>
+          <p:cNvPr id="2" name="Titre 1">
+            <a:extLst>
+              <a:ext uri="{FF2B5EF4-FFF2-40B4-BE49-F238E27FC236}">
+                <a16:creationId xmlns:a16="http://schemas.microsoft.com/office/drawing/2014/main" id="{7B35E316-6C07-EC8D-4E8F-B754BDBF732F}"/>
+              </a:ext>
+            </a:extLst>
+          </p:cNvPr>
+          <p:cNvSpPr>
+            <a:spLocks noGrp="1"/>
+          </p:cNvSpPr>
+          <p:nvPr>
+            <p:ph type="ctrTitle"/>
+          </p:nvPr>
+        </p:nvSpPr>
+        <p:spPr>
+          <a:xfrm>
+            <a:off x="1423416" y="0"/>
+            <a:ext cx="9144000" cy="977075"/>
+          </a:xfrm>
+        </p:spPr>
+        <p:txBody>
+          <a:bodyPr/>
+          <a:lstStyle/>
+          <a:p>
+            <a:r>
+              <a:rPr lang="fr-CH" b="1">
+                <a:solidFill>
+                  <a:schemeClr val="bg1"/>
+                </a:solidFill>
+                <a:latin typeface="+mn-lt"/>
+              </a:rPr>
+              <a:t>Conclusion</a:t>
+            </a:r>
+          </a:p>
+        </p:txBody>
+      </p:sp>
+      <p:sp>
+        <p:nvSpPr>
+          <p:cNvPr id="3" name="Sous-titre 2">
+            <a:extLst>
+              <a:ext uri="{FF2B5EF4-FFF2-40B4-BE49-F238E27FC236}">
+                <a16:creationId xmlns:a16="http://schemas.microsoft.com/office/drawing/2014/main" id="{DDC041AC-1C4B-3363-E6C3-987E82B84433}"/>
+              </a:ext>
+            </a:extLst>
+          </p:cNvPr>
+          <p:cNvSpPr>
+            <a:spLocks noGrp="1"/>
+          </p:cNvSpPr>
+          <p:nvPr>
+            <p:ph type="subTitle" idx="1"/>
+          </p:nvPr>
+        </p:nvSpPr>
+        <p:spPr>
+          <a:xfrm>
+            <a:off x="326136" y="1773238"/>
+            <a:ext cx="11149584" cy="2533586"/>
+          </a:xfrm>
+        </p:spPr>
+        <p:txBody>
+          <a:bodyPr>
+            <a:noAutofit/>
+          </a:bodyPr>
+          <a:lstStyle/>
+          <a:p>
+            <a:pPr marL="342900" indent="-342900" algn="l">
+              <a:buFont typeface="Arial" panose="020B0604020202020204" pitchFamily="34" charset="0"/>
+              <a:buChar char="•"/>
+            </a:pPr>
+            <a:r>
+              <a:rPr lang="fr-CH" sz="3200" b="1">
+                <a:solidFill>
+                  <a:schemeClr val="bg1"/>
+                </a:solidFill>
+              </a:rPr>
+              <a:t>Script qui permet de voir les services arrêtés</a:t>
+            </a:r>
+          </a:p>
+          <a:p>
+            <a:pPr marL="342900" indent="-342900" algn="l">
+              <a:buFont typeface="Arial" panose="020B0604020202020204" pitchFamily="34" charset="0"/>
+              <a:buChar char="•"/>
+            </a:pPr>
+            <a:r>
+              <a:rPr lang="fr-CH" sz="3200" b="1">
+                <a:solidFill>
+                  <a:schemeClr val="bg1"/>
+                </a:solidFill>
+              </a:rPr>
+              <a:t>Récupère touts les services présents sur notre machine</a:t>
+            </a:r>
+          </a:p>
+          <a:p>
+            <a:pPr marL="342900" indent="-342900" algn="l">
+              <a:buFont typeface="Arial" panose="020B0604020202020204" pitchFamily="34" charset="0"/>
+              <a:buChar char="•"/>
+            </a:pPr>
+            <a:r>
+              <a:rPr lang="fr-CH" sz="3200" b="1">
+                <a:solidFill>
+                  <a:schemeClr val="bg1"/>
+                </a:solidFill>
+              </a:rPr>
+              <a:t>En quatre lignes</a:t>
+            </a:r>
+          </a:p>
+          <a:p>
+            <a:pPr algn="l"/>
+            <a:endParaRPr lang="fr-CH" sz="3200" b="1">
+              <a:solidFill>
+                <a:schemeClr val="bg1"/>
+              </a:solidFill>
+            </a:endParaRPr>
+          </a:p>
+          <a:p>
+            <a:pPr algn="l"/>
+            <a:endParaRPr lang="fr-CH" sz="3200" b="1">
+              <a:solidFill>
+                <a:schemeClr val="bg1"/>
+              </a:solidFill>
+            </a:endParaRPr>
+          </a:p>
+          <a:p>
+            <a:pPr algn="l"/>
+            <a:r>
+              <a:rPr lang="fr-CH" sz="3200" b="1">
+                <a:solidFill>
+                  <a:schemeClr val="bg1"/>
+                </a:solidFill>
+              </a:rPr>
+              <a:t>Questions?</a:t>
+            </a:r>
+          </a:p>
+        </p:txBody>
+      </p:sp>
+    </p:spTree>
+    <p:extLst>
+      <p:ext uri="{BB962C8B-B14F-4D97-AF65-F5344CB8AC3E}">
+        <p14:creationId xmlns:p14="http://schemas.microsoft.com/office/powerpoint/2010/main" val="1708262458"/>
+      </p:ext>
+    </p:extLst>
+  </p:cSld>
+  <p:clrMapOvr>
+    <a:masterClrMapping/>
+  </p:clrMapOvr>
+</p:sld>
+</file>
+
 <file path=ppt/slides/slide2.xml><?xml version="1.0" encoding="utf-8"?>
 <p:sld xmlns:a="http://schemas.openxmlformats.org/drawingml/2006/main" xmlns:r="http://schemas.openxmlformats.org/officeDocument/2006/relationships" xmlns:p="http://schemas.openxmlformats.org/presentationml/2006/main">
   <p:cSld>
@@ -4815,274 +5185,89 @@
           <p:cNvPr id="2" name="Titre 1">
             <a:extLst>
               <a:ext uri="{FF2B5EF4-FFF2-40B4-BE49-F238E27FC236}">
-                <a16:creationId xmlns:a16="http://schemas.microsoft.com/office/drawing/2014/main" id="{32E071F7-D8B0-BCA6-A062-54FF26992EC1}"/>
-              </a:ext>
-            </a:extLst>
-          </p:cNvPr>
-          <p:cNvSpPr>
-            <a:spLocks noGrp="1"/>
-          </p:cNvSpPr>
-          <p:nvPr>
-            <p:ph type="title" idx="4294967295"/>
+                <a16:creationId xmlns:a16="http://schemas.microsoft.com/office/drawing/2014/main" id="{38127A41-FC8F-7BF2-D311-D5C05DAC0ECD}"/>
+              </a:ext>
+            </a:extLst>
+          </p:cNvPr>
+          <p:cNvSpPr>
+            <a:spLocks noGrp="1"/>
+          </p:cNvSpPr>
+          <p:nvPr>
+            <p:ph type="ctrTitle"/>
           </p:nvPr>
         </p:nvSpPr>
         <p:spPr>
           <a:xfrm>
-            <a:off x="2465917" y="-4892"/>
-            <a:ext cx="7450503" cy="1325563"/>
+            <a:off x="1524000" y="0"/>
+            <a:ext cx="9144000" cy="913067"/>
           </a:xfrm>
         </p:spPr>
         <p:txBody>
-          <a:bodyPr/>
+          <a:bodyPr>
+            <a:normAutofit fontScale="90000"/>
+          </a:bodyPr>
           <a:lstStyle/>
           <a:p>
             <a:r>
-              <a:rPr lang="fr-FR" b="1">
-                <a:solidFill>
-                  <a:schemeClr val="bg1"/>
-                </a:solidFill>
-              </a:rPr>
-              <a:t>Connaître les services arrêtés</a:t>
-            </a:r>
-          </a:p>
-        </p:txBody>
-      </p:sp>
-      <p:sp>
-        <p:nvSpPr>
-          <p:cNvPr id="3" name="Espace réservé du contenu 2">
-            <a:extLst>
-              <a:ext uri="{FF2B5EF4-FFF2-40B4-BE49-F238E27FC236}">
-                <a16:creationId xmlns:a16="http://schemas.microsoft.com/office/drawing/2014/main" id="{887DA90D-641E-3D94-03AB-A4FDCC03F76A}"/>
-              </a:ext>
-            </a:extLst>
-          </p:cNvPr>
-          <p:cNvSpPr>
-            <a:spLocks noGrp="1"/>
-          </p:cNvSpPr>
-          <p:nvPr>
-            <p:ph idx="4294967295"/>
+              <a:rPr lang="fr-CH" b="1">
+                <a:solidFill>
+                  <a:schemeClr val="bg1"/>
+                </a:solidFill>
+                <a:latin typeface="+mn-lt"/>
+              </a:rPr>
+              <a:t>Introduction</a:t>
+            </a:r>
+          </a:p>
+        </p:txBody>
+      </p:sp>
+      <p:sp>
+        <p:nvSpPr>
+          <p:cNvPr id="3" name="Sous-titre 2">
+            <a:extLst>
+              <a:ext uri="{FF2B5EF4-FFF2-40B4-BE49-F238E27FC236}">
+                <a16:creationId xmlns:a16="http://schemas.microsoft.com/office/drawing/2014/main" id="{C854B665-A18C-ABAB-8F83-11CFEE390200}"/>
+              </a:ext>
+            </a:extLst>
+          </p:cNvPr>
+          <p:cNvSpPr>
+            <a:spLocks noGrp="1"/>
+          </p:cNvSpPr>
+          <p:nvPr>
+            <p:ph type="subTitle" idx="1"/>
           </p:nvPr>
         </p:nvSpPr>
         <p:spPr>
           <a:xfrm>
-            <a:off x="0" y="1320671"/>
-            <a:ext cx="10515600" cy="5712394"/>
+            <a:off x="0" y="1773238"/>
+            <a:ext cx="12192000" cy="1655762"/>
           </a:xfrm>
         </p:spPr>
         <p:txBody>
-          <a:bodyPr vert="horz" lIns="91440" tIns="45720" rIns="91440" bIns="45720" rtlCol="0" anchor="t">
-            <a:normAutofit/>
+          <a:bodyPr>
+            <a:noAutofit/>
           </a:bodyPr>
           <a:lstStyle/>
           <a:p>
-            <a:pPr marL="0" indent="0">
-              <a:buNone/>
+            <a:pPr algn="l">
+              <a:lnSpc>
+                <a:spcPct val="200000"/>
+              </a:lnSpc>
             </a:pPr>
             <a:r>
-              <a:rPr lang="fr-FR" b="1" dirty="0">
-                <a:solidFill>
-                  <a:schemeClr val="bg1"/>
-                </a:solidFill>
-              </a:rPr>
-              <a:t>Donnée : </a:t>
-            </a:r>
-          </a:p>
-          <a:p>
-            <a:pPr marL="457200" indent="-457200"/>
-            <a:r>
-              <a:rPr lang="fr-FR" b="1" dirty="0">
-                <a:solidFill>
-                  <a:schemeClr val="bg1"/>
-                </a:solidFill>
-              </a:rPr>
-              <a:t>Afficher les services Windows arrêtés</a:t>
-            </a:r>
-          </a:p>
-          <a:p>
-            <a:pPr marL="457200" indent="-457200"/>
-            <a:r>
-              <a:rPr lang="fr-FR" b="1" dirty="0">
-                <a:solidFill>
-                  <a:schemeClr val="bg1"/>
-                </a:solidFill>
-              </a:rPr>
-              <a:t>Récupérer tous les services du système</a:t>
-            </a:r>
-          </a:p>
-          <a:p>
-            <a:pPr marL="0" indent="0">
-              <a:buNone/>
-            </a:pPr>
-            <a:endParaRPr lang="fr-FR" b="1" dirty="0">
-              <a:solidFill>
-                <a:schemeClr val="bg1"/>
-              </a:solidFill>
-            </a:endParaRPr>
-          </a:p>
-          <a:p>
-            <a:pPr marL="0" indent="0">
-              <a:buNone/>
-            </a:pPr>
-            <a:r>
-              <a:rPr lang="fr-FR" b="1" dirty="0">
-                <a:solidFill>
-                  <a:schemeClr val="bg1"/>
-                </a:solidFill>
-              </a:rPr>
-              <a:t>On aura besoin de :</a:t>
-            </a:r>
-          </a:p>
-          <a:p>
-            <a:pPr marL="457200" indent="-457200"/>
-            <a:r>
-              <a:rPr lang="fr-FR" b="1" dirty="0" err="1">
-                <a:solidFill>
-                  <a:schemeClr val="bg1"/>
-                </a:solidFill>
-              </a:rPr>
-              <a:t>Get</a:t>
-            </a:r>
-            <a:r>
-              <a:rPr lang="fr-FR" b="1" dirty="0">
-                <a:solidFill>
-                  <a:schemeClr val="bg1"/>
-                </a:solidFill>
-              </a:rPr>
-              <a:t>-Service</a:t>
-            </a:r>
-          </a:p>
-          <a:p>
-            <a:pPr marL="457200" indent="-457200"/>
-            <a:r>
-              <a:rPr lang="fr-FR" b="1" dirty="0" err="1">
-                <a:solidFill>
-                  <a:schemeClr val="bg1"/>
-                </a:solidFill>
-              </a:rPr>
-              <a:t>Where</a:t>
-            </a:r>
-            <a:r>
-              <a:rPr lang="fr-FR" b="1" dirty="0">
-                <a:solidFill>
-                  <a:schemeClr val="bg1"/>
-                </a:solidFill>
-              </a:rPr>
-              <a:t>-Object</a:t>
-            </a:r>
-          </a:p>
-          <a:p>
-            <a:pPr marL="457200" indent="-457200"/>
-            <a:r>
-              <a:rPr lang="fr-FR" b="1" dirty="0">
-                <a:solidFill>
-                  <a:schemeClr val="bg1"/>
-                </a:solidFill>
-              </a:rPr>
-              <a:t>$_.</a:t>
-            </a:r>
-            <a:r>
-              <a:rPr lang="fr-FR" b="1" dirty="0" err="1">
-                <a:solidFill>
-                  <a:schemeClr val="bg1"/>
-                </a:solidFill>
-              </a:rPr>
-              <a:t>Status</a:t>
-            </a:r>
-            <a:r>
-              <a:rPr lang="fr-FR" b="1" dirty="0">
-                <a:solidFill>
-                  <a:schemeClr val="bg1"/>
-                </a:solidFill>
-              </a:rPr>
-              <a:t> : </a:t>
-            </a:r>
-            <a:r>
-              <a:rPr lang="fr-FR" b="1" dirty="0">
-                <a:solidFill>
-                  <a:srgbClr val="00B050"/>
-                </a:solidFill>
-              </a:rPr>
-              <a:t>$_</a:t>
-            </a:r>
-            <a:r>
-              <a:rPr lang="fr-FR" b="1" dirty="0">
-                <a:solidFill>
-                  <a:schemeClr val="bg1"/>
-                </a:solidFill>
-              </a:rPr>
-              <a:t> + </a:t>
-            </a:r>
-            <a:r>
-              <a:rPr lang="fr-FR" b="1" dirty="0">
-                <a:solidFill>
-                  <a:srgbClr val="00B050"/>
-                </a:solidFill>
-              </a:rPr>
-              <a:t>.</a:t>
-            </a:r>
-            <a:r>
-              <a:rPr lang="fr-FR" b="1" dirty="0" err="1">
-                <a:solidFill>
-                  <a:srgbClr val="00B050"/>
-                </a:solidFill>
-              </a:rPr>
-              <a:t>Status</a:t>
-            </a:r>
-            <a:endParaRPr lang="fr-FR" b="1" dirty="0">
-              <a:solidFill>
-                <a:srgbClr val="00B050"/>
-              </a:solidFill>
-            </a:endParaRPr>
-          </a:p>
-          <a:p>
-            <a:pPr marL="457200" indent="-457200"/>
-            <a:r>
-              <a:rPr lang="fr-FR" b="1" dirty="0">
-                <a:solidFill>
-                  <a:schemeClr val="bg1"/>
-                </a:solidFill>
-              </a:rPr>
-              <a:t>Un opérateur de comparaison</a:t>
-            </a:r>
-          </a:p>
-          <a:p>
-            <a:pPr marL="457200" indent="-457200"/>
-            <a:r>
-              <a:rPr lang="fr-FR" b="1" dirty="0">
-                <a:solidFill>
-                  <a:schemeClr val="bg1"/>
-                </a:solidFill>
-              </a:rPr>
-              <a:t>Select-Object</a:t>
-            </a:r>
-          </a:p>
-          <a:p>
-            <a:pPr marL="0" indent="0">
-              <a:buNone/>
-            </a:pPr>
-            <a:endParaRPr lang="fr-FR" dirty="0"/>
-          </a:p>
-          <a:p>
-            <a:pPr marL="0" indent="0">
-              <a:buNone/>
-            </a:pPr>
-            <a:endParaRPr lang="fr-FR" dirty="0"/>
-          </a:p>
-          <a:p>
-            <a:pPr marL="0" indent="0">
-              <a:buNone/>
-            </a:pPr>
-            <a:endParaRPr lang="fr-FR" dirty="0"/>
-          </a:p>
-          <a:p>
-            <a:endParaRPr lang="fr-FR" dirty="0"/>
+              <a:rPr lang="fr-CH" sz="3000">
+                <a:solidFill>
+                  <a:schemeClr val="bg1"/>
+                </a:solidFill>
+              </a:rPr>
+              <a:t>L’administration des serveurs repose sur le bon fonctionnement des services. Lorsqu’un service s’arrête, cela peut perturber le système. Cette présentation explique les causes, les impacts et les solutions liés à ces arrêts.</a:t>
+            </a:r>
           </a:p>
         </p:txBody>
       </p:sp>
     </p:spTree>
     <p:extLst>
       <p:ext uri="{BB962C8B-B14F-4D97-AF65-F5344CB8AC3E}">
-        <p14:creationId xmlns:p14="http://schemas.microsoft.com/office/powerpoint/2010/main" val="3746204366"/>
+        <p14:creationId xmlns:p14="http://schemas.microsoft.com/office/powerpoint/2010/main" val="2780437922"/>
       </p:ext>
     </p:extLst>
   </p:cSld>
@@ -5122,72 +5307,150 @@
       </p:grpSpPr>
       <p:sp>
         <p:nvSpPr>
-          <p:cNvPr id="3" name="ZoneTexte 2">
-            <a:extLst>
-              <a:ext uri="{FF2B5EF4-FFF2-40B4-BE49-F238E27FC236}">
-                <a16:creationId xmlns:a16="http://schemas.microsoft.com/office/drawing/2014/main" id="{9CA1E0D2-77BC-E391-9EBE-A916A8417BAD}"/>
-              </a:ext>
-            </a:extLst>
-          </p:cNvPr>
-          <p:cNvSpPr txBox="1"/>
-          <p:nvPr/>
+          <p:cNvPr id="2" name="Titre 1">
+            <a:extLst>
+              <a:ext uri="{FF2B5EF4-FFF2-40B4-BE49-F238E27FC236}">
+                <a16:creationId xmlns:a16="http://schemas.microsoft.com/office/drawing/2014/main" id="{32E071F7-D8B0-BCA6-A062-54FF26992EC1}"/>
+              </a:ext>
+            </a:extLst>
+          </p:cNvPr>
+          <p:cNvSpPr>
+            <a:spLocks noGrp="1"/>
+          </p:cNvSpPr>
+          <p:nvPr>
+            <p:ph type="title" idx="4294967295"/>
+          </p:nvPr>
         </p:nvSpPr>
         <p:spPr>
           <a:xfrm>
-            <a:off x="0" y="0"/>
-            <a:ext cx="12075582" cy="4801314"/>
+            <a:off x="2370748" y="0"/>
+            <a:ext cx="7450503" cy="891860"/>
           </a:xfrm>
-          <a:prstGeom prst="rect">
-            <a:avLst/>
-          </a:prstGeom>
-          <a:noFill/>
         </p:spPr>
         <p:txBody>
-          <a:bodyPr rot="0" spcFirstLastPara="0" vertOverflow="overflow" horzOverflow="overflow" vert="horz" wrap="square" lIns="91440" tIns="45720" rIns="91440" bIns="45720" numCol="1" spcCol="0" rtlCol="0" fromWordArt="0" anchor="t" anchorCtr="0" forceAA="0" compatLnSpc="1">
-            <a:prstTxWarp prst="textNoShape">
-              <a:avLst/>
-            </a:prstTxWarp>
-            <a:spAutoFit/>
+          <a:bodyPr/>
+          <a:lstStyle/>
+          <a:p>
+            <a:r>
+              <a:rPr lang="fr-FR" b="1">
+                <a:solidFill>
+                  <a:schemeClr val="bg1"/>
+                </a:solidFill>
+              </a:rPr>
+              <a:t>Connaître les services arrêtés</a:t>
+            </a:r>
+          </a:p>
+        </p:txBody>
+      </p:sp>
+      <p:sp>
+        <p:nvSpPr>
+          <p:cNvPr id="3" name="Espace réservé du contenu 2">
+            <a:extLst>
+              <a:ext uri="{FF2B5EF4-FFF2-40B4-BE49-F238E27FC236}">
+                <a16:creationId xmlns:a16="http://schemas.microsoft.com/office/drawing/2014/main" id="{887DA90D-641E-3D94-03AB-A4FDCC03F76A}"/>
+              </a:ext>
+            </a:extLst>
+          </p:cNvPr>
+          <p:cNvSpPr>
+            <a:spLocks noGrp="1"/>
+          </p:cNvSpPr>
+          <p:nvPr>
+            <p:ph idx="4294967295"/>
+          </p:nvPr>
+        </p:nvSpPr>
+        <p:spPr>
+          <a:xfrm>
+            <a:off x="0" y="1234440"/>
+            <a:ext cx="12192000" cy="5824728"/>
+          </a:xfrm>
+        </p:spPr>
+        <p:txBody>
+          <a:bodyPr vert="horz" lIns="91440" tIns="45720" rIns="91440" bIns="45720" rtlCol="0" anchor="t">
+            <a:normAutofit/>
           </a:bodyPr>
           <a:lstStyle/>
           <a:p>
-            <a:endParaRPr lang="fr-CH" b="1" dirty="0"/>
-          </a:p>
-          <a:p>
-            <a:r>
-              <a:rPr lang="fr-CH" sz="4400" b="1" dirty="0" err="1">
-                <a:solidFill>
-                  <a:schemeClr val="bg1"/>
-                </a:solidFill>
-              </a:rPr>
-              <a:t>Get</a:t>
-            </a:r>
-            <a:r>
-              <a:rPr lang="fr-CH" sz="4400" b="1" dirty="0">
-                <a:solidFill>
-                  <a:schemeClr val="bg1"/>
-                </a:solidFill>
-              </a:rPr>
-              <a:t>-Service </a:t>
-            </a:r>
-          </a:p>
-          <a:p>
-            <a:endParaRPr lang="fr-CH" b="1" dirty="0">
+            <a:pPr marL="0" indent="0">
+              <a:buNone/>
+            </a:pPr>
+            <a:r>
+              <a:rPr lang="fr-FR" sz="2400" b="1">
+                <a:solidFill>
+                  <a:schemeClr val="bg1"/>
+                </a:solidFill>
+              </a:rPr>
+              <a:t>Donnée : </a:t>
+            </a:r>
+          </a:p>
+          <a:p>
+            <a:pPr marL="457200" indent="-457200"/>
+            <a:r>
+              <a:rPr lang="fr-FR" sz="2400" b="1">
+                <a:solidFill>
+                  <a:schemeClr val="bg1"/>
+                </a:solidFill>
+              </a:rPr>
+              <a:t>Afficher les services Windows arrêtés</a:t>
+            </a:r>
+          </a:p>
+          <a:p>
+            <a:pPr marL="457200" indent="-457200"/>
+            <a:r>
+              <a:rPr lang="fr-FR" sz="2400" b="1">
+                <a:solidFill>
+                  <a:schemeClr val="bg1"/>
+                </a:solidFill>
+              </a:rPr>
+              <a:t>Récupérer tous les services du système</a:t>
+            </a:r>
+          </a:p>
+          <a:p>
+            <a:pPr marL="457200" indent="-457200"/>
+            <a:r>
+              <a:rPr lang="fr-FR" sz="2400" b="1">
+                <a:solidFill>
+                  <a:schemeClr val="bg1"/>
+                </a:solidFill>
+              </a:rPr>
+              <a:t>Lancement du script en sélectionnant le disque et le dossier (cd C:\nom_dossier)</a:t>
+            </a:r>
+          </a:p>
+          <a:p>
+            <a:pPr marL="457200" indent="-457200"/>
+            <a:r>
+              <a:rPr lang="fr-FR" sz="2400" b="1">
+                <a:solidFill>
+                  <a:schemeClr val="bg1"/>
+                </a:solidFill>
+              </a:rPr>
+              <a:t>Exécution .\script.ps1</a:t>
+            </a:r>
+          </a:p>
+          <a:p>
+            <a:pPr marL="457200" indent="-457200"/>
+            <a:endParaRPr lang="fr-FR" sz="2400" b="1">
               <a:solidFill>
                 <a:schemeClr val="bg1"/>
               </a:solidFill>
             </a:endParaRPr>
           </a:p>
           <a:p>
-            <a:pPr marL="457200" indent="-457200">
-              <a:lnSpc>
-                <a:spcPct val="200000"/>
-              </a:lnSpc>
-              <a:buFont typeface="Arial"/>
-              <a:buChar char="•"/>
+            <a:pPr marL="0" indent="0">
+              <a:buNone/>
             </a:pPr>
             <a:r>
-              <a:rPr lang="fr-CH" sz="2600" b="1" dirty="0" err="1">
+              <a:rPr lang="fr-FR" sz="2400" b="1">
+                <a:solidFill>
+                  <a:schemeClr val="bg1"/>
+                </a:solidFill>
+              </a:rPr>
+              <a:t>On aura besoin de :</a:t>
+            </a:r>
+          </a:p>
+          <a:p>
+            <a:pPr marL="457200" indent="-457200"/>
+            <a:r>
+              <a:rPr lang="fr-FR" sz="2400" b="1" err="1">
                 <a:solidFill>
                   <a:schemeClr val="bg1"/>
                 </a:solidFill>
@@ -5195,111 +5458,146 @@
               <a:t>Get</a:t>
             </a:r>
             <a:r>
-              <a:rPr lang="fr-CH" sz="2600" b="1" dirty="0">
-                <a:solidFill>
-                  <a:schemeClr val="bg1"/>
-                </a:solidFill>
-              </a:rPr>
-              <a:t>-Service interroge Windows et renvoie une collection objets de type (</a:t>
-            </a:r>
-            <a:r>
-              <a:rPr lang="fr-CH" sz="2600" b="1" dirty="0" err="1">
-                <a:solidFill>
-                  <a:schemeClr val="bg1"/>
-                </a:solidFill>
-              </a:rPr>
-              <a:t>System.ServiceProcess</a:t>
-            </a:r>
-            <a:r>
-              <a:rPr lang="fr-CH" sz="2600" b="1" dirty="0">
-                <a:solidFill>
-                  <a:schemeClr val="bg1"/>
-                </a:solidFill>
-              </a:rPr>
-              <a:t>) </a:t>
-            </a:r>
-          </a:p>
-          <a:p>
-            <a:pPr marL="457200" indent="-457200">
-              <a:lnSpc>
-                <a:spcPct val="200000"/>
-              </a:lnSpc>
-              <a:buFont typeface="Arial"/>
-              <a:buChar char="•"/>
-            </a:pPr>
-            <a:r>
-              <a:rPr lang="fr-CH" sz="2600" b="1" dirty="0">
-                <a:solidFill>
-                  <a:schemeClr val="bg1"/>
-                </a:solidFill>
-              </a:rPr>
-              <a:t>Chaque Objet représente un Service</a:t>
-            </a:r>
-          </a:p>
-          <a:p>
-            <a:pPr marL="457200" indent="-457200">
-              <a:lnSpc>
-                <a:spcPct val="200000"/>
-              </a:lnSpc>
-              <a:buFont typeface="Arial"/>
-              <a:buChar char="•"/>
-            </a:pPr>
-            <a:r>
-              <a:rPr lang="fr-CH" sz="2600" b="1" dirty="0">
-                <a:solidFill>
-                  <a:schemeClr val="bg1"/>
-                </a:solidFill>
-              </a:rPr>
-              <a:t>Exemple : </a:t>
-            </a:r>
-            <a:r>
-              <a:rPr lang="fr-FR" sz="2600" b="1" dirty="0">
-                <a:solidFill>
-                  <a:schemeClr val="bg1"/>
-                </a:solidFill>
-              </a:rPr>
-              <a:t>Exemple: avec un simple </a:t>
-            </a:r>
-            <a:r>
-              <a:rPr lang="fr-FR" sz="2600" b="1" dirty="0" err="1">
-                <a:solidFill>
-                  <a:srgbClr val="00B0F0"/>
-                </a:solidFill>
-              </a:rPr>
-              <a:t>Get</a:t>
-            </a:r>
-            <a:r>
-              <a:rPr lang="fr-FR" sz="2600" b="1" dirty="0">
-                <a:solidFill>
-                  <a:srgbClr val="00B0F0"/>
+              <a:rPr lang="fr-FR" sz="2400" b="1">
+                <a:solidFill>
+                  <a:schemeClr val="bg1"/>
                 </a:solidFill>
               </a:rPr>
               <a:t>-Service</a:t>
             </a:r>
-            <a:r>
-              <a:rPr lang="fr-FR" sz="2600" b="1" dirty="0">
-                <a:solidFill>
-                  <a:schemeClr val="bg1"/>
-                </a:solidFill>
-              </a:rPr>
-              <a:t>, on affiche tout en vrac.​</a:t>
-            </a:r>
-            <a:endParaRPr lang="fr-CH" sz="2600" b="1" dirty="0">
+          </a:p>
+          <a:p>
+            <a:pPr marL="457200" indent="-457200"/>
+            <a:r>
+              <a:rPr lang="fr-FR" sz="2400" b="1" err="1">
+                <a:solidFill>
+                  <a:schemeClr val="bg1"/>
+                </a:solidFill>
+              </a:rPr>
+              <a:t>Where</a:t>
+            </a:r>
+            <a:r>
+              <a:rPr lang="fr-FR" sz="2400" b="1">
+                <a:solidFill>
+                  <a:schemeClr val="bg1"/>
+                </a:solidFill>
+              </a:rPr>
+              <a:t>-Object</a:t>
+            </a:r>
+          </a:p>
+          <a:p>
+            <a:pPr marL="457200" indent="-457200"/>
+            <a:r>
+              <a:rPr lang="fr-FR" sz="2400" b="1">
+                <a:solidFill>
+                  <a:schemeClr val="bg1"/>
+                </a:solidFill>
+              </a:rPr>
+              <a:t>$_.</a:t>
+            </a:r>
+            <a:r>
+              <a:rPr lang="fr-FR" sz="2400" b="1" err="1">
+                <a:solidFill>
+                  <a:schemeClr val="bg1"/>
+                </a:solidFill>
+              </a:rPr>
+              <a:t>Status</a:t>
+            </a:r>
+            <a:r>
+              <a:rPr lang="fr-FR" sz="2400" b="1">
+                <a:solidFill>
+                  <a:schemeClr val="bg1"/>
+                </a:solidFill>
+              </a:rPr>
+              <a:t> : </a:t>
+            </a:r>
+            <a:r>
+              <a:rPr lang="fr-FR" sz="2400" b="1">
+                <a:solidFill>
+                  <a:srgbClr val="00B050"/>
+                </a:solidFill>
+              </a:rPr>
+              <a:t>$_</a:t>
+            </a:r>
+            <a:r>
+              <a:rPr lang="fr-FR" sz="2400" b="1">
+                <a:solidFill>
+                  <a:schemeClr val="bg1"/>
+                </a:solidFill>
+              </a:rPr>
+              <a:t> + </a:t>
+            </a:r>
+            <a:r>
+              <a:rPr lang="fr-FR" sz="2400" b="1">
+                <a:solidFill>
+                  <a:srgbClr val="00B050"/>
+                </a:solidFill>
+              </a:rPr>
+              <a:t>.</a:t>
+            </a:r>
+            <a:r>
+              <a:rPr lang="fr-FR" sz="2400" b="1" err="1">
+                <a:solidFill>
+                  <a:srgbClr val="00B050"/>
+                </a:solidFill>
+              </a:rPr>
+              <a:t>Status</a:t>
+            </a:r>
+            <a:endParaRPr lang="fr-FR" sz="2400" b="1">
               <a:solidFill>
-                <a:schemeClr val="bg1"/>
+                <a:srgbClr val="00B050"/>
               </a:solidFill>
             </a:endParaRPr>
           </a:p>
           <a:p>
-            <a:pPr algn="l"/>
-            <a:endParaRPr lang="fr-FR" dirty="0"/>
+            <a:pPr marL="457200" indent="-457200"/>
+            <a:r>
+              <a:rPr lang="fr-FR" sz="2400" b="1">
+                <a:solidFill>
+                  <a:schemeClr val="bg1"/>
+                </a:solidFill>
+              </a:rPr>
+              <a:t>Un opérateur de comparaison</a:t>
+            </a:r>
+          </a:p>
+          <a:p>
+            <a:pPr marL="457200" indent="-457200"/>
+            <a:r>
+              <a:rPr lang="fr-FR" sz="2400" b="1">
+                <a:solidFill>
+                  <a:schemeClr val="bg1"/>
+                </a:solidFill>
+              </a:rPr>
+              <a:t>Select-Object</a:t>
+            </a:r>
+          </a:p>
+          <a:p>
+            <a:pPr marL="0" indent="0">
+              <a:buNone/>
+            </a:pPr>
+            <a:endParaRPr lang="fr-FR" sz="2400"/>
+          </a:p>
+          <a:p>
+            <a:pPr marL="0" indent="0">
+              <a:buNone/>
+            </a:pPr>
+            <a:endParaRPr lang="fr-FR" sz="2400"/>
+          </a:p>
+          <a:p>
+            <a:pPr marL="0" indent="0">
+              <a:buNone/>
+            </a:pPr>
+            <a:endParaRPr lang="fr-FR" sz="2400"/>
+          </a:p>
+          <a:p>
+            <a:endParaRPr lang="fr-FR" sz="2400"/>
           </a:p>
         </p:txBody>
       </p:sp>
     </p:spTree>
     <p:extLst>
       <p:ext uri="{BB962C8B-B14F-4D97-AF65-F5344CB8AC3E}">
-        <p14:creationId xmlns:p14="http://schemas.microsoft.com/office/powerpoint/2010/main" val="758963859"/>
+        <p14:creationId xmlns:p14="http://schemas.microsoft.com/office/powerpoint/2010/main" val="3746204366"/>
       </p:ext>
     </p:extLst>
   </p:cSld>
@@ -5339,10 +5637,10 @@
       </p:grpSpPr>
       <p:sp>
         <p:nvSpPr>
-          <p:cNvPr id="2" name="ZoneTexte 1">
-            <a:extLst>
-              <a:ext uri="{FF2B5EF4-FFF2-40B4-BE49-F238E27FC236}">
-                <a16:creationId xmlns:a16="http://schemas.microsoft.com/office/drawing/2014/main" id="{E0A2C836-23DE-91AA-B6ED-873A1952E19F}"/>
+          <p:cNvPr id="3" name="ZoneTexte 2">
+            <a:extLst>
+              <a:ext uri="{FF2B5EF4-FFF2-40B4-BE49-F238E27FC236}">
+                <a16:creationId xmlns:a16="http://schemas.microsoft.com/office/drawing/2014/main" id="{9CA1E0D2-77BC-E391-9EBE-A916A8417BAD}"/>
               </a:ext>
             </a:extLst>
           </p:cNvPr>
@@ -5351,8 +5649,8 @@
         </p:nvSpPr>
         <p:spPr>
           <a:xfrm>
-            <a:off x="1" y="-1"/>
-            <a:ext cx="12191999" cy="6420989"/>
+            <a:off x="0" y="0"/>
+            <a:ext cx="12075582" cy="4801314"/>
           </a:xfrm>
           <a:prstGeom prst="rect">
             <a:avLst/>
@@ -5368,227 +5666,155 @@
           </a:bodyPr>
           <a:lstStyle/>
           <a:p>
-            <a:r>
-              <a:rPr lang="fr-CH" sz="4400" b="1" dirty="0" err="1">
-                <a:solidFill>
-                  <a:schemeClr val="bg1"/>
-                </a:solidFill>
-              </a:rPr>
-              <a:t>Where</a:t>
-            </a:r>
-            <a:r>
-              <a:rPr lang="fr-CH" sz="4400" b="1" dirty="0">
-                <a:solidFill>
-                  <a:schemeClr val="bg1"/>
-                </a:solidFill>
-              </a:rPr>
-              <a:t>-Object</a:t>
-            </a:r>
-          </a:p>
-          <a:p>
-            <a:pPr marL="342900" indent="-342900">
-              <a:buFont typeface="Arial"/>
-              <a:buChar char="•"/>
-            </a:pPr>
-            <a:endParaRPr lang="fr-CH" sz="2000" b="1" dirty="0">
+            <a:endParaRPr lang="fr-CH" b="1"/>
+          </a:p>
+          <a:p>
+            <a:r>
+              <a:rPr lang="fr-CH" sz="4400" b="1" err="1">
+                <a:solidFill>
+                  <a:schemeClr val="bg1"/>
+                </a:solidFill>
+              </a:rPr>
+              <a:t>Get</a:t>
+            </a:r>
+            <a:r>
+              <a:rPr lang="fr-CH" sz="4400" b="1">
+                <a:solidFill>
+                  <a:schemeClr val="bg1"/>
+                </a:solidFill>
+              </a:rPr>
+              <a:t>-Service </a:t>
+            </a:r>
+          </a:p>
+          <a:p>
+            <a:endParaRPr lang="fr-CH" b="1">
               <a:solidFill>
                 <a:schemeClr val="bg1"/>
               </a:solidFill>
-              <a:ea typeface="+mn-lt"/>
-              <a:cs typeface="+mn-lt"/>
             </a:endParaRPr>
           </a:p>
           <a:p>
-            <a:pPr marL="342900" indent="-342900">
+            <a:pPr marL="457200" indent="-457200">
               <a:lnSpc>
-                <a:spcPct val="150000"/>
+                <a:spcPct val="200000"/>
               </a:lnSpc>
               <a:buFont typeface="Arial"/>
               <a:buChar char="•"/>
             </a:pPr>
             <a:r>
-              <a:rPr lang="fr-CH" sz="2600" b="1" dirty="0">
-                <a:solidFill>
-                  <a:schemeClr val="bg1"/>
-                </a:solidFill>
-                <a:ea typeface="+mn-lt"/>
-                <a:cs typeface="+mn-lt"/>
-              </a:rPr>
-              <a:t>Elle permet de filtrer des données. </a:t>
-            </a:r>
-          </a:p>
-          <a:p>
-            <a:pPr marL="342900" indent="-342900">
+              <a:rPr lang="fr-CH" sz="2600" b="1" err="1">
+                <a:solidFill>
+                  <a:schemeClr val="bg1"/>
+                </a:solidFill>
+              </a:rPr>
+              <a:t>Get</a:t>
+            </a:r>
+            <a:r>
+              <a:rPr lang="fr-CH" sz="2600" b="1">
+                <a:solidFill>
+                  <a:schemeClr val="bg1"/>
+                </a:solidFill>
+              </a:rPr>
+              <a:t>-Service interroge Windows et renvoie une collection objets de type (</a:t>
+            </a:r>
+            <a:r>
+              <a:rPr lang="fr-CH" sz="2600" b="1" err="1">
+                <a:solidFill>
+                  <a:schemeClr val="bg1"/>
+                </a:solidFill>
+              </a:rPr>
+              <a:t>System.ServiceProcess</a:t>
+            </a:r>
+            <a:r>
+              <a:rPr lang="fr-CH" sz="2600" b="1">
+                <a:solidFill>
+                  <a:schemeClr val="bg1"/>
+                </a:solidFill>
+              </a:rPr>
+              <a:t>) </a:t>
+            </a:r>
+          </a:p>
+          <a:p>
+            <a:pPr marL="457200" indent="-457200">
               <a:lnSpc>
-                <a:spcPct val="150000"/>
+                <a:spcPct val="200000"/>
               </a:lnSpc>
               <a:buFont typeface="Arial"/>
               <a:buChar char="•"/>
             </a:pPr>
-            <a:endParaRPr lang="fr-CH" sz="2600" b="1" dirty="0">
-              <a:solidFill>
-                <a:schemeClr val="bg1"/>
-              </a:solidFill>
-              <a:ea typeface="+mn-lt"/>
-              <a:cs typeface="+mn-lt"/>
-            </a:endParaRPr>
-          </a:p>
-          <a:p>
-            <a:pPr marL="342900" indent="-342900">
+            <a:r>
+              <a:rPr lang="fr-CH" sz="2600" b="1">
+                <a:solidFill>
+                  <a:schemeClr val="bg1"/>
+                </a:solidFill>
+              </a:rPr>
+              <a:t>Chaque Objet représente un Service</a:t>
+            </a:r>
+          </a:p>
+          <a:p>
+            <a:pPr marL="457200" indent="-457200">
               <a:lnSpc>
-                <a:spcPct val="150000"/>
+                <a:spcPct val="200000"/>
               </a:lnSpc>
               <a:buFont typeface="Arial"/>
               <a:buChar char="•"/>
             </a:pPr>
             <a:r>
-              <a:rPr lang="fr-CH" sz="2600" b="1" dirty="0">
-                <a:solidFill>
-                  <a:schemeClr val="bg1"/>
-                </a:solidFill>
-                <a:ea typeface="+mn-lt"/>
-                <a:cs typeface="+mn-lt"/>
-              </a:rPr>
-              <a:t>Elle peut seulement conservé les objets qui répondent à une condition précise au sein d'un pipeline.</a:t>
-            </a:r>
-          </a:p>
-          <a:p>
-            <a:pPr marL="342900" indent="-342900">
-              <a:lnSpc>
-                <a:spcPct val="150000"/>
-              </a:lnSpc>
-              <a:buFont typeface="Arial"/>
-              <a:buChar char="•"/>
-            </a:pPr>
-            <a:endParaRPr lang="fr-CH" sz="2600" b="1" dirty="0">
-              <a:solidFill>
-                <a:schemeClr val="bg1"/>
-              </a:solidFill>
-              <a:ea typeface="+mn-lt"/>
-              <a:cs typeface="+mn-lt"/>
-            </a:endParaRPr>
-          </a:p>
-          <a:p>
-            <a:pPr marL="342900" indent="-342900">
-              <a:lnSpc>
-                <a:spcPct val="150000"/>
-              </a:lnSpc>
-              <a:buFont typeface="Arial"/>
-              <a:buChar char="•"/>
-            </a:pPr>
-            <a:r>
-              <a:rPr lang="fr-FR" sz="2600" b="1" dirty="0">
-                <a:solidFill>
-                  <a:schemeClr val="bg1"/>
-                </a:solidFill>
-                <a:ea typeface="+mn-lt"/>
-                <a:cs typeface="+mn-lt"/>
-              </a:rPr>
-              <a:t>Exemple : ... | </a:t>
-            </a:r>
-            <a:r>
-              <a:rPr lang="fr-FR" sz="2600" b="1" dirty="0" err="1">
+              <a:rPr lang="fr-CH" sz="2600" b="1">
+                <a:solidFill>
+                  <a:schemeClr val="bg1"/>
+                </a:solidFill>
+              </a:rPr>
+              <a:t>Exemple : </a:t>
+            </a:r>
+            <a:r>
+              <a:rPr lang="fr-FR" sz="2600" b="1">
+                <a:solidFill>
+                  <a:schemeClr val="bg1"/>
+                </a:solidFill>
+              </a:rPr>
+              <a:t>avec un simple </a:t>
+            </a:r>
+            <a:r>
+              <a:rPr lang="fr-FR" sz="2600" b="1" err="1">
                 <a:solidFill>
                   <a:srgbClr val="00B0F0"/>
                 </a:solidFill>
-                <a:ea typeface="+mn-lt"/>
-                <a:cs typeface="+mn-lt"/>
-              </a:rPr>
-              <a:t>Where</a:t>
-            </a:r>
-            <a:r>
-              <a:rPr lang="fr-FR" sz="2600" b="1" dirty="0">
+              </a:rPr>
+              <a:t>Get</a:t>
+            </a:r>
+            <a:r>
+              <a:rPr lang="fr-FR" sz="2600" b="1">
                 <a:solidFill>
                   <a:srgbClr val="00B0F0"/>
                 </a:solidFill>
-                <a:ea typeface="+mn-lt"/>
-                <a:cs typeface="+mn-lt"/>
-              </a:rPr>
-              <a:t>-Object</a:t>
-            </a:r>
-            <a:r>
-              <a:rPr lang="fr-FR" sz="2600" b="1" dirty="0">
-                <a:solidFill>
-                  <a:schemeClr val="bg1"/>
-                </a:solidFill>
-                <a:ea typeface="+mn-lt"/>
-                <a:cs typeface="+mn-lt"/>
-              </a:rPr>
-              <a:t> { </a:t>
-            </a:r>
-            <a:r>
-              <a:rPr lang="fr-FR" sz="2600" b="1" dirty="0">
-                <a:solidFill>
-                  <a:srgbClr val="FFC000"/>
-                </a:solidFill>
-                <a:ea typeface="+mn-lt"/>
-                <a:cs typeface="+mn-lt"/>
-              </a:rPr>
-              <a:t>condition</a:t>
-            </a:r>
-            <a:r>
-              <a:rPr lang="fr-FR" sz="2600" b="1" dirty="0">
-                <a:solidFill>
-                  <a:schemeClr val="bg1"/>
-                </a:solidFill>
-                <a:ea typeface="+mn-lt"/>
-                <a:cs typeface="+mn-lt"/>
-              </a:rPr>
-              <a:t> }</a:t>
-            </a:r>
-          </a:p>
-          <a:p>
-            <a:pPr marL="342900" indent="-342900">
-              <a:lnSpc>
-                <a:spcPct val="150000"/>
-              </a:lnSpc>
-              <a:buFont typeface="Arial"/>
-              <a:buChar char="•"/>
-            </a:pPr>
-            <a:endParaRPr lang="fr-CH" sz="2600" b="1" dirty="0">
-              <a:solidFill>
-                <a:schemeClr val="bg1"/>
-              </a:solidFill>
-              <a:ea typeface="+mn-lt"/>
-              <a:cs typeface="+mn-lt"/>
-            </a:endParaRPr>
-          </a:p>
-          <a:p>
-            <a:pPr marL="342900" indent="-342900">
-              <a:lnSpc>
-                <a:spcPct val="150000"/>
-              </a:lnSpc>
-              <a:buFont typeface="Arial"/>
-              <a:buChar char="•"/>
-            </a:pPr>
-            <a:endParaRPr lang="fr-CH" sz="2600" b="1" dirty="0">
-              <a:solidFill>
-                <a:schemeClr val="bg1"/>
-              </a:solidFill>
-              <a:ea typeface="+mn-lt"/>
-              <a:cs typeface="+mn-lt"/>
-            </a:endParaRPr>
-          </a:p>
-          <a:p>
-            <a:pPr marL="342900" indent="-342900">
-              <a:lnSpc>
-                <a:spcPct val="150000"/>
-              </a:lnSpc>
-              <a:buFont typeface="Arial"/>
-              <a:buChar char="•"/>
-            </a:pPr>
-            <a:endParaRPr lang="fr-CH" sz="2600" dirty="0">
+              </a:rPr>
+              <a:t>-Service</a:t>
+            </a:r>
+            <a:r>
+              <a:rPr lang="fr-FR" sz="2600" b="1">
+                <a:solidFill>
+                  <a:schemeClr val="bg1"/>
+                </a:solidFill>
+              </a:rPr>
+              <a:t>, on affiche tout en vrac.​</a:t>
+            </a:r>
+            <a:endParaRPr lang="fr-CH" sz="2600" b="1">
               <a:solidFill>
                 <a:schemeClr val="bg1"/>
               </a:solidFill>
             </a:endParaRPr>
           </a:p>
+          <a:p>
+            <a:pPr algn="l"/>
+            <a:endParaRPr lang="fr-FR"/>
+          </a:p>
         </p:txBody>
       </p:sp>
     </p:spTree>
     <p:extLst>
       <p:ext uri="{BB962C8B-B14F-4D97-AF65-F5344CB8AC3E}">
-        <p14:creationId xmlns:p14="http://schemas.microsoft.com/office/powerpoint/2010/main" val="4020419043"/>
+        <p14:creationId xmlns:p14="http://schemas.microsoft.com/office/powerpoint/2010/main" val="758963859"/>
       </p:ext>
     </p:extLst>
   </p:cSld>
@@ -5628,10 +5854,10 @@
       </p:grpSpPr>
       <p:sp>
         <p:nvSpPr>
-          <p:cNvPr id="4" name="ZoneTexte 3">
-            <a:extLst>
-              <a:ext uri="{FF2B5EF4-FFF2-40B4-BE49-F238E27FC236}">
-                <a16:creationId xmlns:a16="http://schemas.microsoft.com/office/drawing/2014/main" id="{E4EBA157-F826-756A-9C9A-131CCE058350}"/>
+          <p:cNvPr id="2" name="ZoneTexte 1">
+            <a:extLst>
+              <a:ext uri="{FF2B5EF4-FFF2-40B4-BE49-F238E27FC236}">
+                <a16:creationId xmlns:a16="http://schemas.microsoft.com/office/drawing/2014/main" id="{E0A2C836-23DE-91AA-B6ED-873A1952E19F}"/>
               </a:ext>
             </a:extLst>
           </p:cNvPr>
@@ -5640,8 +5866,8 @@
         </p:nvSpPr>
         <p:spPr>
           <a:xfrm>
-            <a:off x="0" y="28876"/>
-            <a:ext cx="12192000" cy="4447371"/>
+            <a:off x="1" y="-1"/>
+            <a:ext cx="12191999" cy="6420989"/>
           </a:xfrm>
           <a:prstGeom prst="rect">
             <a:avLst/>
@@ -5658,52 +5884,37 @@
           <a:lstStyle/>
           <a:p>
             <a:r>
-              <a:rPr lang="fr-CH" sz="4400" b="1" dirty="0">
-                <a:solidFill>
-                  <a:srgbClr val="C00000"/>
-                </a:solidFill>
-              </a:rPr>
-              <a:t>$_</a:t>
-            </a:r>
-            <a:r>
-              <a:rPr lang="fr-CH" sz="4400" b="1" dirty="0">
-                <a:solidFill>
-                  <a:srgbClr val="00B050"/>
-                </a:solidFill>
-              </a:rPr>
-              <a:t>.</a:t>
-            </a:r>
-            <a:r>
-              <a:rPr lang="fr-CH" sz="4400" b="1" dirty="0" err="1">
-                <a:solidFill>
-                  <a:srgbClr val="00B050"/>
-                </a:solidFill>
-              </a:rPr>
-              <a:t>Status</a:t>
-            </a:r>
-            <a:r>
-              <a:rPr lang="fr-CH" sz="4400" b="1" dirty="0">
-                <a:solidFill>
-                  <a:srgbClr val="00B050"/>
-                </a:solidFill>
-              </a:rPr>
-              <a:t> </a:t>
-            </a:r>
-            <a:endParaRPr lang="fr-FR" sz="4400" dirty="0">
+              <a:rPr lang="fr-CH" sz="4400" b="1" err="1">
+                <a:solidFill>
+                  <a:schemeClr val="bg1"/>
+                </a:solidFill>
+              </a:rPr>
+              <a:t>Where</a:t>
+            </a:r>
+            <a:r>
+              <a:rPr lang="fr-CH" sz="4400" b="1">
+                <a:solidFill>
+                  <a:schemeClr val="bg1"/>
+                </a:solidFill>
+              </a:rPr>
+              <a:t>-Object</a:t>
+            </a:r>
+          </a:p>
+          <a:p>
+            <a:pPr marL="342900" indent="-342900">
+              <a:buFont typeface="Arial"/>
+              <a:buChar char="•"/>
+            </a:pPr>
+            <a:endParaRPr lang="fr-CH" sz="2000" b="1">
               <a:solidFill>
-                <a:srgbClr val="00B050"/>
+                <a:schemeClr val="bg1"/>
               </a:solidFill>
+              <a:ea typeface="+mn-lt"/>
+              <a:cs typeface="+mn-lt"/>
             </a:endParaRPr>
           </a:p>
           <a:p>
-            <a:endParaRPr lang="fr-CH" sz="2600" b="1" dirty="0">
-              <a:solidFill>
-                <a:srgbClr val="00B050"/>
-              </a:solidFill>
-            </a:endParaRPr>
-          </a:p>
-          <a:p>
-            <a:pPr marL="285750" indent="-285750">
+            <a:pPr marL="342900" indent="-342900">
               <a:lnSpc>
                 <a:spcPct val="150000"/>
               </a:lnSpc>
@@ -5711,85 +5922,65 @@
               <a:buChar char="•"/>
             </a:pPr>
             <a:r>
-              <a:rPr lang="fr-CH" sz="2600" b="1" dirty="0">
-                <a:solidFill>
-                  <a:srgbClr val="C00000"/>
-                </a:solidFill>
-              </a:rPr>
-              <a:t>$_</a:t>
-            </a:r>
-          </a:p>
-          <a:p>
-            <a:pPr>
-              <a:lnSpc>
-                <a:spcPct val="150000"/>
-              </a:lnSpc>
-            </a:pPr>
-            <a:r>
-              <a:rPr lang="fr-CH" sz="2600" b="1" dirty="0">
-                <a:solidFill>
-                  <a:srgbClr val="C00000"/>
-                </a:solidFill>
-              </a:rPr>
-              <a:t>Objet courant (il est </a:t>
-            </a:r>
-            <a:r>
-              <a:rPr lang="fr-CH" sz="2600" b="1" dirty="0" err="1">
-                <a:solidFill>
-                  <a:srgbClr val="C00000"/>
-                </a:solidFill>
-              </a:rPr>
-              <a:t>séléctionné</a:t>
-            </a:r>
-            <a:r>
-              <a:rPr lang="fr-CH" sz="2600" b="1" dirty="0">
-                <a:solidFill>
-                  <a:srgbClr val="C00000"/>
-                </a:solidFill>
-              </a:rPr>
-              <a:t> par la commande précédente)</a:t>
-            </a:r>
-          </a:p>
-          <a:p>
-            <a:pPr>
-              <a:lnSpc>
-                <a:spcPct val="150000"/>
-              </a:lnSpc>
-            </a:pPr>
-            <a:endParaRPr lang="fr-CH" sz="2600" b="1" dirty="0">
-              <a:solidFill>
-                <a:srgbClr val="C00000"/>
-              </a:solidFill>
-            </a:endParaRPr>
-          </a:p>
-          <a:p>
-            <a:pPr marL="285750" indent="-285750">
+              <a:rPr lang="fr-CH" sz="2600" b="1">
+                <a:solidFill>
+                  <a:schemeClr val="bg1"/>
+                </a:solidFill>
+                <a:ea typeface="+mn-lt"/>
+                <a:cs typeface="+mn-lt"/>
+              </a:rPr>
+              <a:t>Elle permet de filtrer des données. </a:t>
+            </a:r>
+          </a:p>
+          <a:p>
+            <a:pPr marL="342900" indent="-342900">
               <a:lnSpc>
                 <a:spcPct val="150000"/>
               </a:lnSpc>
               <a:buFont typeface="Arial"/>
               <a:buChar char="•"/>
             </a:pPr>
-            <a:r>
-              <a:rPr lang="fr-CH" sz="2600" b="1" dirty="0">
-                <a:solidFill>
-                  <a:srgbClr val="00B050"/>
-                </a:solidFill>
-              </a:rPr>
-              <a:t>.</a:t>
-            </a:r>
-            <a:r>
-              <a:rPr lang="fr-CH" sz="2600" b="1" dirty="0" err="1">
-                <a:solidFill>
-                  <a:srgbClr val="00B050"/>
-                </a:solidFill>
-              </a:rPr>
-              <a:t>Status</a:t>
-            </a:r>
-            <a:endParaRPr lang="fr-CH" sz="2600" b="1" dirty="0">
+            <a:endParaRPr lang="fr-CH" sz="2600" b="1">
               <a:solidFill>
-                <a:srgbClr val="00B050"/>
+                <a:schemeClr val="bg1"/>
               </a:solidFill>
+              <a:ea typeface="+mn-lt"/>
+              <a:cs typeface="+mn-lt"/>
+            </a:endParaRPr>
+          </a:p>
+          <a:p>
+            <a:pPr marL="342900" indent="-342900">
+              <a:lnSpc>
+                <a:spcPct val="150000"/>
+              </a:lnSpc>
+              <a:buFont typeface="Arial"/>
+              <a:buChar char="•"/>
+            </a:pPr>
+            <a:r>
+              <a:rPr lang="fr-CH" sz="2600" b="1">
+                <a:solidFill>
+                  <a:schemeClr val="bg1"/>
+                </a:solidFill>
+                <a:ea typeface="+mn-lt"/>
+                <a:cs typeface="+mn-lt"/>
+              </a:rPr>
+              <a:t>Elle peut seulement conservé les objets qui répondent à une condition précise au sein d'un pipeline.</a:t>
+            </a:r>
+          </a:p>
+          <a:p>
+            <a:pPr marL="342900" indent="-342900">
+              <a:lnSpc>
+                <a:spcPct val="150000"/>
+              </a:lnSpc>
+              <a:buFont typeface="Arial"/>
+              <a:buChar char="•"/>
+            </a:pPr>
+            <a:endParaRPr lang="fr-CH" sz="2600" b="1">
+              <a:solidFill>
+                <a:schemeClr val="bg1"/>
+              </a:solidFill>
+              <a:ea typeface="+mn-lt"/>
+              <a:cs typeface="+mn-lt"/>
             </a:endParaRPr>
           </a:p>
           <a:p>
@@ -5799,33 +5990,118 @@
               </a:lnSpc>
             </a:pPr>
             <a:r>
-              <a:rPr lang="fr-CH" sz="2600" b="1" dirty="0">
-                <a:solidFill>
-                  <a:srgbClr val="00B050"/>
+              <a:rPr lang="fr-FR" sz="2600" b="1">
+                <a:solidFill>
+                  <a:schemeClr val="bg1"/>
                 </a:solidFill>
                 <a:ea typeface="+mn-lt"/>
                 <a:cs typeface="+mn-lt"/>
               </a:rPr>
-              <a:t>Désigne la propriété spécifique de l'objet</a:t>
-            </a:r>
-            <a:r>
-              <a:rPr lang="fr-CH" sz="2600" b="1" dirty="0">
-                <a:solidFill>
-                  <a:srgbClr val="00B050"/>
-                </a:solidFill>
-              </a:rPr>
-              <a:t> pour les statuts des services</a:t>
-            </a:r>
-          </a:p>
-          <a:p>
-            <a:endParaRPr lang="fr-FR" dirty="0"/>
+              <a:t>Exemple : ... | </a:t>
+            </a:r>
+            <a:r>
+              <a:rPr lang="fr-FR" sz="2600" b="1" err="1">
+                <a:solidFill>
+                  <a:srgbClr val="00B0F0"/>
+                </a:solidFill>
+                <a:ea typeface="+mn-lt"/>
+                <a:cs typeface="+mn-lt"/>
+              </a:rPr>
+              <a:t>Where</a:t>
+            </a:r>
+            <a:r>
+              <a:rPr lang="fr-FR" sz="2600" b="1">
+                <a:solidFill>
+                  <a:srgbClr val="00B0F0"/>
+                </a:solidFill>
+                <a:ea typeface="+mn-lt"/>
+                <a:cs typeface="+mn-lt"/>
+              </a:rPr>
+              <a:t>-Object</a:t>
+            </a:r>
+            <a:r>
+              <a:rPr lang="fr-FR" sz="2600" b="1">
+                <a:solidFill>
+                  <a:schemeClr val="bg1"/>
+                </a:solidFill>
+                <a:ea typeface="+mn-lt"/>
+                <a:cs typeface="+mn-lt"/>
+              </a:rPr>
+              <a:t> { </a:t>
+            </a:r>
+            <a:r>
+              <a:rPr lang="fr-FR" sz="2600" b="1">
+                <a:solidFill>
+                  <a:srgbClr val="FFC000"/>
+                </a:solidFill>
+                <a:ea typeface="+mn-lt"/>
+                <a:cs typeface="+mn-lt"/>
+              </a:rPr>
+              <a:t>condition</a:t>
+            </a:r>
+            <a:r>
+              <a:rPr lang="fr-FR" sz="2600" b="1">
+                <a:solidFill>
+                  <a:schemeClr val="bg1"/>
+                </a:solidFill>
+                <a:ea typeface="+mn-lt"/>
+                <a:cs typeface="+mn-lt"/>
+              </a:rPr>
+              <a:t> }</a:t>
+            </a:r>
+          </a:p>
+          <a:p>
+            <a:pPr marL="342900" indent="-342900">
+              <a:lnSpc>
+                <a:spcPct val="150000"/>
+              </a:lnSpc>
+              <a:buFont typeface="Arial"/>
+              <a:buChar char="•"/>
+            </a:pPr>
+            <a:endParaRPr lang="fr-CH" sz="2600" b="1">
+              <a:solidFill>
+                <a:schemeClr val="bg1"/>
+              </a:solidFill>
+              <a:ea typeface="+mn-lt"/>
+              <a:cs typeface="+mn-lt"/>
+            </a:endParaRPr>
+          </a:p>
+          <a:p>
+            <a:pPr marL="342900" indent="-342900">
+              <a:lnSpc>
+                <a:spcPct val="150000"/>
+              </a:lnSpc>
+              <a:buFont typeface="Arial"/>
+              <a:buChar char="•"/>
+            </a:pPr>
+            <a:endParaRPr lang="fr-CH" sz="2600" b="1">
+              <a:solidFill>
+                <a:schemeClr val="bg1"/>
+              </a:solidFill>
+              <a:ea typeface="+mn-lt"/>
+              <a:cs typeface="+mn-lt"/>
+            </a:endParaRPr>
+          </a:p>
+          <a:p>
+            <a:pPr marL="342900" indent="-342900">
+              <a:lnSpc>
+                <a:spcPct val="150000"/>
+              </a:lnSpc>
+              <a:buFont typeface="Arial"/>
+              <a:buChar char="•"/>
+            </a:pPr>
+            <a:endParaRPr lang="fr-CH" sz="2600">
+              <a:solidFill>
+                <a:schemeClr val="bg1"/>
+              </a:solidFill>
+            </a:endParaRPr>
           </a:p>
         </p:txBody>
       </p:sp>
     </p:spTree>
     <p:extLst>
       <p:ext uri="{BB962C8B-B14F-4D97-AF65-F5344CB8AC3E}">
-        <p14:creationId xmlns:p14="http://schemas.microsoft.com/office/powerpoint/2010/main" val="279561989"/>
+        <p14:creationId xmlns:p14="http://schemas.microsoft.com/office/powerpoint/2010/main" val="4020419043"/>
       </p:ext>
     </p:extLst>
   </p:cSld>
@@ -5865,10 +6141,10 @@
       </p:grpSpPr>
       <p:sp>
         <p:nvSpPr>
-          <p:cNvPr id="2" name="ZoneTexte 1">
-            <a:extLst>
-              <a:ext uri="{FF2B5EF4-FFF2-40B4-BE49-F238E27FC236}">
-                <a16:creationId xmlns:a16="http://schemas.microsoft.com/office/drawing/2014/main" id="{7E996A39-B63C-F4CA-C88D-C4DD41191E6B}"/>
+          <p:cNvPr id="3" name="ZoneTexte 2">
+            <a:extLst>
+              <a:ext uri="{FF2B5EF4-FFF2-40B4-BE49-F238E27FC236}">
+                <a16:creationId xmlns:a16="http://schemas.microsoft.com/office/drawing/2014/main" id="{00322F7B-7991-384B-AD7A-A0DBCC7B3BB0}"/>
               </a:ext>
             </a:extLst>
           </p:cNvPr>
@@ -5877,8 +6153,8 @@
         </p:nvSpPr>
         <p:spPr>
           <a:xfrm>
-            <a:off x="2601565" y="-3502"/>
-            <a:ext cx="6993725" cy="769441"/>
+            <a:off x="3256" y="-4071"/>
+            <a:ext cx="12192000" cy="5940088"/>
           </a:xfrm>
           <a:prstGeom prst="rect">
             <a:avLst/>
@@ -5894,51 +6170,189 @@
           </a:bodyPr>
           <a:lstStyle/>
           <a:p>
+            <a:pPr algn="l"/>
             <a:r>
               <a:rPr lang="fr-FR" sz="4400" b="1">
                 <a:solidFill>
                   <a:schemeClr val="bg1"/>
                 </a:solidFill>
               </a:rPr>
-              <a:t>Opérateur de comparaison</a:t>
-            </a:r>
-          </a:p>
-        </p:txBody>
-      </p:sp>
-      <p:pic>
-        <p:nvPicPr>
-          <p:cNvPr id="3" name="Image 2" descr="Une image contenant texte, capture d’écran, Police, nombre&#10;&#10;Le contenu généré par l’IA peut être incorrect.">
-            <a:extLst>
-              <a:ext uri="{FF2B5EF4-FFF2-40B4-BE49-F238E27FC236}">
-                <a16:creationId xmlns:a16="http://schemas.microsoft.com/office/drawing/2014/main" id="{26DF97D8-D6C2-B942-6600-CF365E583846}"/>
-              </a:ext>
-            </a:extLst>
-          </p:cNvPr>
-          <p:cNvPicPr>
-            <a:picLocks noChangeAspect="1"/>
-          </p:cNvPicPr>
-          <p:nvPr/>
-        </p:nvPicPr>
-        <p:blipFill>
-          <a:blip r:embed="rId2"/>
-          <a:stretch>
-            <a:fillRect/>
-          </a:stretch>
-        </p:blipFill>
-        <p:spPr>
-          <a:xfrm>
-            <a:off x="1378879" y="948359"/>
-            <a:ext cx="9448620" cy="5126067"/>
-          </a:xfrm>
-          <a:prstGeom prst="rect">
-            <a:avLst/>
-          </a:prstGeom>
-        </p:spPr>
-      </p:pic>
+              <a:t>Select-Object</a:t>
+            </a:r>
+          </a:p>
+          <a:p>
+            <a:endParaRPr lang="fr-FR" sz="4400" b="1">
+              <a:solidFill>
+                <a:schemeClr val="bg1"/>
+              </a:solidFill>
+              <a:ea typeface="+mn-lt"/>
+              <a:cs typeface="+mn-lt"/>
+            </a:endParaRPr>
+          </a:p>
+          <a:p>
+            <a:endParaRPr lang="fr-FR" sz="4400" b="1">
+              <a:solidFill>
+                <a:schemeClr val="bg1"/>
+              </a:solidFill>
+              <a:ea typeface="+mn-lt"/>
+              <a:cs typeface="+mn-lt"/>
+            </a:endParaRPr>
+          </a:p>
+          <a:p>
+            <a:pPr marL="285750" indent="-285750">
+              <a:buFont typeface="Arial"/>
+              <a:buChar char="•"/>
+            </a:pPr>
+            <a:endParaRPr lang="fr-FR" b="1">
+              <a:solidFill>
+                <a:schemeClr val="bg1"/>
+              </a:solidFill>
+              <a:ea typeface="+mn-lt"/>
+              <a:cs typeface="+mn-lt"/>
+            </a:endParaRPr>
+          </a:p>
+          <a:p>
+            <a:pPr marL="285750" indent="-285750">
+              <a:buFont typeface="Arial"/>
+              <a:buChar char="•"/>
+            </a:pPr>
+            <a:r>
+              <a:rPr lang="fr-FR" sz="2600" b="1">
+                <a:solidFill>
+                  <a:schemeClr val="bg1"/>
+                </a:solidFill>
+                <a:ea typeface="+mn-lt"/>
+                <a:cs typeface="+mn-lt"/>
+              </a:rPr>
+              <a:t>Il sert à réduire l'objet pour n'afficher que les propriétés qui vous intéressent, ou à en limiter le nombre.</a:t>
+            </a:r>
+          </a:p>
+          <a:p>
+            <a:pPr marL="285750" indent="-285750">
+              <a:buFont typeface="Arial"/>
+              <a:buChar char="•"/>
+            </a:pPr>
+            <a:endParaRPr lang="fr-FR" sz="2600" b="1">
+              <a:solidFill>
+                <a:schemeClr val="bg1"/>
+              </a:solidFill>
+              <a:ea typeface="+mn-lt"/>
+              <a:cs typeface="+mn-lt"/>
+            </a:endParaRPr>
+          </a:p>
+          <a:p>
+            <a:pPr marL="285750" indent="-285750">
+              <a:buFont typeface="Arial"/>
+              <a:buChar char="•"/>
+            </a:pPr>
+            <a:endParaRPr lang="fr-FR" sz="2600" b="1">
+              <a:solidFill>
+                <a:schemeClr val="bg1"/>
+              </a:solidFill>
+              <a:ea typeface="+mn-lt"/>
+              <a:cs typeface="+mn-lt"/>
+            </a:endParaRPr>
+          </a:p>
+          <a:p>
+            <a:pPr marL="285750" indent="-285750">
+              <a:buFont typeface="Arial"/>
+              <a:buChar char="•"/>
+            </a:pPr>
+            <a:endParaRPr lang="fr-FR" sz="2600" b="1">
+              <a:solidFill>
+                <a:schemeClr val="bg1"/>
+              </a:solidFill>
+              <a:ea typeface="+mn-lt"/>
+              <a:cs typeface="+mn-lt"/>
+            </a:endParaRPr>
+          </a:p>
+          <a:p>
+            <a:pPr marL="285750" indent="-285750">
+              <a:buFont typeface="Arial"/>
+              <a:buChar char="•"/>
+            </a:pPr>
+            <a:endParaRPr lang="fr-FR" sz="2600" b="1">
+              <a:solidFill>
+                <a:schemeClr val="bg1"/>
+              </a:solidFill>
+              <a:ea typeface="+mn-lt"/>
+              <a:cs typeface="+mn-lt"/>
+            </a:endParaRPr>
+          </a:p>
+          <a:p>
+            <a:pPr fontAlgn="base"/>
+            <a:r>
+              <a:rPr lang="fr-FR" sz="2600" b="1">
+                <a:solidFill>
+                  <a:schemeClr val="bg1"/>
+                </a:solidFill>
+                <a:ea typeface="+mn-lt"/>
+                <a:cs typeface="+mn-lt"/>
+              </a:rPr>
+              <a:t>Exemple : </a:t>
+            </a:r>
+            <a:r>
+              <a:rPr lang="fr-FR" sz="2600" b="1">
+                <a:solidFill>
+                  <a:schemeClr val="bg1"/>
+                </a:solidFill>
+              </a:rPr>
+              <a:t>... | </a:t>
+            </a:r>
+            <a:r>
+              <a:rPr lang="fr-FR" sz="2600" b="1">
+                <a:solidFill>
+                  <a:srgbClr val="0070C0"/>
+                </a:solidFill>
+              </a:rPr>
+              <a:t>Select-Object</a:t>
+            </a:r>
+            <a:r>
+              <a:rPr lang="fr-FR" sz="2600" b="1">
+                <a:solidFill>
+                  <a:schemeClr val="bg1"/>
+                </a:solidFill>
+              </a:rPr>
+              <a:t> </a:t>
+            </a:r>
+            <a:r>
+              <a:rPr lang="fr-FR" sz="2600" b="1">
+                <a:solidFill>
+                  <a:schemeClr val="accent5">
+                    <a:lumMod val="60000"/>
+                    <a:lumOff val="40000"/>
+                  </a:schemeClr>
+                </a:solidFill>
+              </a:rPr>
+              <a:t>Name</a:t>
+            </a:r>
+            <a:r>
+              <a:rPr lang="fr-FR" sz="2600" b="1">
+                <a:solidFill>
+                  <a:schemeClr val="bg1"/>
+                </a:solidFill>
+              </a:rPr>
+              <a:t> (Affiche uniquement le nom du service, cache le reste).</a:t>
+            </a:r>
+            <a:r>
+              <a:rPr lang="en-US" sz="2600">
+                <a:solidFill>
+                  <a:schemeClr val="bg1"/>
+                </a:solidFill>
+              </a:rPr>
+              <a:t>​</a:t>
+            </a:r>
+            <a:br>
+              <a:rPr lang="en-US"/>
+            </a:br>
+            <a:endParaRPr lang="en-US"/>
+          </a:p>
+        </p:txBody>
+      </p:sp>
     </p:spTree>
     <p:extLst>
       <p:ext uri="{BB962C8B-B14F-4D97-AF65-F5344CB8AC3E}">
-        <p14:creationId xmlns:p14="http://schemas.microsoft.com/office/powerpoint/2010/main" val="2998398906"/>
+        <p14:creationId xmlns:p14="http://schemas.microsoft.com/office/powerpoint/2010/main" val="2923668699"/>
       </p:ext>
     </p:extLst>
   </p:cSld>
@@ -5978,10 +6392,10 @@
       </p:grpSpPr>
       <p:sp>
         <p:nvSpPr>
-          <p:cNvPr id="3" name="ZoneTexte 2">
-            <a:extLst>
-              <a:ext uri="{FF2B5EF4-FFF2-40B4-BE49-F238E27FC236}">
-                <a16:creationId xmlns:a16="http://schemas.microsoft.com/office/drawing/2014/main" id="{00322F7B-7991-384B-AD7A-A0DBCC7B3BB0}"/>
+          <p:cNvPr id="2" name="ZoneTexte 1">
+            <a:extLst>
+              <a:ext uri="{FF2B5EF4-FFF2-40B4-BE49-F238E27FC236}">
+                <a16:creationId xmlns:a16="http://schemas.microsoft.com/office/drawing/2014/main" id="{7E996A39-B63C-F4CA-C88D-C4DD41191E6B}"/>
               </a:ext>
             </a:extLst>
           </p:cNvPr>
@@ -5990,8 +6404,8 @@
         </p:nvSpPr>
         <p:spPr>
           <a:xfrm>
-            <a:off x="3256" y="-4071"/>
-            <a:ext cx="12192000" cy="5940088"/>
+            <a:off x="2601565" y="-3502"/>
+            <a:ext cx="6993725" cy="769441"/>
           </a:xfrm>
           <a:prstGeom prst="rect">
             <a:avLst/>
@@ -6007,186 +6421,51 @@
           </a:bodyPr>
           <a:lstStyle/>
           <a:p>
-            <a:pPr algn="l"/>
-            <a:r>
-              <a:rPr lang="fr-FR" sz="4400" b="1" dirty="0">
-                <a:solidFill>
-                  <a:schemeClr val="bg1"/>
-                </a:solidFill>
-              </a:rPr>
-              <a:t>Select-Object</a:t>
-            </a:r>
-          </a:p>
-          <a:p>
-            <a:endParaRPr lang="fr-FR" sz="4400" b="1" dirty="0">
-              <a:solidFill>
-                <a:schemeClr val="bg1"/>
-              </a:solidFill>
-              <a:ea typeface="+mn-lt"/>
-              <a:cs typeface="+mn-lt"/>
-            </a:endParaRPr>
-          </a:p>
-          <a:p>
-            <a:endParaRPr lang="fr-FR" sz="4400" b="1" dirty="0">
-              <a:solidFill>
-                <a:schemeClr val="bg1"/>
-              </a:solidFill>
-              <a:ea typeface="+mn-lt"/>
-              <a:cs typeface="+mn-lt"/>
-            </a:endParaRPr>
-          </a:p>
-          <a:p>
-            <a:pPr marL="285750" indent="-285750">
-              <a:buFont typeface="Arial"/>
-              <a:buChar char="•"/>
-            </a:pPr>
-            <a:endParaRPr lang="fr-FR" b="1" dirty="0">
-              <a:solidFill>
-                <a:schemeClr val="bg1"/>
-              </a:solidFill>
-              <a:ea typeface="+mn-lt"/>
-              <a:cs typeface="+mn-lt"/>
-            </a:endParaRPr>
-          </a:p>
-          <a:p>
-            <a:pPr marL="285750" indent="-285750">
-              <a:buFont typeface="Arial"/>
-              <a:buChar char="•"/>
-            </a:pPr>
-            <a:r>
-              <a:rPr lang="fr-FR" sz="2600" b="1" dirty="0">
-                <a:solidFill>
-                  <a:schemeClr val="bg1"/>
-                </a:solidFill>
-                <a:ea typeface="+mn-lt"/>
-                <a:cs typeface="+mn-lt"/>
-              </a:rPr>
-              <a:t>Il sert à réduire l'objet pour n'afficher que les propriétés qui vous intéressent, ou à en limiter le nombre.</a:t>
-            </a:r>
-          </a:p>
-          <a:p>
-            <a:pPr marL="285750" indent="-285750">
-              <a:buFont typeface="Arial"/>
-              <a:buChar char="•"/>
-            </a:pPr>
-            <a:endParaRPr lang="fr-FR" sz="2600" b="1" dirty="0">
-              <a:solidFill>
-                <a:schemeClr val="bg1"/>
-              </a:solidFill>
-              <a:ea typeface="+mn-lt"/>
-              <a:cs typeface="+mn-lt"/>
-            </a:endParaRPr>
-          </a:p>
-          <a:p>
-            <a:pPr marL="285750" indent="-285750">
-              <a:buFont typeface="Arial"/>
-              <a:buChar char="•"/>
-            </a:pPr>
-            <a:endParaRPr lang="fr-FR" sz="2600" b="1" dirty="0">
-              <a:solidFill>
-                <a:schemeClr val="bg1"/>
-              </a:solidFill>
-              <a:ea typeface="+mn-lt"/>
-              <a:cs typeface="+mn-lt"/>
-            </a:endParaRPr>
-          </a:p>
-          <a:p>
-            <a:pPr marL="285750" indent="-285750">
-              <a:buFont typeface="Arial"/>
-              <a:buChar char="•"/>
-            </a:pPr>
-            <a:endParaRPr lang="fr-FR" sz="2600" b="1" dirty="0">
-              <a:solidFill>
-                <a:schemeClr val="bg1"/>
-              </a:solidFill>
-              <a:ea typeface="+mn-lt"/>
-              <a:cs typeface="+mn-lt"/>
-            </a:endParaRPr>
-          </a:p>
-          <a:p>
-            <a:pPr marL="285750" indent="-285750">
-              <a:buFont typeface="Arial"/>
-              <a:buChar char="•"/>
-            </a:pPr>
-            <a:endParaRPr lang="fr-FR" sz="2600" b="1" dirty="0">
-              <a:solidFill>
-                <a:schemeClr val="bg1"/>
-              </a:solidFill>
-              <a:ea typeface="+mn-lt"/>
-              <a:cs typeface="+mn-lt"/>
-            </a:endParaRPr>
-          </a:p>
-          <a:p>
-            <a:pPr fontAlgn="base"/>
-            <a:r>
-              <a:rPr lang="fr-FR" sz="2600" b="1" dirty="0">
-                <a:solidFill>
-                  <a:schemeClr val="bg1"/>
-                </a:solidFill>
-                <a:ea typeface="+mn-lt"/>
-                <a:cs typeface="+mn-lt"/>
-              </a:rPr>
-              <a:t>Exemple : </a:t>
-            </a:r>
-            <a:r>
-              <a:rPr lang="fr-FR" sz="2600" b="1" dirty="0">
-                <a:solidFill>
-                  <a:schemeClr val="bg1"/>
-                </a:solidFill>
-              </a:rPr>
-              <a:t>... | </a:t>
-            </a:r>
-            <a:r>
-              <a:rPr lang="fr-FR" sz="2600" b="1" dirty="0">
-                <a:solidFill>
-                  <a:srgbClr val="0070C0"/>
-                </a:solidFill>
-              </a:rPr>
-              <a:t>Select-Object</a:t>
-            </a:r>
-            <a:r>
-              <a:rPr lang="fr-FR" sz="2600" b="1" dirty="0">
-                <a:solidFill>
-                  <a:schemeClr val="bg1"/>
-                </a:solidFill>
-              </a:rPr>
-              <a:t> </a:t>
-            </a:r>
-            <a:r>
-              <a:rPr lang="fr-FR" sz="2600" b="1" dirty="0">
-                <a:solidFill>
-                  <a:srgbClr val="7030A0"/>
-                </a:solidFill>
-              </a:rPr>
-              <a:t>Name</a:t>
-            </a:r>
-            <a:r>
-              <a:rPr lang="fr-FR" sz="2600" b="1" dirty="0">
-                <a:solidFill>
-                  <a:schemeClr val="bg1"/>
-                </a:solidFill>
-              </a:rPr>
-              <a:t> (Affiche uniquement le nom du service, cache le reste).</a:t>
-            </a:r>
-            <a:r>
-              <a:rPr lang="en-US" sz="2600" dirty="0">
-                <a:solidFill>
-                  <a:schemeClr val="bg1"/>
-                </a:solidFill>
-              </a:rPr>
-              <a:t>​</a:t>
-            </a:r>
-            <a:br>
-              <a:rPr lang="en-US" dirty="0"/>
-            </a:br>
-            <a:endParaRPr lang="en-US" dirty="0"/>
-          </a:p>
-        </p:txBody>
-      </p:sp>
+            <a:r>
+              <a:rPr lang="fr-FR" sz="4400" b="1">
+                <a:solidFill>
+                  <a:schemeClr val="bg1"/>
+                </a:solidFill>
+              </a:rPr>
+              <a:t>Opérateur de comparaison</a:t>
+            </a:r>
+          </a:p>
+        </p:txBody>
+      </p:sp>
+      <p:pic>
+        <p:nvPicPr>
+          <p:cNvPr id="3" name="Image 2" descr="Une image contenant texte, capture d’écran, Police, nombre&#10;&#10;Le contenu généré par l’IA peut être incorrect.">
+            <a:extLst>
+              <a:ext uri="{FF2B5EF4-FFF2-40B4-BE49-F238E27FC236}">
+                <a16:creationId xmlns:a16="http://schemas.microsoft.com/office/drawing/2014/main" id="{26DF97D8-D6C2-B942-6600-CF365E583846}"/>
+              </a:ext>
+            </a:extLst>
+          </p:cNvPr>
+          <p:cNvPicPr>
+            <a:picLocks noChangeAspect="1"/>
+          </p:cNvPicPr>
+          <p:nvPr/>
+        </p:nvPicPr>
+        <p:blipFill>
+          <a:blip r:embed="rId2"/>
+          <a:stretch>
+            <a:fillRect/>
+          </a:stretch>
+        </p:blipFill>
+        <p:spPr>
+          <a:xfrm>
+            <a:off x="1378879" y="948359"/>
+            <a:ext cx="9448620" cy="5126067"/>
+          </a:xfrm>
+          <a:prstGeom prst="rect">
+            <a:avLst/>
+          </a:prstGeom>
+        </p:spPr>
+      </p:pic>
     </p:spTree>
     <p:extLst>
       <p:ext uri="{BB962C8B-B14F-4D97-AF65-F5344CB8AC3E}">
-        <p14:creationId xmlns:p14="http://schemas.microsoft.com/office/powerpoint/2010/main" val="2923668699"/>
+        <p14:creationId xmlns:p14="http://schemas.microsoft.com/office/powerpoint/2010/main" val="2998398906"/>
       </p:ext>
     </p:extLst>
   </p:cSld>
@@ -6224,82 +6503,22 @@
           <a:chExt cx="0" cy="0"/>
         </a:xfrm>
       </p:grpSpPr>
-      <p:sp useBgFill="1">
-        <p:nvSpPr>
-          <p:cNvPr id="8" name="Rectangle 7">
-            <a:extLst>
-              <a:ext uri="{FF2B5EF4-FFF2-40B4-BE49-F238E27FC236}">
-                <a16:creationId xmlns:a16="http://schemas.microsoft.com/office/drawing/2014/main" id="{32E62931-8EB4-42BB-BAAB-D8757BE66D8E}"/>
-              </a:ext>
-              <a:ext uri="{C183D7F6-B498-43B3-948B-1728B52AA6E4}">
-                <adec:decorative xmlns:adec="http://schemas.microsoft.com/office/drawing/2017/decorative" val="1"/>
-              </a:ext>
-            </a:extLst>
-          </p:cNvPr>
-          <p:cNvSpPr>
-            <a:spLocks noGrp="1" noRot="1" noChangeAspect="1" noMove="1" noResize="1" noEditPoints="1" noAdjustHandles="1" noChangeArrowheads="1" noChangeShapeType="1" noTextEdit="1"/>
-          </p:cNvSpPr>
-          <p:nvPr>
-            <p:extLst>
-              <p:ext uri="{386F3935-93C4-4BCD-93E2-E3B085C9AB24}">
-                <p16:designElem xmlns:p16="http://schemas.microsoft.com/office/powerpoint/2015/main" val="1"/>
-              </p:ext>
-            </p:extLst>
-          </p:nvPr>
+      <p:sp>
+        <p:nvSpPr>
+          <p:cNvPr id="4" name="ZoneTexte 3">
+            <a:extLst>
+              <a:ext uri="{FF2B5EF4-FFF2-40B4-BE49-F238E27FC236}">
+                <a16:creationId xmlns:a16="http://schemas.microsoft.com/office/drawing/2014/main" id="{E4EBA157-F826-756A-9C9A-131CCE058350}"/>
+              </a:ext>
+            </a:extLst>
+          </p:cNvPr>
+          <p:cNvSpPr txBox="1"/>
+          <p:nvPr/>
         </p:nvSpPr>
         <p:spPr>
           <a:xfrm>
-            <a:off x="-1" y="0"/>
-            <a:ext cx="12188952" cy="6858000"/>
-          </a:xfrm>
-          <a:prstGeom prst="rect">
-            <a:avLst/>
-          </a:prstGeom>
-          <a:ln>
-            <a:noFill/>
-          </a:ln>
-        </p:spPr>
-        <p:style>
-          <a:lnRef idx="2">
-            <a:schemeClr val="accent1">
-              <a:shade val="50000"/>
-            </a:schemeClr>
-          </a:lnRef>
-          <a:fillRef idx="1">
-            <a:schemeClr val="accent1"/>
-          </a:fillRef>
-          <a:effectRef idx="0">
-            <a:schemeClr val="accent1"/>
-          </a:effectRef>
-          <a:fontRef idx="minor">
-            <a:schemeClr val="lt1"/>
-          </a:fontRef>
-        </p:style>
-        <p:txBody>
-          <a:bodyPr rtlCol="0" anchor="ctr"/>
-          <a:lstStyle/>
-          <a:p>
-            <a:pPr algn="ctr"/>
-            <a:endParaRPr lang="en-US"/>
-          </a:p>
-        </p:txBody>
-      </p:sp>
-      <p:sp>
-        <p:nvSpPr>
-          <p:cNvPr id="2" name="ZoneTexte 1">
-            <a:extLst>
-              <a:ext uri="{FF2B5EF4-FFF2-40B4-BE49-F238E27FC236}">
-                <a16:creationId xmlns:a16="http://schemas.microsoft.com/office/drawing/2014/main" id="{7A6497C8-582E-6576-9D0F-1A17F4E860F0}"/>
-              </a:ext>
-            </a:extLst>
-          </p:cNvPr>
-          <p:cNvSpPr txBox="1"/>
-          <p:nvPr/>
-        </p:nvSpPr>
-        <p:spPr>
-          <a:xfrm>
-            <a:off x="6335711" y="3014663"/>
-            <a:ext cx="5513979" cy="828747"/>
+            <a:off x="0" y="28876"/>
+            <a:ext cx="12192000" cy="4447371"/>
           </a:xfrm>
           <a:prstGeom prst="rect">
             <a:avLst/>
@@ -6307,85 +6526,167 @@
           <a:noFill/>
         </p:spPr>
         <p:txBody>
-          <a:bodyPr rot="0" spcFirstLastPara="0" vertOverflow="overflow" horzOverflow="overflow" vert="horz" lIns="91440" tIns="45720" rIns="91440" bIns="45720" numCol="1" spcCol="0" rtlCol="0" fromWordArt="0" anchor="b" anchorCtr="0" forceAA="0" compatLnSpc="1">
+          <a:bodyPr rot="0" spcFirstLastPara="0" vertOverflow="overflow" horzOverflow="overflow" vert="horz" wrap="square" lIns="91440" tIns="45720" rIns="91440" bIns="45720" numCol="1" spcCol="0" rtlCol="0" fromWordArt="0" anchor="t" anchorCtr="0" forceAA="0" compatLnSpc="1">
             <a:prstTxWarp prst="textNoShape">
               <a:avLst/>
             </a:prstTxWarp>
-            <a:normAutofit/>
+            <a:spAutoFit/>
           </a:bodyPr>
           <a:lstStyle/>
           <a:p>
+            <a:r>
+              <a:rPr lang="fr-CH" sz="4400" b="1">
+                <a:solidFill>
+                  <a:srgbClr val="C00000"/>
+                </a:solidFill>
+              </a:rPr>
+              <a:t>$_</a:t>
+            </a:r>
+            <a:r>
+              <a:rPr lang="fr-CH" sz="4400" b="1">
+                <a:solidFill>
+                  <a:srgbClr val="00B050"/>
+                </a:solidFill>
+              </a:rPr>
+              <a:t>.</a:t>
+            </a:r>
+            <a:r>
+              <a:rPr lang="fr-CH" sz="4400" b="1" err="1">
+                <a:solidFill>
+                  <a:srgbClr val="00B050"/>
+                </a:solidFill>
+              </a:rPr>
+              <a:t>Status</a:t>
+            </a:r>
+            <a:r>
+              <a:rPr lang="fr-CH" sz="4400" b="1">
+                <a:solidFill>
+                  <a:srgbClr val="00B050"/>
+                </a:solidFill>
+              </a:rPr>
+              <a:t> </a:t>
+            </a:r>
+            <a:endParaRPr lang="fr-FR" sz="4400">
+              <a:solidFill>
+                <a:srgbClr val="00B050"/>
+              </a:solidFill>
+            </a:endParaRPr>
+          </a:p>
+          <a:p>
+            <a:endParaRPr lang="fr-CH" sz="2600" b="1">
+              <a:solidFill>
+                <a:srgbClr val="00B050"/>
+              </a:solidFill>
+            </a:endParaRPr>
+          </a:p>
+          <a:p>
+            <a:pPr marL="285750" indent="-285750">
+              <a:lnSpc>
+                <a:spcPct val="150000"/>
+              </a:lnSpc>
+              <a:buFont typeface="Arial"/>
+              <a:buChar char="•"/>
+            </a:pPr>
+            <a:r>
+              <a:rPr lang="fr-CH" sz="2600" b="1">
+                <a:solidFill>
+                  <a:srgbClr val="C00000"/>
+                </a:solidFill>
+              </a:rPr>
+              <a:t>$_</a:t>
+            </a:r>
+          </a:p>
+          <a:p>
             <a:pPr>
               <a:lnSpc>
-                <a:spcPct val="90000"/>
+                <a:spcPct val="150000"/>
               </a:lnSpc>
-              <a:spcBef>
-                <a:spcPct val="0"/>
-              </a:spcBef>
-              <a:spcAft>
-                <a:spcPts val="600"/>
-              </a:spcAft>
             </a:pPr>
             <a:r>
-              <a:rPr lang="en-US" sz="5200" b="1" dirty="0" err="1">
-                <a:solidFill>
-                  <a:schemeClr val="bg1"/>
-                </a:solidFill>
-                <a:latin typeface="+mj-lt"/>
-                <a:ea typeface="+mj-ea"/>
-                <a:cs typeface="+mj-cs"/>
-              </a:rPr>
-              <a:t>Diagramme</a:t>
-            </a:r>
-            <a:r>
-              <a:rPr lang="en-US" sz="5200" b="1" dirty="0">
-                <a:solidFill>
-                  <a:schemeClr val="bg1"/>
-                </a:solidFill>
-                <a:latin typeface="+mj-lt"/>
-                <a:ea typeface="+mj-ea"/>
-                <a:cs typeface="+mj-cs"/>
-              </a:rPr>
-              <a:t> de flux</a:t>
-            </a:r>
-          </a:p>
-        </p:txBody>
-      </p:sp>
-      <p:pic>
-        <p:nvPicPr>
-          <p:cNvPr id="3" name="Image 2" descr="Une image contenant texte, diagramme, capture d’écran&#10;&#10;Le contenu généré par l’IA peut être incorrect.">
-            <a:extLst>
-              <a:ext uri="{FF2B5EF4-FFF2-40B4-BE49-F238E27FC236}">
-                <a16:creationId xmlns:a16="http://schemas.microsoft.com/office/drawing/2014/main" id="{BF980E98-CBAE-3359-B35B-0F0699894B7D}"/>
-              </a:ext>
-            </a:extLst>
-          </p:cNvPr>
-          <p:cNvPicPr>
-            <a:picLocks noChangeAspect="1"/>
-          </p:cNvPicPr>
-          <p:nvPr/>
-        </p:nvPicPr>
-        <p:blipFill>
-          <a:blip r:embed="rId2"/>
-          <a:srcRect t="7502" r="3" b="3"/>
-          <a:stretch>
-            <a:fillRect/>
-          </a:stretch>
-        </p:blipFill>
-        <p:spPr>
-          <a:xfrm>
-            <a:off x="1" y="10"/>
-            <a:ext cx="6005512" cy="6857990"/>
-          </a:xfrm>
-          <a:prstGeom prst="rect">
-            <a:avLst/>
-          </a:prstGeom>
-        </p:spPr>
-      </p:pic>
+              <a:rPr lang="fr-CH" sz="2600" b="1">
+                <a:solidFill>
+                  <a:srgbClr val="C00000"/>
+                </a:solidFill>
+              </a:rPr>
+              <a:t>Objet courant (il est sélectionné par la commande précédente)</a:t>
+            </a:r>
+          </a:p>
+          <a:p>
+            <a:pPr>
+              <a:lnSpc>
+                <a:spcPct val="150000"/>
+              </a:lnSpc>
+            </a:pPr>
+            <a:endParaRPr lang="fr-CH" sz="2600" b="1">
+              <a:solidFill>
+                <a:srgbClr val="C00000"/>
+              </a:solidFill>
+            </a:endParaRPr>
+          </a:p>
+          <a:p>
+            <a:pPr marL="285750" indent="-285750">
+              <a:lnSpc>
+                <a:spcPct val="150000"/>
+              </a:lnSpc>
+              <a:buFont typeface="Arial"/>
+              <a:buChar char="•"/>
+            </a:pPr>
+            <a:r>
+              <a:rPr lang="fr-CH" sz="2600" b="1">
+                <a:solidFill>
+                  <a:srgbClr val="00B050"/>
+                </a:solidFill>
+              </a:rPr>
+              <a:t>.</a:t>
+            </a:r>
+            <a:r>
+              <a:rPr lang="fr-CH" sz="2600" b="1" err="1">
+                <a:solidFill>
+                  <a:srgbClr val="00B050"/>
+                </a:solidFill>
+              </a:rPr>
+              <a:t>Status</a:t>
+            </a:r>
+            <a:endParaRPr lang="fr-CH" sz="2600" b="1">
+              <a:solidFill>
+                <a:srgbClr val="00B050"/>
+              </a:solidFill>
+            </a:endParaRPr>
+          </a:p>
+          <a:p>
+            <a:pPr>
+              <a:lnSpc>
+                <a:spcPct val="150000"/>
+              </a:lnSpc>
+            </a:pPr>
+            <a:r>
+              <a:rPr lang="fr-CH" sz="2600" b="1">
+                <a:solidFill>
+                  <a:srgbClr val="00B050"/>
+                </a:solidFill>
+                <a:ea typeface="+mn-lt"/>
+                <a:cs typeface="+mn-lt"/>
+              </a:rPr>
+              <a:t>Désigne la propriété spécifique de l'objet</a:t>
+            </a:r>
+            <a:r>
+              <a:rPr lang="fr-CH" sz="2600" b="1">
+                <a:solidFill>
+                  <a:srgbClr val="00B050"/>
+                </a:solidFill>
+              </a:rPr>
+              <a:t> pour les statuts des services</a:t>
+            </a:r>
+          </a:p>
+          <a:p>
+            <a:endParaRPr lang="fr-FR"/>
+          </a:p>
+        </p:txBody>
+      </p:sp>
     </p:spTree>
     <p:extLst>
       <p:ext uri="{BB962C8B-B14F-4D97-AF65-F5344CB8AC3E}">
-        <p14:creationId xmlns:p14="http://schemas.microsoft.com/office/powerpoint/2010/main" val="3055474279"/>
+        <p14:creationId xmlns:p14="http://schemas.microsoft.com/office/powerpoint/2010/main" val="279561989"/>
       </p:ext>
     </p:extLst>
   </p:cSld>
@@ -6423,12 +6724,72 @@
           <a:chExt cx="0" cy="0"/>
         </a:xfrm>
       </p:grpSpPr>
+      <p:sp useBgFill="1">
+        <p:nvSpPr>
+          <p:cNvPr id="8" name="Rectangle 7">
+            <a:extLst>
+              <a:ext uri="{FF2B5EF4-FFF2-40B4-BE49-F238E27FC236}">
+                <a16:creationId xmlns:a16="http://schemas.microsoft.com/office/drawing/2014/main" id="{32E62931-8EB4-42BB-BAAB-D8757BE66D8E}"/>
+              </a:ext>
+              <a:ext uri="{C183D7F6-B498-43B3-948B-1728B52AA6E4}">
+                <adec:decorative xmlns:adec="http://schemas.microsoft.com/office/drawing/2017/decorative" val="1"/>
+              </a:ext>
+            </a:extLst>
+          </p:cNvPr>
+          <p:cNvSpPr>
+            <a:spLocks noGrp="1" noRot="1" noChangeAspect="1" noMove="1" noResize="1" noEditPoints="1" noAdjustHandles="1" noChangeArrowheads="1" noChangeShapeType="1" noTextEdit="1"/>
+          </p:cNvSpPr>
+          <p:nvPr>
+            <p:extLst>
+              <p:ext uri="{386F3935-93C4-4BCD-93E2-E3B085C9AB24}">
+                <p16:designElem xmlns:p16="http://schemas.microsoft.com/office/powerpoint/2015/main" val="1"/>
+              </p:ext>
+            </p:extLst>
+          </p:nvPr>
+        </p:nvSpPr>
+        <p:spPr>
+          <a:xfrm>
+            <a:off x="-1" y="0"/>
+            <a:ext cx="12188952" cy="6858000"/>
+          </a:xfrm>
+          <a:prstGeom prst="rect">
+            <a:avLst/>
+          </a:prstGeom>
+          <a:ln>
+            <a:noFill/>
+          </a:ln>
+        </p:spPr>
+        <p:style>
+          <a:lnRef idx="2">
+            <a:schemeClr val="accent1">
+              <a:shade val="50000"/>
+            </a:schemeClr>
+          </a:lnRef>
+          <a:fillRef idx="1">
+            <a:schemeClr val="accent1"/>
+          </a:fillRef>
+          <a:effectRef idx="0">
+            <a:schemeClr val="accent1"/>
+          </a:effectRef>
+          <a:fontRef idx="minor">
+            <a:schemeClr val="lt1"/>
+          </a:fontRef>
+        </p:style>
+        <p:txBody>
+          <a:bodyPr rtlCol="0" anchor="ctr"/>
+          <a:lstStyle/>
+          <a:p>
+            <a:pPr algn="ctr"/>
+            <a:endParaRPr lang="en-US"/>
+          </a:p>
+        </p:txBody>
+      </p:sp>
       <p:sp>
         <p:nvSpPr>
           <p:cNvPr id="2" name="ZoneTexte 1">
             <a:extLst>
               <a:ext uri="{FF2B5EF4-FFF2-40B4-BE49-F238E27FC236}">
-                <a16:creationId xmlns:a16="http://schemas.microsoft.com/office/drawing/2014/main" id="{8B054583-9543-4AFF-4780-23DD1883B59F}"/>
+                <a16:creationId xmlns:a16="http://schemas.microsoft.com/office/drawing/2014/main" id="{7A6497C8-582E-6576-9D0F-1A17F4E860F0}"/>
               </a:ext>
             </a:extLst>
           </p:cNvPr>
@@ -6437,8 +6798,8 @@
         </p:nvSpPr>
         <p:spPr>
           <a:xfrm>
-            <a:off x="6803456" y="9045"/>
-            <a:ext cx="4957011" cy="769441"/>
+            <a:off x="6335711" y="3014663"/>
+            <a:ext cx="5513979" cy="828747"/>
           </a:xfrm>
           <a:prstGeom prst="rect">
             <a:avLst/>
@@ -6446,606 +6807,85 @@
           <a:noFill/>
         </p:spPr>
         <p:txBody>
-          <a:bodyPr wrap="square" rtlCol="0">
-            <a:spAutoFit/>
+          <a:bodyPr rot="0" spcFirstLastPara="0" vertOverflow="overflow" horzOverflow="overflow" vert="horz" lIns="91440" tIns="45720" rIns="91440" bIns="45720" numCol="1" spcCol="0" rtlCol="0" fromWordArt="0" anchor="b" anchorCtr="0" forceAA="0" compatLnSpc="1">
+            <a:prstTxWarp prst="textNoShape">
+              <a:avLst/>
+            </a:prstTxWarp>
+            <a:normAutofit/>
           </a:bodyPr>
           <a:lstStyle/>
           <a:p>
-            <a:r>
-              <a:rPr lang="fr-FR" sz="4400" b="1" dirty="0">
-                <a:solidFill>
-                  <a:schemeClr val="bg1"/>
-                </a:solidFill>
-              </a:rPr>
-              <a:t>Corrigé commenté</a:t>
-            </a:r>
-          </a:p>
-        </p:txBody>
-      </p:sp>
-      <p:sp>
-        <p:nvSpPr>
-          <p:cNvPr id="4" name="ZoneTexte 3">
-            <a:extLst>
-              <a:ext uri="{FF2B5EF4-FFF2-40B4-BE49-F238E27FC236}">
-                <a16:creationId xmlns:a16="http://schemas.microsoft.com/office/drawing/2014/main" id="{F5E19B1A-706F-76AB-8D26-539F8A47F69E}"/>
-              </a:ext>
-            </a:extLst>
-          </p:cNvPr>
-          <p:cNvSpPr txBox="1"/>
+            <a:pPr>
+              <a:lnSpc>
+                <a:spcPct val="90000"/>
+              </a:lnSpc>
+              <a:spcBef>
+                <a:spcPct val="0"/>
+              </a:spcBef>
+              <a:spcAft>
+                <a:spcPts val="600"/>
+              </a:spcAft>
+            </a:pPr>
+            <a:r>
+              <a:rPr lang="en-US" sz="5200" b="1" err="1">
+                <a:solidFill>
+                  <a:schemeClr val="bg1"/>
+                </a:solidFill>
+                <a:latin typeface="+mj-lt"/>
+                <a:ea typeface="+mj-ea"/>
+                <a:cs typeface="+mj-cs"/>
+              </a:rPr>
+              <a:t>Diagramme</a:t>
+            </a:r>
+            <a:r>
+              <a:rPr lang="en-US" sz="5200" b="1">
+                <a:solidFill>
+                  <a:schemeClr val="bg1"/>
+                </a:solidFill>
+                <a:latin typeface="+mj-lt"/>
+                <a:ea typeface="+mj-ea"/>
+                <a:cs typeface="+mj-cs"/>
+              </a:rPr>
+              <a:t> de flux</a:t>
+            </a:r>
+          </a:p>
+        </p:txBody>
+      </p:sp>
+      <p:pic>
+        <p:nvPicPr>
+          <p:cNvPr id="3" name="Image 2" descr="Une image contenant texte, diagramme, capture d’écran&#10;&#10;Le contenu généré par l’IA peut être incorrect.">
+            <a:extLst>
+              <a:ext uri="{FF2B5EF4-FFF2-40B4-BE49-F238E27FC236}">
+                <a16:creationId xmlns:a16="http://schemas.microsoft.com/office/drawing/2014/main" id="{BF980E98-CBAE-3359-B35B-0F0699894B7D}"/>
+              </a:ext>
+            </a:extLst>
+          </p:cNvPr>
+          <p:cNvPicPr>
+            <a:picLocks noChangeAspect="1"/>
+          </p:cNvPicPr>
           <p:nvPr/>
-        </p:nvSpPr>
+        </p:nvPicPr>
+        <p:blipFill>
+          <a:blip r:embed="rId2"/>
+          <a:srcRect t="7502" r="3" b="3"/>
+          <a:stretch>
+            <a:fillRect/>
+          </a:stretch>
+        </p:blipFill>
         <p:spPr>
           <a:xfrm>
-            <a:off x="0" y="769441"/>
-            <a:ext cx="5967663" cy="6740307"/>
+            <a:off x="1" y="10"/>
+            <a:ext cx="6005512" cy="6857990"/>
           </a:xfrm>
           <a:prstGeom prst="rect">
             <a:avLst/>
           </a:prstGeom>
-          <a:noFill/>
         </p:spPr>
-        <p:txBody>
-          <a:bodyPr wrap="square" rtlCol="0">
-            <a:spAutoFit/>
-          </a:bodyPr>
-          <a:lstStyle/>
-          <a:p>
-            <a:r>
-              <a:rPr lang="fr-CH" b="1" dirty="0">
-                <a:solidFill>
-                  <a:schemeClr val="bg1"/>
-                </a:solidFill>
-              </a:rPr>
-              <a:t>&gt;$services = une variable qui stock la cmd </a:t>
-            </a:r>
-            <a:r>
-              <a:rPr lang="fr-CH" b="1" dirty="0" err="1">
-                <a:solidFill>
-                  <a:schemeClr val="bg1"/>
-                </a:solidFill>
-              </a:rPr>
-              <a:t>Get</a:t>
-            </a:r>
-            <a:r>
-              <a:rPr lang="fr-CH" b="1" dirty="0">
-                <a:solidFill>
-                  <a:schemeClr val="bg1"/>
-                </a:solidFill>
-              </a:rPr>
-              <a:t>-Service</a:t>
-            </a:r>
-            <a:endParaRPr lang="fr-FR" dirty="0">
-              <a:solidFill>
-                <a:schemeClr val="bg1"/>
-              </a:solidFill>
-            </a:endParaRPr>
-          </a:p>
-          <a:p>
-            <a:endParaRPr lang="fr-CH" b="1" dirty="0">
-              <a:solidFill>
-                <a:schemeClr val="bg1"/>
-              </a:solidFill>
-            </a:endParaRPr>
-          </a:p>
-          <a:p>
-            <a:r>
-              <a:rPr lang="fr-CH" b="1" dirty="0">
-                <a:solidFill>
-                  <a:schemeClr val="bg1"/>
-                </a:solidFill>
-              </a:rPr>
-              <a:t>&gt;</a:t>
-            </a:r>
-            <a:r>
-              <a:rPr lang="fr-CH" b="1" dirty="0" err="1">
-                <a:solidFill>
-                  <a:schemeClr val="bg1"/>
-                </a:solidFill>
-              </a:rPr>
-              <a:t>Get</a:t>
-            </a:r>
-            <a:r>
-              <a:rPr lang="fr-CH" b="1" dirty="0">
-                <a:solidFill>
-                  <a:schemeClr val="bg1"/>
-                </a:solidFill>
-              </a:rPr>
-              <a:t>-Service interroge Windows et renvoie une  collection objets de type (</a:t>
-            </a:r>
-            <a:r>
-              <a:rPr lang="fr-CH" b="1" dirty="0" err="1">
-                <a:solidFill>
-                  <a:schemeClr val="bg1"/>
-                </a:solidFill>
-              </a:rPr>
-              <a:t>System.ServiceProcess</a:t>
-            </a:r>
-            <a:r>
-              <a:rPr lang="fr-CH" b="1" dirty="0">
-                <a:solidFill>
-                  <a:schemeClr val="bg1"/>
-                </a:solidFill>
-              </a:rPr>
-              <a:t>) Chaque Objet représente un Service</a:t>
-            </a:r>
-          </a:p>
-          <a:p>
-            <a:endParaRPr lang="fr-CH" dirty="0"/>
-          </a:p>
-          <a:p>
-            <a:r>
-              <a:rPr lang="fr-CH" b="1" dirty="0">
-                <a:solidFill>
-                  <a:schemeClr val="bg1"/>
-                </a:solidFill>
-              </a:rPr>
-              <a:t>&gt;Sur la deuxième ligne le symbole | envoie chaque élément de $service vers la commande </a:t>
-            </a:r>
-            <a:r>
-              <a:rPr lang="fr-CH" b="1" dirty="0" err="1">
-                <a:solidFill>
-                  <a:schemeClr val="bg1"/>
-                </a:solidFill>
-              </a:rPr>
-              <a:t>Where</a:t>
-            </a:r>
-            <a:r>
-              <a:rPr lang="fr-CH" b="1" dirty="0">
-                <a:solidFill>
-                  <a:schemeClr val="bg1"/>
-                </a:solidFill>
-              </a:rPr>
-              <a:t>-Object </a:t>
-            </a:r>
-          </a:p>
-          <a:p>
-            <a:endParaRPr lang="fr-CH" b="1" dirty="0">
-              <a:solidFill>
-                <a:schemeClr val="bg1"/>
-              </a:solidFill>
-            </a:endParaRPr>
-          </a:p>
-          <a:p>
-            <a:r>
-              <a:rPr lang="fr-CH" b="1" dirty="0">
-                <a:solidFill>
-                  <a:schemeClr val="bg1"/>
-                </a:solidFill>
-              </a:rPr>
-              <a:t>&gt;$_.</a:t>
-            </a:r>
-            <a:r>
-              <a:rPr lang="fr-CH" b="1" dirty="0" err="1">
-                <a:solidFill>
-                  <a:schemeClr val="bg1"/>
-                </a:solidFill>
-              </a:rPr>
-              <a:t>Status</a:t>
-            </a:r>
-            <a:r>
-              <a:rPr lang="fr-CH" b="1" dirty="0">
-                <a:solidFill>
-                  <a:schemeClr val="bg1"/>
-                </a:solidFill>
-              </a:rPr>
-              <a:t> accède à la propriété </a:t>
-            </a:r>
-            <a:r>
-              <a:rPr lang="fr-CH" b="1" dirty="0" err="1">
-                <a:solidFill>
-                  <a:schemeClr val="bg1"/>
-                </a:solidFill>
-              </a:rPr>
-              <a:t>Status</a:t>
-            </a:r>
-            <a:r>
-              <a:rPr lang="fr-CH" b="1" dirty="0">
-                <a:solidFill>
-                  <a:schemeClr val="bg1"/>
-                </a:solidFill>
-              </a:rPr>
-              <a:t> de cet objet</a:t>
-            </a:r>
-          </a:p>
-          <a:p>
-            <a:endParaRPr lang="fr-CH" b="1" dirty="0">
-              <a:solidFill>
-                <a:schemeClr val="bg1"/>
-              </a:solidFill>
-            </a:endParaRPr>
-          </a:p>
-          <a:p>
-            <a:r>
-              <a:rPr lang="fr-CH" b="1" dirty="0">
-                <a:solidFill>
-                  <a:schemeClr val="bg1"/>
-                </a:solidFill>
-              </a:rPr>
-              <a:t>&gt;-eq «</a:t>
-            </a:r>
-            <a:r>
-              <a:rPr lang="fr-CH" b="1" dirty="0" err="1">
-                <a:solidFill>
-                  <a:schemeClr val="bg1"/>
-                </a:solidFill>
-              </a:rPr>
-              <a:t>Stopped</a:t>
-            </a:r>
-            <a:r>
-              <a:rPr lang="fr-CH" b="1" dirty="0">
-                <a:solidFill>
-                  <a:schemeClr val="bg1"/>
-                </a:solidFill>
-              </a:rPr>
-              <a:t>»  -eq teste l’égalité entre 2 valeurs  ce filtre garde uniquement les services donc l’état est </a:t>
-            </a:r>
-            <a:r>
-              <a:rPr lang="fr-CH" b="1" dirty="0" err="1">
-                <a:solidFill>
-                  <a:schemeClr val="bg1"/>
-                </a:solidFill>
-              </a:rPr>
-              <a:t>Stopped</a:t>
-            </a:r>
-            <a:r>
-              <a:rPr lang="fr-CH" b="1" dirty="0">
-                <a:solidFill>
-                  <a:schemeClr val="bg1"/>
-                </a:solidFill>
-              </a:rPr>
-              <a:t> </a:t>
-            </a:r>
-          </a:p>
-          <a:p>
-            <a:endParaRPr lang="fr-CH" b="1" dirty="0">
-              <a:solidFill>
-                <a:schemeClr val="bg1"/>
-              </a:solidFill>
-            </a:endParaRPr>
-          </a:p>
-          <a:p>
-            <a:r>
-              <a:rPr lang="fr-CH" b="1" dirty="0">
-                <a:solidFill>
-                  <a:schemeClr val="bg1"/>
-                </a:solidFill>
-              </a:rPr>
-              <a:t>&gt;Write-Host écrit un message dans la console </a:t>
-            </a:r>
-          </a:p>
-          <a:p>
-            <a:r>
-              <a:rPr lang="fr-CH" b="1" dirty="0">
-                <a:solidFill>
-                  <a:schemeClr val="bg1"/>
-                </a:solidFill>
-              </a:rPr>
-              <a:t>«-</a:t>
-            </a:r>
-            <a:r>
-              <a:rPr lang="fr-CH" b="1" dirty="0" err="1">
-                <a:solidFill>
-                  <a:schemeClr val="bg1"/>
-                </a:solidFill>
-              </a:rPr>
-              <a:t>ForegroundColor</a:t>
-            </a:r>
-            <a:r>
-              <a:rPr lang="fr-CH" b="1" dirty="0">
-                <a:solidFill>
-                  <a:schemeClr val="bg1"/>
-                </a:solidFill>
-              </a:rPr>
-              <a:t> Yellow» mets ce texte en Jaune (a choix)</a:t>
-            </a:r>
-          </a:p>
-          <a:p>
-            <a:endParaRPr lang="fr-CH" b="1" dirty="0">
-              <a:solidFill>
-                <a:schemeClr val="bg1"/>
-              </a:solidFill>
-            </a:endParaRPr>
-          </a:p>
-          <a:p>
-            <a:r>
-              <a:rPr lang="fr-CH" b="1" dirty="0">
-                <a:solidFill>
-                  <a:schemeClr val="bg1"/>
-                </a:solidFill>
-              </a:rPr>
-              <a:t>&gt;La dernier ligne final Projet la liste qui est donc filtre avec Name et </a:t>
-            </a:r>
-            <a:r>
-              <a:rPr lang="fr-CH" b="1" dirty="0" err="1">
-                <a:solidFill>
-                  <a:schemeClr val="bg1"/>
-                </a:solidFill>
-              </a:rPr>
-              <a:t>Status</a:t>
-            </a:r>
-            <a:r>
-              <a:rPr lang="fr-CH" b="1" dirty="0">
-                <a:solidFill>
-                  <a:schemeClr val="bg1"/>
-                </a:solidFill>
-              </a:rPr>
-              <a:t> et le résultat s’affiche sous forme de tableau</a:t>
-            </a:r>
-          </a:p>
-          <a:p>
-            <a:endParaRPr lang="fr-CH" b="1" dirty="0">
-              <a:solidFill>
-                <a:schemeClr val="bg1"/>
-              </a:solidFill>
-            </a:endParaRPr>
-          </a:p>
-          <a:p>
-            <a:endParaRPr lang="fr-CH" b="1" dirty="0">
-              <a:solidFill>
-                <a:schemeClr val="bg1"/>
-              </a:solidFill>
-            </a:endParaRPr>
-          </a:p>
-        </p:txBody>
-      </p:sp>
-      <p:sp>
-        <p:nvSpPr>
-          <p:cNvPr id="5" name="ZoneTexte 4">
-            <a:extLst>
-              <a:ext uri="{FF2B5EF4-FFF2-40B4-BE49-F238E27FC236}">
-                <a16:creationId xmlns:a16="http://schemas.microsoft.com/office/drawing/2014/main" id="{70DE4B27-1A5A-059A-AE0B-DE0FB057D67D}"/>
-              </a:ext>
-            </a:extLst>
-          </p:cNvPr>
-          <p:cNvSpPr txBox="1"/>
-          <p:nvPr/>
-        </p:nvSpPr>
-        <p:spPr>
-          <a:xfrm>
-            <a:off x="5864993" y="2950676"/>
-            <a:ext cx="6327008" cy="2031325"/>
-          </a:xfrm>
-          <a:prstGeom prst="rect">
-            <a:avLst/>
-          </a:prstGeom>
-          <a:noFill/>
-        </p:spPr>
-        <p:txBody>
-          <a:bodyPr wrap="square" rtlCol="0">
-            <a:spAutoFit/>
-          </a:bodyPr>
-          <a:lstStyle/>
-          <a:p>
-            <a:r>
-              <a:rPr lang="en-US" b="1" dirty="0">
-                <a:solidFill>
-                  <a:srgbClr val="FF0000"/>
-                </a:solidFill>
-              </a:rPr>
-              <a:t>$services </a:t>
-            </a:r>
-            <a:r>
-              <a:rPr lang="en-US" b="1" dirty="0">
-                <a:solidFill>
-                  <a:schemeClr val="bg1"/>
-                </a:solidFill>
-              </a:rPr>
-              <a:t>= </a:t>
-            </a:r>
-            <a:r>
-              <a:rPr lang="en-US" b="1" dirty="0">
-                <a:solidFill>
-                  <a:srgbClr val="00B0F0"/>
-                </a:solidFill>
-              </a:rPr>
-              <a:t>Get-Service</a:t>
-            </a:r>
-          </a:p>
-          <a:p>
-            <a:endParaRPr lang="en-US" b="1" dirty="0">
-              <a:solidFill>
-                <a:schemeClr val="bg1"/>
-              </a:solidFill>
-            </a:endParaRPr>
-          </a:p>
-          <a:p>
-            <a:r>
-              <a:rPr lang="en-US" b="1" dirty="0">
-                <a:solidFill>
-                  <a:srgbClr val="FF0000"/>
-                </a:solidFill>
-              </a:rPr>
-              <a:t>$stopped </a:t>
-            </a:r>
-            <a:r>
-              <a:rPr lang="en-US" b="1" dirty="0">
-                <a:solidFill>
-                  <a:schemeClr val="bg1"/>
-                </a:solidFill>
-              </a:rPr>
-              <a:t>= </a:t>
-            </a:r>
-            <a:r>
-              <a:rPr lang="en-US" b="1" dirty="0">
-                <a:solidFill>
-                  <a:srgbClr val="FF0000"/>
-                </a:solidFill>
-              </a:rPr>
-              <a:t>$services </a:t>
-            </a:r>
-            <a:r>
-              <a:rPr lang="en-US" b="1" dirty="0">
-                <a:solidFill>
-                  <a:schemeClr val="bg1"/>
-                </a:solidFill>
-              </a:rPr>
-              <a:t>| </a:t>
-            </a:r>
-            <a:r>
-              <a:rPr lang="en-US" b="1" dirty="0">
-                <a:solidFill>
-                  <a:srgbClr val="00B0F0"/>
-                </a:solidFill>
-              </a:rPr>
-              <a:t>Where-Object</a:t>
-            </a:r>
-            <a:r>
-              <a:rPr lang="en-US" b="1" dirty="0">
-                <a:solidFill>
-                  <a:schemeClr val="bg1"/>
-                </a:solidFill>
-              </a:rPr>
-              <a:t> {</a:t>
-            </a:r>
-            <a:r>
-              <a:rPr lang="en-US" b="1" dirty="0">
-                <a:solidFill>
-                  <a:srgbClr val="FF0000"/>
-                </a:solidFill>
-              </a:rPr>
-              <a:t>$_.Status </a:t>
-            </a:r>
-            <a:r>
-              <a:rPr lang="en-US" b="1" dirty="0">
-                <a:solidFill>
-                  <a:schemeClr val="bg1"/>
-                </a:solidFill>
-              </a:rPr>
-              <a:t>-eq "Stopped"} </a:t>
-            </a:r>
-          </a:p>
-          <a:p>
-            <a:endParaRPr lang="en-US" b="1" dirty="0">
-              <a:solidFill>
-                <a:schemeClr val="bg1"/>
-              </a:solidFill>
-            </a:endParaRPr>
-          </a:p>
-          <a:p>
-            <a:r>
-              <a:rPr lang="en-US" b="1" dirty="0">
-                <a:solidFill>
-                  <a:srgbClr val="00B0F0"/>
-                </a:solidFill>
-              </a:rPr>
-              <a:t>Write-Host</a:t>
-            </a:r>
-            <a:r>
-              <a:rPr lang="en-US" b="1" dirty="0">
-                <a:solidFill>
-                  <a:schemeClr val="bg1"/>
-                </a:solidFill>
-              </a:rPr>
-              <a:t> "Services </a:t>
-            </a:r>
-            <a:r>
-              <a:rPr lang="en-US" b="1" dirty="0" err="1">
-                <a:solidFill>
-                  <a:schemeClr val="bg1"/>
-                </a:solidFill>
-              </a:rPr>
-              <a:t>arrêtés</a:t>
-            </a:r>
-            <a:r>
-              <a:rPr lang="en-US" b="1" dirty="0">
-                <a:solidFill>
-                  <a:schemeClr val="bg1"/>
-                </a:solidFill>
-              </a:rPr>
-              <a:t> :“ </a:t>
-            </a:r>
-            <a:r>
-              <a:rPr lang="fr-CH" b="1" dirty="0">
-                <a:solidFill>
-                  <a:srgbClr val="FFFF00"/>
-                </a:solidFill>
-              </a:rPr>
-              <a:t>-</a:t>
-            </a:r>
-            <a:r>
-              <a:rPr lang="fr-CH" b="1" dirty="0" err="1">
-                <a:solidFill>
-                  <a:srgbClr val="FFFF00"/>
-                </a:solidFill>
-              </a:rPr>
-              <a:t>ForegroundColor</a:t>
-            </a:r>
-            <a:r>
-              <a:rPr lang="fr-CH" b="1" dirty="0">
-                <a:solidFill>
-                  <a:srgbClr val="FFFF00"/>
-                </a:solidFill>
-              </a:rPr>
-              <a:t> </a:t>
-            </a:r>
-            <a:r>
-              <a:rPr lang="fr-CH" b="1" dirty="0">
-                <a:solidFill>
-                  <a:srgbClr val="7030A0"/>
-                </a:solidFill>
-              </a:rPr>
-              <a:t>Yellow</a:t>
-            </a:r>
-            <a:r>
-              <a:rPr lang="en-US" b="1" dirty="0">
-                <a:solidFill>
-                  <a:schemeClr val="bg1"/>
-                </a:solidFill>
-              </a:rPr>
-              <a:t> </a:t>
-            </a:r>
-            <a:r>
-              <a:rPr lang="en-US" b="1" dirty="0">
-                <a:solidFill>
-                  <a:srgbClr val="FF0000"/>
-                </a:solidFill>
-              </a:rPr>
-              <a:t>$stopped </a:t>
-            </a:r>
-            <a:r>
-              <a:rPr lang="en-US" b="1" dirty="0">
-                <a:solidFill>
-                  <a:schemeClr val="bg1"/>
-                </a:solidFill>
-              </a:rPr>
-              <a:t>| </a:t>
-            </a:r>
-            <a:r>
-              <a:rPr lang="en-US" b="1" dirty="0">
-                <a:solidFill>
-                  <a:srgbClr val="00B0F0"/>
-                </a:solidFill>
-              </a:rPr>
-              <a:t>Select-Object</a:t>
-            </a:r>
-            <a:r>
-              <a:rPr lang="en-US" b="1" dirty="0">
-                <a:solidFill>
-                  <a:schemeClr val="bg1"/>
-                </a:solidFill>
-              </a:rPr>
-              <a:t> </a:t>
-            </a:r>
-            <a:r>
-              <a:rPr lang="en-US" b="1" dirty="0">
-                <a:solidFill>
-                  <a:srgbClr val="7030A0"/>
-                </a:solidFill>
-              </a:rPr>
-              <a:t>Name, Status</a:t>
-            </a:r>
-            <a:endParaRPr lang="fr-CH" b="1" dirty="0">
-              <a:solidFill>
-                <a:srgbClr val="7030A0"/>
-              </a:solidFill>
-            </a:endParaRPr>
-          </a:p>
-        </p:txBody>
-      </p:sp>
+      </p:pic>
     </p:spTree>
     <p:extLst>
       <p:ext uri="{BB962C8B-B14F-4D97-AF65-F5344CB8AC3E}">
-        <p14:creationId xmlns:p14="http://schemas.microsoft.com/office/powerpoint/2010/main" val="499236404"/>
+        <p14:creationId xmlns:p14="http://schemas.microsoft.com/office/powerpoint/2010/main" val="3055474279"/>
       </p:ext>
     </p:extLst>
   </p:cSld>
@@ -7368,4 +7208,319 @@
     </a:ext>
   </a:extLst>
 </a:theme>
+</file>
+
+<file path=ppt/theme/theme2.xml><?xml version="1.0" encoding="utf-8"?>
+<a:theme xmlns:a="http://schemas.openxmlformats.org/drawingml/2006/main" name="Thème Office">
+  <a:themeElements>
+    <a:clrScheme name="Office">
+      <a:dk1>
+        <a:sysClr val="windowText" lastClr="000000"/>
+      </a:dk1>
+      <a:lt1>
+        <a:sysClr val="window" lastClr="FFFFFF"/>
+      </a:lt1>
+      <a:dk2>
+        <a:srgbClr val="0E2841"/>
+      </a:dk2>
+      <a:lt2>
+        <a:srgbClr val="E8E8E8"/>
+      </a:lt2>
+      <a:accent1>
+        <a:srgbClr val="156082"/>
+      </a:accent1>
+      <a:accent2>
+        <a:srgbClr val="E97132"/>
+      </a:accent2>
+      <a:accent3>
+        <a:srgbClr val="196B24"/>
+      </a:accent3>
+      <a:accent4>
+        <a:srgbClr val="0F9ED5"/>
+      </a:accent4>
+      <a:accent5>
+        <a:srgbClr val="A02B93"/>
+      </a:accent5>
+      <a:accent6>
+        <a:srgbClr val="4EA72E"/>
+      </a:accent6>
+      <a:hlink>
+        <a:srgbClr val="467886"/>
+      </a:hlink>
+      <a:folHlink>
+        <a:srgbClr val="96607D"/>
+      </a:folHlink>
+    </a:clrScheme>
+    <a:fontScheme name="Office">
+      <a:majorFont>
+        <a:latin typeface="Aptos Display" panose="02110004020202020204"/>
+        <a:ea typeface=""/>
+        <a:cs typeface=""/>
+        <a:font script="Jpan" typeface="游ゴシック Light"/>
+        <a:font script="Hang" typeface="맑은 고딕"/>
+        <a:font script="Hans" typeface="等线 Light"/>
+        <a:font script="Hant" typeface="新細明體"/>
+        <a:font script="Arab" typeface="Times New Roman"/>
+        <a:font script="Hebr" typeface="Times New Roman"/>
+        <a:font script="Thai" typeface="Angsana New"/>
+        <a:font script="Ethi" typeface="Nyala"/>
+        <a:font script="Beng" typeface="Vrinda"/>
+        <a:font script="Gujr" typeface="Shruti"/>
+        <a:font script="Khmr" typeface="MoolBoran"/>
+        <a:font script="Knda" typeface="Tunga"/>
+        <a:font script="Guru" typeface="Raavi"/>
+        <a:font script="Cans" typeface="Euphemia"/>
+        <a:font script="Cher" typeface="Plantagenet Cherokee"/>
+        <a:font script="Yiii" typeface="Microsoft Yi Baiti"/>
+        <a:font script="Tibt" typeface="Microsoft Himalaya"/>
+        <a:font script="Thaa" typeface="MV Boli"/>
+        <a:font script="Deva" typeface="Mangal"/>
+        <a:font script="Telu" typeface="Gautami"/>
+        <a:font script="Taml" typeface="Latha"/>
+        <a:font script="Syrc" typeface="Estrangelo Edessa"/>
+        <a:font script="Orya" typeface="Kalinga"/>
+        <a:font script="Mlym" typeface="Kartika"/>
+        <a:font script="Laoo" typeface="DokChampa"/>
+        <a:font script="Sinh" typeface="Iskoola Pota"/>
+        <a:font script="Mong" typeface="Mongolian Baiti"/>
+        <a:font script="Viet" typeface="Times New Roman"/>
+        <a:font script="Uigh" typeface="Microsoft Uighur"/>
+        <a:font script="Geor" typeface="Sylfaen"/>
+        <a:font script="Armn" typeface="Arial"/>
+        <a:font script="Bugi" typeface="Leelawadee UI"/>
+        <a:font script="Bopo" typeface="Microsoft JhengHei"/>
+        <a:font script="Java" typeface="Javanese Text"/>
+        <a:font script="Lisu" typeface="Segoe UI"/>
+        <a:font script="Mymr" typeface="Myanmar Text"/>
+        <a:font script="Nkoo" typeface="Ebrima"/>
+        <a:font script="Olck" typeface="Nirmala UI"/>
+        <a:font script="Osma" typeface="Ebrima"/>
+        <a:font script="Phag" typeface="Phagspa"/>
+        <a:font script="Syrn" typeface="Estrangelo Edessa"/>
+        <a:font script="Syrj" typeface="Estrangelo Edessa"/>
+        <a:font script="Syre" typeface="Estrangelo Edessa"/>
+        <a:font script="Sora" typeface="Nirmala UI"/>
+        <a:font script="Tale" typeface="Microsoft Tai Le"/>
+        <a:font script="Talu" typeface="Microsoft New Tai Lue"/>
+        <a:font script="Tfng" typeface="Ebrima"/>
+      </a:majorFont>
+      <a:minorFont>
+        <a:latin typeface="Aptos" panose="02110004020202020204"/>
+        <a:ea typeface=""/>
+        <a:cs typeface=""/>
+        <a:font script="Jpan" typeface="游ゴシック"/>
+        <a:font script="Hang" typeface="맑은 고딕"/>
+        <a:font script="Hans" typeface="等线"/>
+        <a:font script="Hant" typeface="新細明體"/>
+        <a:font script="Arab" typeface="Arial"/>
+        <a:font script="Hebr" typeface="Arial"/>
+        <a:font script="Thai" typeface="Cordia New"/>
+        <a:font script="Ethi" typeface="Nyala"/>
+        <a:font script="Beng" typeface="Vrinda"/>
+        <a:font script="Gujr" typeface="Shruti"/>
+        <a:font script="Khmr" typeface="DaunPenh"/>
+        <a:font script="Knda" typeface="Tunga"/>
+        <a:font script="Guru" typeface="Raavi"/>
+        <a:font script="Cans" typeface="Euphemia"/>
+        <a:font script="Cher" typeface="Plantagenet Cherokee"/>
+        <a:font script="Yiii" typeface="Microsoft Yi Baiti"/>
+        <a:font script="Tibt" typeface="Microsoft Himalaya"/>
+        <a:font script="Thaa" typeface="MV Boli"/>
+        <a:font script="Deva" typeface="Mangal"/>
+        <a:font script="Telu" typeface="Gautami"/>
+        <a:font script="Taml" typeface="Latha"/>
+        <a:font script="Syrc" typeface="Estrangelo Edessa"/>
+        <a:font script="Orya" typeface="Kalinga"/>
+        <a:font script="Mlym" typeface="Kartika"/>
+        <a:font script="Laoo" typeface="DokChampa"/>
+        <a:font script="Sinh" typeface="Iskoola Pota"/>
+        <a:font script="Mong" typeface="Mongolian Baiti"/>
+        <a:font script="Viet" typeface="Arial"/>
+        <a:font script="Uigh" typeface="Microsoft Uighur"/>
+        <a:font script="Geor" typeface="Sylfaen"/>
+        <a:font script="Armn" typeface="Arial"/>
+        <a:font script="Bugi" typeface="Leelawadee UI"/>
+        <a:font script="Bopo" typeface="Microsoft JhengHei"/>
+        <a:font script="Java" typeface="Javanese Text"/>
+        <a:font script="Lisu" typeface="Segoe UI"/>
+        <a:font script="Mymr" typeface="Myanmar Text"/>
+        <a:font script="Nkoo" typeface="Ebrima"/>
+        <a:font script="Olck" typeface="Nirmala UI"/>
+        <a:font script="Osma" typeface="Ebrima"/>
+        <a:font script="Phag" typeface="Phagspa"/>
+        <a:font script="Syrn" typeface="Estrangelo Edessa"/>
+        <a:font script="Syrj" typeface="Estrangelo Edessa"/>
+        <a:font script="Syre" typeface="Estrangelo Edessa"/>
+        <a:font script="Sora" typeface="Nirmala UI"/>
+        <a:font script="Tale" typeface="Microsoft Tai Le"/>
+        <a:font script="Talu" typeface="Microsoft New Tai Lue"/>
+        <a:font script="Tfng" typeface="Ebrima"/>
+      </a:minorFont>
+    </a:fontScheme>
+    <a:fmtScheme name="Office">
+      <a:fillStyleLst>
+        <a:solidFill>
+          <a:schemeClr val="phClr"/>
+        </a:solidFill>
+        <a:gradFill rotWithShape="1">
+          <a:gsLst>
+            <a:gs pos="0">
+              <a:schemeClr val="phClr">
+                <a:lumMod val="110000"/>
+                <a:satMod val="105000"/>
+                <a:tint val="67000"/>
+              </a:schemeClr>
+            </a:gs>
+            <a:gs pos="50000">
+              <a:schemeClr val="phClr">
+                <a:lumMod val="105000"/>
+                <a:satMod val="103000"/>
+                <a:tint val="73000"/>
+              </a:schemeClr>
+            </a:gs>
+            <a:gs pos="100000">
+              <a:schemeClr val="phClr">
+                <a:lumMod val="105000"/>
+                <a:satMod val="109000"/>
+                <a:tint val="81000"/>
+              </a:schemeClr>
+            </a:gs>
+          </a:gsLst>
+          <a:lin ang="5400000" scaled="0"/>
+        </a:gradFill>
+        <a:gradFill rotWithShape="1">
+          <a:gsLst>
+            <a:gs pos="0">
+              <a:schemeClr val="phClr">
+                <a:satMod val="103000"/>
+                <a:lumMod val="102000"/>
+                <a:tint val="94000"/>
+              </a:schemeClr>
+            </a:gs>
+            <a:gs pos="50000">
+              <a:schemeClr val="phClr">
+                <a:satMod val="110000"/>
+                <a:lumMod val="100000"/>
+                <a:shade val="100000"/>
+              </a:schemeClr>
+            </a:gs>
+            <a:gs pos="100000">
+              <a:schemeClr val="phClr">
+                <a:lumMod val="99000"/>
+                <a:satMod val="120000"/>
+                <a:shade val="78000"/>
+              </a:schemeClr>
+            </a:gs>
+          </a:gsLst>
+          <a:lin ang="5400000" scaled="0"/>
+        </a:gradFill>
+      </a:fillStyleLst>
+      <a:lnStyleLst>
+        <a:ln w="12700" cap="flat" cmpd="sng" algn="ctr">
+          <a:solidFill>
+            <a:schemeClr val="phClr"/>
+          </a:solidFill>
+          <a:prstDash val="solid"/>
+          <a:miter lim="800000"/>
+        </a:ln>
+        <a:ln w="19050" cap="flat" cmpd="sng" algn="ctr">
+          <a:solidFill>
+            <a:schemeClr val="phClr"/>
+          </a:solidFill>
+          <a:prstDash val="solid"/>
+          <a:miter lim="800000"/>
+        </a:ln>
+        <a:ln w="25400" cap="flat" cmpd="sng" algn="ctr">
+          <a:solidFill>
+            <a:schemeClr val="phClr"/>
+          </a:solidFill>
+          <a:prstDash val="solid"/>
+          <a:miter lim="800000"/>
+        </a:ln>
+      </a:lnStyleLst>
+      <a:effectStyleLst>
+        <a:effectStyle>
+          <a:effectLst/>
+        </a:effectStyle>
+        <a:effectStyle>
+          <a:effectLst/>
+        </a:effectStyle>
+        <a:effectStyle>
+          <a:effectLst>
+            <a:outerShdw blurRad="57150" dist="19050" dir="5400000" algn="ctr" rotWithShape="0">
+              <a:srgbClr val="000000">
+                <a:alpha val="63000"/>
+              </a:srgbClr>
+            </a:outerShdw>
+          </a:effectLst>
+        </a:effectStyle>
+      </a:effectStyleLst>
+      <a:bgFillStyleLst>
+        <a:solidFill>
+          <a:schemeClr val="phClr"/>
+        </a:solidFill>
+        <a:solidFill>
+          <a:schemeClr val="phClr">
+            <a:tint val="95000"/>
+            <a:satMod val="170000"/>
+          </a:schemeClr>
+        </a:solidFill>
+        <a:gradFill rotWithShape="1">
+          <a:gsLst>
+            <a:gs pos="0">
+              <a:schemeClr val="phClr">
+                <a:tint val="93000"/>
+                <a:satMod val="150000"/>
+                <a:shade val="98000"/>
+                <a:lumMod val="102000"/>
+              </a:schemeClr>
+            </a:gs>
+            <a:gs pos="50000">
+              <a:schemeClr val="phClr">
+                <a:tint val="98000"/>
+                <a:satMod val="130000"/>
+                <a:shade val="90000"/>
+                <a:lumMod val="103000"/>
+              </a:schemeClr>
+            </a:gs>
+            <a:gs pos="100000">
+              <a:schemeClr val="phClr">
+                <a:shade val="63000"/>
+                <a:satMod val="120000"/>
+              </a:schemeClr>
+            </a:gs>
+          </a:gsLst>
+          <a:lin ang="5400000" scaled="0"/>
+        </a:gradFill>
+      </a:bgFillStyleLst>
+    </a:fmtScheme>
+  </a:themeElements>
+  <a:objectDefaults>
+    <a:lnDef>
+      <a:spPr/>
+      <a:bodyPr/>
+      <a:lstStyle/>
+      <a:style>
+        <a:lnRef idx="2">
+          <a:schemeClr val="accent1"/>
+        </a:lnRef>
+        <a:fillRef idx="0">
+          <a:schemeClr val="accent1"/>
+        </a:fillRef>
+        <a:effectRef idx="1">
+          <a:schemeClr val="accent1"/>
+        </a:effectRef>
+        <a:fontRef idx="minor">
+          <a:schemeClr val="tx1"/>
+        </a:fontRef>
+      </a:style>
+    </a:lnDef>
+  </a:objectDefaults>
+  <a:extraClrSchemeLst/>
+  <a:extLst>
+    <a:ext uri="{05A4C25C-085E-4340-85A3-A5531E510DB2}">
+      <thm15:themeFamily xmlns:thm15="http://schemas.microsoft.com/office/thememl/2012/main" name="Office Theme" id="{2E142A2C-CD16-42D6-873A-C26D2A0506FA}" vid="{1BDDFF52-6CD6-40A5-AB3C-68EB2F1E4D0A}"/>
+    </a:ext>
+  </a:extLst>
+</a:theme>
 </file>